--- a/meetings/我/6.2.pptx
+++ b/meetings/我/6.2.pptx
@@ -5,12 +5,12 @@
     <p:sldMasterId id="2147483648" r:id="rId1"/>
   </p:sldMasterIdLst>
   <p:notesMasterIdLst>
-    <p:notesMasterId r:id="rId6"/>
+    <p:notesMasterId r:id="rId4"/>
   </p:notesMasterIdLst>
   <p:sldIdLst>
     <p:sldId id="256" r:id="rId3"/>
-    <p:sldId id="267" r:id="rId4"/>
-    <p:sldId id="268" r:id="rId5"/>
+    <p:sldId id="267" r:id="rId5"/>
+    <p:sldId id="268" r:id="rId6"/>
     <p:sldId id="269" r:id="rId7"/>
     <p:sldId id="270" r:id="rId8"/>
     <p:sldId id="284" r:id="rId9"/>
@@ -266,39 +266,39 @@
           <a:p>
             <a:pPr lvl="0"/>
             <a:r>
-              <a:rPr lang="zh-CN" altLang="en-US" smtClean="0"/>
+              <a:rPr lang="zh-CN" altLang="en-US"/>
               <a:t>单击此处编辑母版文本样式</a:t>
             </a:r>
-            <a:endParaRPr lang="zh-CN" altLang="en-US" smtClean="0"/>
+            <a:endParaRPr lang="zh-CN" altLang="en-US"/>
           </a:p>
           <a:p>
             <a:pPr lvl="1"/>
             <a:r>
-              <a:rPr lang="zh-CN" altLang="en-US" smtClean="0"/>
+              <a:rPr lang="zh-CN" altLang="en-US"/>
               <a:t>第二级</a:t>
             </a:r>
-            <a:endParaRPr lang="zh-CN" altLang="en-US" smtClean="0"/>
+            <a:endParaRPr lang="zh-CN" altLang="en-US"/>
           </a:p>
           <a:p>
             <a:pPr lvl="2"/>
             <a:r>
-              <a:rPr lang="zh-CN" altLang="en-US" smtClean="0"/>
+              <a:rPr lang="zh-CN" altLang="en-US"/>
               <a:t>第三级</a:t>
             </a:r>
-            <a:endParaRPr lang="zh-CN" altLang="en-US" smtClean="0"/>
+            <a:endParaRPr lang="zh-CN" altLang="en-US"/>
           </a:p>
           <a:p>
             <a:pPr lvl="3"/>
             <a:r>
-              <a:rPr lang="zh-CN" altLang="en-US" smtClean="0"/>
+              <a:rPr lang="zh-CN" altLang="en-US"/>
               <a:t>第四级</a:t>
             </a:r>
-            <a:endParaRPr lang="zh-CN" altLang="en-US" smtClean="0"/>
+            <a:endParaRPr lang="zh-CN" altLang="en-US"/>
           </a:p>
           <a:p>
             <a:pPr lvl="4"/>
             <a:r>
-              <a:rPr lang="zh-CN" altLang="en-US" smtClean="0"/>
+              <a:rPr lang="zh-CN" altLang="en-US"/>
               <a:t>第五级</a:t>
             </a:r>
             <a:endParaRPr lang="zh-CN" altLang="en-US"/>
@@ -477,12 +477,175 @@
         <p:cNvGrpSpPr/>
         <p:nvPr/>
       </p:nvGrpSpPr>
-      <p:grpSpPr/>
+      <p:grpSpPr>
+        <a:xfrm>
+          <a:off x="0" y="0"/>
+          <a:ext cx="0" cy="0"/>
+          <a:chOff x="0" y="0"/>
+          <a:chExt cx="0" cy="0"/>
+        </a:xfrm>
+      </p:grpSpPr>
       <p:sp>
         <p:nvSpPr>
           <p:cNvPr id="2" name="幻灯片图像占位符 1"/>
           <p:cNvSpPr>
+            <a:spLocks noGrp="1" noRot="1" noChangeAspect="1"/>
+          </p:cNvSpPr>
+          <p:nvPr>
+            <p:ph type="sldImg"/>
+          </p:nvPr>
+        </p:nvSpPr>
+        <p:spPr/>
+      </p:sp>
+      <p:sp>
+        <p:nvSpPr>
+          <p:cNvPr id="3" name="备注占位符 2"/>
+          <p:cNvSpPr>
             <a:spLocks noGrp="1"/>
+          </p:cNvSpPr>
+          <p:nvPr>
+            <p:ph type="body" idx="1"/>
+          </p:nvPr>
+        </p:nvSpPr>
+        <p:spPr/>
+        <p:txBody>
+          <a:bodyPr/>
+          <a:lstStyle/>
+          <a:p>
+            <a:endParaRPr kumimoji="1" lang="zh-CN" altLang="en-US" dirty="0"/>
+          </a:p>
+        </p:txBody>
+      </p:sp>
+      <p:sp>
+        <p:nvSpPr>
+          <p:cNvPr id="4" name="灯片编号占位符 3"/>
+          <p:cNvSpPr>
+            <a:spLocks noGrp="1"/>
+          </p:cNvSpPr>
+          <p:nvPr>
+            <p:ph type="sldNum" sz="quarter" idx="5"/>
+          </p:nvPr>
+        </p:nvSpPr>
+        <p:spPr/>
+        <p:txBody>
+          <a:bodyPr/>
+          <a:lstStyle/>
+          <a:p>
+            <a:fld id="{A6837353-30EB-4A48-80EB-173D804AEFBD}" type="slidenum">
+              <a:rPr lang="zh-CN" altLang="en-US" smtClean="0"/>
+            </a:fld>
+            <a:endParaRPr lang="zh-CN" altLang="en-US"/>
+          </a:p>
+        </p:txBody>
+      </p:sp>
+    </p:spTree>
+  </p:cSld>
+  <p:clrMapOvr>
+    <a:masterClrMapping/>
+  </p:clrMapOvr>
+</p:notes>
+</file>
+
+<file path=ppt/notesSlides/notesSlide10.xml><?xml version="1.0" encoding="utf-8"?>
+<p:notes xmlns:a="http://schemas.openxmlformats.org/drawingml/2006/main" xmlns:r="http://schemas.openxmlformats.org/officeDocument/2006/relationships" xmlns:p="http://schemas.openxmlformats.org/presentationml/2006/main">
+  <p:cSld>
+    <p:spTree>
+      <p:nvGrpSpPr>
+        <p:cNvPr id="1" name=""/>
+        <p:cNvGrpSpPr/>
+        <p:nvPr/>
+      </p:nvGrpSpPr>
+      <p:grpSpPr>
+        <a:xfrm>
+          <a:off x="0" y="0"/>
+          <a:ext cx="0" cy="0"/>
+          <a:chOff x="0" y="0"/>
+          <a:chExt cx="0" cy="0"/>
+        </a:xfrm>
+      </p:grpSpPr>
+      <p:sp>
+        <p:nvSpPr>
+          <p:cNvPr id="2" name="幻灯片图像占位符 1"/>
+          <p:cNvSpPr>
+            <a:spLocks noGrp="1" noRot="1" noChangeAspect="1"/>
+          </p:cNvSpPr>
+          <p:nvPr>
+            <p:ph type="sldImg"/>
+          </p:nvPr>
+        </p:nvSpPr>
+        <p:spPr/>
+      </p:sp>
+      <p:sp>
+        <p:nvSpPr>
+          <p:cNvPr id="3" name="备注占位符 2"/>
+          <p:cNvSpPr>
+            <a:spLocks noGrp="1"/>
+          </p:cNvSpPr>
+          <p:nvPr>
+            <p:ph type="body" idx="1"/>
+          </p:nvPr>
+        </p:nvSpPr>
+        <p:spPr/>
+        <p:txBody>
+          <a:bodyPr/>
+          <a:lstStyle/>
+          <a:p>
+            <a:endParaRPr kumimoji="1" lang="zh-CN" altLang="en-US" dirty="0"/>
+          </a:p>
+        </p:txBody>
+      </p:sp>
+      <p:sp>
+        <p:nvSpPr>
+          <p:cNvPr id="4" name="灯片编号占位符 3"/>
+          <p:cNvSpPr>
+            <a:spLocks noGrp="1"/>
+          </p:cNvSpPr>
+          <p:nvPr>
+            <p:ph type="sldNum" sz="quarter" idx="5"/>
+          </p:nvPr>
+        </p:nvSpPr>
+        <p:spPr/>
+        <p:txBody>
+          <a:bodyPr/>
+          <a:lstStyle/>
+          <a:p>
+            <a:fld id="{A6837353-30EB-4A48-80EB-173D804AEFBD}" type="slidenum">
+              <a:rPr lang="zh-CN" altLang="en-US" smtClean="0"/>
+            </a:fld>
+            <a:endParaRPr lang="zh-CN" altLang="en-US"/>
+          </a:p>
+        </p:txBody>
+      </p:sp>
+    </p:spTree>
+  </p:cSld>
+  <p:clrMapOvr>
+    <a:masterClrMapping/>
+  </p:clrMapOvr>
+</p:notes>
+</file>
+
+<file path=ppt/notesSlides/notesSlide11.xml><?xml version="1.0" encoding="utf-8"?>
+<p:notes xmlns:a="http://schemas.openxmlformats.org/drawingml/2006/main" xmlns:r="http://schemas.openxmlformats.org/officeDocument/2006/relationships" xmlns:p="http://schemas.openxmlformats.org/presentationml/2006/main">
+  <p:cSld>
+    <p:spTree>
+      <p:nvGrpSpPr>
+        <p:cNvPr id="1" name=""/>
+        <p:cNvGrpSpPr/>
+        <p:nvPr/>
+      </p:nvGrpSpPr>
+      <p:grpSpPr>
+        <a:xfrm>
+          <a:off x="0" y="0"/>
+          <a:ext cx="0" cy="0"/>
+          <a:chOff x="0" y="0"/>
+          <a:chExt cx="0" cy="0"/>
+        </a:xfrm>
+      </p:grpSpPr>
+      <p:sp>
+        <p:nvSpPr>
+          <p:cNvPr id="2" name="幻灯片图像占位符 1"/>
+          <p:cNvSpPr>
+            <a:spLocks noGrp="1" noRot="1" noChangeAspect="1"/>
           </p:cNvSpPr>
           <p:nvPr>
             <p:ph type="sldImg" idx="2"/>
@@ -503,94 +666,341 @@
         <p:spPr/>
         <p:txBody>
           <a:bodyPr/>
-          <a:p>
-            <a:r>
-              <a:rPr lang="zh-CN" altLang="en-US"/>
-              <a:t>近的</a:t>
-            </a:r>
-            <a:r>
-              <a:rPr lang="en-US" altLang="zh-CN"/>
-              <a:t>decay</a:t>
-            </a:r>
-            <a:r>
-              <a:rPr lang="zh-CN" altLang="en-US"/>
-              <a:t>小，远的</a:t>
-            </a:r>
-            <a:r>
-              <a:rPr lang="en-US" altLang="zh-CN"/>
-              <a:t>decay</a:t>
-            </a:r>
-            <a:r>
-              <a:rPr lang="zh-CN" altLang="en-US"/>
-              <a:t>多。</a:t>
-            </a:r>
-            <a:br>
-              <a:rPr lang="zh-CN" altLang="en-US"/>
-            </a:br>
-            <a:r>
-              <a:rPr lang="zh-CN" altLang="en-US"/>
-              <a:t>单位是不是错了？</a:t>
-            </a:r>
-            <a:br>
-              <a:rPr lang="zh-CN" altLang="en-US"/>
-            </a:br>
-            <a:r>
-              <a:rPr lang="zh-CN" altLang="en-US"/>
-              <a:t>初始设置只有</a:t>
-            </a:r>
-            <a:r>
-              <a:rPr lang="en-US" altLang="zh-CN"/>
-              <a:t>reservoir</a:t>
-            </a:r>
-            <a:r>
-              <a:rPr lang="zh-CN" altLang="en-US"/>
-              <a:t>是</a:t>
-            </a:r>
-            <a:r>
-              <a:rPr lang="en-US" altLang="zh-CN"/>
-              <a:t>1</a:t>
-            </a:r>
-            <a:r>
-              <a:rPr lang="zh-CN" altLang="en-US"/>
-              <a:t>，其他都是</a:t>
-            </a:r>
-            <a:r>
-              <a:rPr lang="en-US" altLang="zh-CN"/>
-              <a:t>0</a:t>
-            </a:r>
-            <a:r>
-              <a:rPr lang="zh-CN" altLang="en-US"/>
-              <a:t>，有</a:t>
-            </a:r>
-            <a:r>
-              <a:rPr lang="en-US" altLang="zh-CN"/>
-              <a:t>warm-up</a:t>
-            </a:r>
-            <a:r>
-              <a:rPr lang="zh-CN" altLang="en-US"/>
-              <a:t>。我自己的要不要</a:t>
-            </a:r>
-            <a:r>
-              <a:rPr lang="en-US" altLang="zh-CN">
-                <a:sym typeface="+mn-ea"/>
-              </a:rPr>
-              <a:t>warm-up</a:t>
-            </a:r>
-            <a:r>
-              <a:rPr lang="zh-CN" altLang="en-US">
-                <a:sym typeface="+mn-ea"/>
-              </a:rPr>
-              <a:t>？但是实际上，输入的是确定的，可能</a:t>
-            </a:r>
-            <a:r>
-              <a:rPr lang="zh-CN" altLang="en-US">
-                <a:sym typeface="+mn-ea"/>
-              </a:rPr>
-              <a:t>不用？</a:t>
-            </a:r>
-            <a:endParaRPr lang="zh-CN" altLang="en-US">
-              <a:sym typeface="+mn-ea"/>
-            </a:endParaRPr>
+          <a:lstStyle/>
+          <a:p>
+            <a:r>
+              <a:rPr lang="zh-CN" altLang="en-US" dirty="0"/>
+              <a:t>现在大概的思路是：</a:t>
+            </a:r>
+            <a:endParaRPr lang="zh-CN" altLang="en-US" dirty="0"/>
+          </a:p>
+          <a:p>
+            <a:endParaRPr lang="en-US" altLang="zh-CN" dirty="0"/>
+          </a:p>
+          <a:p>
+            <a:r>
+              <a:rPr lang="zh-CN" altLang="en-US" dirty="0"/>
+              <a:t>我拿到3个</a:t>
+            </a:r>
+            <a:r>
+              <a:rPr lang="en-US" altLang="zh-CN" dirty="0"/>
+              <a:t>DMA</a:t>
+            </a:r>
+            <a:endParaRPr lang="en-US" altLang="zh-CN" dirty="0"/>
+          </a:p>
+          <a:p>
+            <a:r>
+              <a:rPr lang="zh-CN" altLang="en-US" dirty="0"/>
+              <a:t>1. 明确水力不用校准，默认正确</a:t>
+            </a:r>
+            <a:endParaRPr lang="zh-CN" altLang="en-US" dirty="0"/>
+          </a:p>
+          <a:p>
+            <a:r>
+              <a:rPr lang="zh-CN" altLang="en-US" dirty="0"/>
+              <a:t>2. 不考虑</a:t>
+            </a:r>
+            <a:r>
+              <a:rPr lang="en-US" altLang="zh-CN" dirty="0"/>
+              <a:t>TOC, DBP, </a:t>
+            </a:r>
+            <a:r>
+              <a:rPr lang="zh-CN" altLang="en-US" dirty="0"/>
+              <a:t>生物膜的影响？</a:t>
+            </a:r>
+            <a:endParaRPr lang="zh-CN" altLang="en-US" dirty="0"/>
+          </a:p>
+          <a:p>
+            <a:r>
+              <a:rPr lang="zh-CN" altLang="en-US" dirty="0"/>
+              <a:t>3. 入口监测器已经把它测出来了，直接输入（</a:t>
+            </a:r>
+            <a:r>
+              <a:rPr lang="en-US" altLang="zh-CN" dirty="0"/>
+              <a:t>getting started-</a:t>
+            </a:r>
+            <a:r>
+              <a:rPr lang="zh-CN" altLang="en-US" dirty="0"/>
+              <a:t>归一性）</a:t>
+            </a:r>
+            <a:endParaRPr lang="zh-CN" altLang="en-US" dirty="0"/>
+          </a:p>
+          <a:p>
+            <a:r>
+              <a:rPr lang="zh-CN" altLang="en-US" dirty="0"/>
+              <a:t>4. 衰减：</a:t>
+            </a:r>
+            <a:r>
+              <a:rPr lang="en-US" altLang="zh-CN" dirty="0"/>
+              <a:t>kw, kb, </a:t>
+            </a:r>
+            <a:r>
+              <a:rPr lang="zh-CN" altLang="en-US" dirty="0"/>
+              <a:t>一阶衰减</a:t>
+            </a:r>
+            <a:endParaRPr lang="zh-CN" altLang="en-US" dirty="0"/>
+          </a:p>
+          <a:p>
+            <a:endParaRPr lang="en-US" altLang="zh-CN" dirty="0"/>
+          </a:p>
+          <a:p>
+            <a:endParaRPr lang="en-US" altLang="zh-CN" dirty="0"/>
+          </a:p>
+          <a:p>
+            <a:r>
+              <a:rPr lang="zh-CN" altLang="en-US" dirty="0"/>
+              <a:t>根据先验经验，知道</a:t>
+            </a:r>
+            <a:r>
+              <a:rPr lang="en-US" altLang="zh-CN" dirty="0"/>
+              <a:t>kb, kw</a:t>
+            </a:r>
+            <a:r>
+              <a:rPr lang="zh-CN" altLang="en-US" dirty="0"/>
+              <a:t>范围，然后</a:t>
+            </a:r>
+            <a:r>
+              <a:rPr lang="en-US" altLang="zh-CN" dirty="0"/>
+              <a:t>simulate，</a:t>
+            </a:r>
+            <a:r>
+              <a:rPr lang="zh-CN" altLang="en-US" dirty="0"/>
+              <a:t>试出来一系列(</a:t>
+            </a:r>
+            <a:r>
+              <a:rPr lang="en-US" altLang="zh-CN" dirty="0"/>
+              <a:t>kb, kw), </a:t>
+            </a:r>
+            <a:r>
+              <a:rPr lang="zh-CN" altLang="en-US" dirty="0"/>
+              <a:t>把</a:t>
+            </a:r>
+            <a:r>
+              <a:rPr lang="en-US" altLang="zh-CN" dirty="0"/>
+              <a:t>Csim</a:t>
+            </a:r>
+            <a:r>
+              <a:rPr lang="zh-CN" altLang="en-US" dirty="0"/>
+              <a:t>和</a:t>
+            </a:r>
+            <a:r>
+              <a:rPr lang="en-US" altLang="zh-CN" dirty="0"/>
+              <a:t>Cobs</a:t>
+            </a:r>
+            <a:r>
+              <a:rPr lang="zh-CN" altLang="en-US" dirty="0"/>
+              <a:t>比较，得出合适的</a:t>
+            </a:r>
+            <a:r>
+              <a:rPr lang="en-US" altLang="zh-CN" dirty="0"/>
+              <a:t>Csim</a:t>
+            </a:r>
+            <a:r>
+              <a:rPr lang="zh-CN" altLang="en-US" dirty="0"/>
+              <a:t>和合适的(</a:t>
+            </a:r>
+            <a:r>
+              <a:rPr lang="en-US" altLang="zh-CN" dirty="0"/>
+              <a:t>kb, kw)</a:t>
+            </a:r>
+            <a:r>
+              <a:rPr lang="zh-CN" altLang="en-US" dirty="0"/>
+              <a:t>的区间，也能得出在合理范围内的概率-</a:t>
+            </a:r>
+            <a:r>
+              <a:rPr lang="en-US" altLang="zh-CN" dirty="0"/>
+              <a:t>Monte Carlo ensemble, GLUE(</a:t>
+            </a:r>
+            <a:r>
+              <a:rPr lang="zh-CN" altLang="en-US" dirty="0"/>
+              <a:t>贝叶斯还没看不确定)</a:t>
+            </a:r>
+            <a:endParaRPr lang="zh-CN" altLang="en-US" dirty="0"/>
+          </a:p>
+          <a:p>
+            <a:endParaRPr lang="en-US" altLang="zh-CN" dirty="0"/>
+          </a:p>
+          <a:p>
+            <a:r>
+              <a:rPr lang="zh-CN" altLang="en-US" dirty="0"/>
+              <a:t>监测点（3输入+5拟合+2校验）</a:t>
+            </a:r>
+            <a:endParaRPr lang="zh-CN" altLang="en-US" dirty="0"/>
+          </a:p>
+          <a:p>
+            <a:endParaRPr lang="en-US" altLang="zh-CN" dirty="0"/>
+          </a:p>
+          <a:p>
+            <a:r>
+              <a:rPr lang="zh-CN" altLang="en-US" dirty="0"/>
+              <a:t>三个</a:t>
+            </a:r>
+            <a:r>
+              <a:rPr lang="en-US" altLang="zh-CN" dirty="0"/>
+              <a:t>DMA（ABC），differ in pipe material and age（Hallam, 2002），</a:t>
+            </a:r>
+            <a:r>
+              <a:rPr lang="zh-CN" altLang="en-US" dirty="0"/>
+              <a:t>得出的结论可比较</a:t>
+            </a:r>
+            <a:endParaRPr lang="zh-CN" altLang="en-US" dirty="0"/>
+          </a:p>
+          <a:p>
+            <a:endParaRPr lang="en-US" altLang="zh-CN" dirty="0"/>
+          </a:p>
+          <a:p>
+            <a:endParaRPr lang="en-US" altLang="zh-CN" dirty="0"/>
+          </a:p>
+          <a:p>
+            <a:r>
+              <a:rPr lang="en-US" altLang="zh-CN" dirty="0"/>
+              <a:t>？</a:t>
+            </a:r>
+            <a:endParaRPr lang="en-US" altLang="zh-CN" dirty="0"/>
+          </a:p>
+          <a:p>
+            <a:r>
+              <a:rPr lang="en-US" altLang="zh-CN" dirty="0"/>
+              <a:t>DMA</a:t>
+            </a:r>
+            <a:r>
+              <a:rPr lang="zh-CN" altLang="en-US" dirty="0"/>
+              <a:t>是否同源-</a:t>
+            </a:r>
+            <a:r>
+              <a:rPr lang="en-US" altLang="zh-CN" dirty="0"/>
+              <a:t>kb</a:t>
+            </a:r>
+            <a:r>
+              <a:rPr lang="zh-CN" altLang="en-US" dirty="0"/>
+              <a:t>是否相同，</a:t>
+            </a:r>
+            <a:r>
+              <a:rPr lang="en-US" altLang="zh-CN" dirty="0"/>
+              <a:t>kb</a:t>
+            </a:r>
+            <a:r>
+              <a:rPr lang="zh-CN" altLang="en-US" dirty="0"/>
+              <a:t>是否需要单独校准</a:t>
+            </a:r>
+            <a:endParaRPr lang="zh-CN" altLang="en-US" dirty="0"/>
+          </a:p>
+          <a:p>
+            <a:r>
+              <a:rPr lang="en-US" altLang="zh-CN" dirty="0"/>
+              <a:t>kb</a:t>
+            </a:r>
+            <a:r>
+              <a:rPr lang="zh-CN" altLang="en-US" dirty="0"/>
+              <a:t>固定，校准</a:t>
+            </a:r>
+            <a:r>
+              <a:rPr lang="en-US" altLang="zh-CN" dirty="0"/>
+              <a:t>kw or kb, kw</a:t>
+            </a:r>
+            <a:r>
+              <a:rPr lang="zh-CN" altLang="en-US" dirty="0"/>
+              <a:t>同时校准（个人感觉更难）</a:t>
+            </a:r>
+            <a:endParaRPr lang="zh-CN" altLang="en-US" dirty="0"/>
+          </a:p>
+          <a:p>
+            <a:endParaRPr lang="zh-CN" altLang="en-US" dirty="0"/>
+          </a:p>
+          <a:p>
+            <a:r>
+              <a:rPr lang="zh-CN" altLang="en-US" dirty="0"/>
+              <a:t>看完</a:t>
+            </a:r>
+            <a:r>
+              <a:rPr lang="en-US" altLang="zh-CN" dirty="0"/>
+              <a:t>glue</a:t>
+            </a:r>
+            <a:r>
+              <a:rPr lang="zh-CN" altLang="en-US" dirty="0"/>
+              <a:t>介绍之后，</a:t>
+            </a:r>
+            <a:r>
+              <a:rPr lang="en-US" altLang="zh-CN" dirty="0"/>
+              <a:t>kb, kw</a:t>
+            </a:r>
+            <a:r>
+              <a:rPr lang="zh-CN" altLang="en-US" dirty="0"/>
+              <a:t>作为一组来</a:t>
+            </a:r>
+            <a:r>
+              <a:rPr lang="zh-CN" altLang="en-US" dirty="0"/>
+              <a:t>矫正，</a:t>
+            </a:r>
+            <a:endParaRPr lang="zh-CN" altLang="en-US" dirty="0"/>
+          </a:p>
+          <a:p>
+            <a:endParaRPr lang="zh-CN" altLang="en-US" dirty="0"/>
+          </a:p>
+          <a:p>
+            <a:r>
+              <a:rPr lang="zh-CN" altLang="en-US" dirty="0"/>
+              <a:t>温度</a:t>
+            </a:r>
+            <a:endParaRPr lang="zh-CN" altLang="en-US" dirty="0"/>
+          </a:p>
+          <a:p>
+            <a:endParaRPr lang="zh-CN" altLang="en-US" dirty="0"/>
+          </a:p>
+          <a:p>
+            <a:r>
+              <a:rPr lang="zh-CN" altLang="en-US" dirty="0"/>
+              <a:t>三个</a:t>
+            </a:r>
+            <a:r>
+              <a:rPr lang="en-US" altLang="zh-CN" dirty="0"/>
+              <a:t>DMA（ABC），differ in pipe material and age（Hallam, 2002），</a:t>
+            </a:r>
+            <a:r>
+              <a:rPr lang="zh-CN" altLang="en-US" dirty="0"/>
+              <a:t>得出的结论比较 </a:t>
+            </a:r>
+            <a:r>
+              <a:rPr lang="en-US" altLang="zh-CN" dirty="0"/>
+              <a:t>or </a:t>
+            </a:r>
+            <a:r>
+              <a:rPr lang="zh-CN" altLang="en-US" dirty="0"/>
+              <a:t>在一个</a:t>
+            </a:r>
+            <a:r>
+              <a:rPr lang="en-US" altLang="zh-CN" dirty="0"/>
+              <a:t>DMA</a:t>
+            </a:r>
+            <a:r>
+              <a:rPr lang="zh-CN" altLang="en-US" dirty="0"/>
+              <a:t>上校准的模型能否适用于另一个</a:t>
+            </a:r>
+            <a:r>
+              <a:rPr lang="en-US" altLang="zh-CN" dirty="0"/>
+              <a:t>DMA？(</a:t>
+            </a:r>
+            <a:r>
+              <a:rPr lang="zh-CN" altLang="en-US" dirty="0"/>
+              <a:t>用</a:t>
+            </a:r>
+            <a:r>
+              <a:rPr lang="en-US" altLang="zh-CN" dirty="0"/>
+              <a:t>A</a:t>
+            </a:r>
+            <a:r>
+              <a:rPr lang="zh-CN" altLang="en-US" dirty="0"/>
+              <a:t>的结果预测</a:t>
+            </a:r>
+            <a:r>
+              <a:rPr lang="en-US" altLang="zh-CN" dirty="0"/>
+              <a:t>B,C，</a:t>
+            </a:r>
+            <a:r>
+              <a:rPr lang="zh-CN" altLang="en-US" dirty="0"/>
+              <a:t>但是我看到论文里说，不共用，所以我感觉不能预测)</a:t>
+            </a:r>
+            <a:endParaRPr lang="zh-CN" altLang="en-US" dirty="0"/>
           </a:p>
         </p:txBody>
       </p:sp>
@@ -611,12 +1021,19 @@
         <p:cNvGrpSpPr/>
         <p:nvPr/>
       </p:nvGrpSpPr>
-      <p:grpSpPr/>
+      <p:grpSpPr>
+        <a:xfrm>
+          <a:off x="0" y="0"/>
+          <a:ext cx="0" cy="0"/>
+          <a:chOff x="0" y="0"/>
+          <a:chExt cx="0" cy="0"/>
+        </a:xfrm>
+      </p:grpSpPr>
       <p:sp>
         <p:nvSpPr>
           <p:cNvPr id="2" name="幻灯片图像占位符 1"/>
           <p:cNvSpPr>
-            <a:spLocks noGrp="1"/>
+            <a:spLocks noGrp="1" noRot="1" noChangeAspect="1"/>
           </p:cNvSpPr>
           <p:nvPr>
             <p:ph type="sldImg" idx="2"/>
@@ -637,16 +1054,11 @@
         <p:spPr/>
         <p:txBody>
           <a:bodyPr/>
-          <a:p>
-            <a:r>
-              <a:rPr lang="zh-CN" altLang="en-US"/>
-              <a:t>可识别</a:t>
-            </a:r>
-            <a:r>
-              <a:rPr lang="zh-CN" altLang="en-US"/>
-              <a:t>的</a:t>
-            </a:r>
-            <a:endParaRPr lang="zh-CN" altLang="en-US"/>
+          <a:lstStyle/>
+          <a:p>
+            <a:endParaRPr lang="zh-CN" altLang="en-US" dirty="0">
+              <a:sym typeface="+mn-ea"/>
+            </a:endParaRPr>
           </a:p>
         </p:txBody>
       </p:sp>
@@ -667,12 +1079,19 @@
         <p:cNvGrpSpPr/>
         <p:nvPr/>
       </p:nvGrpSpPr>
-      <p:grpSpPr/>
+      <p:grpSpPr>
+        <a:xfrm>
+          <a:off x="0" y="0"/>
+          <a:ext cx="0" cy="0"/>
+          <a:chOff x="0" y="0"/>
+          <a:chExt cx="0" cy="0"/>
+        </a:xfrm>
+      </p:grpSpPr>
       <p:sp>
         <p:nvSpPr>
           <p:cNvPr id="2" name="幻灯片图像占位符 1"/>
           <p:cNvSpPr>
-            <a:spLocks noGrp="1"/>
+            <a:spLocks noGrp="1" noRot="1" noChangeAspect="1"/>
           </p:cNvSpPr>
           <p:nvPr>
             <p:ph type="sldImg" idx="2"/>
@@ -693,28 +1112,20 @@
         <p:spPr/>
         <p:txBody>
           <a:bodyPr/>
-          <a:p>
-            <a:r>
-              <a:rPr lang="zh-CN" altLang="en-US"/>
-              <a:t>氯</a:t>
-            </a:r>
-            <a:r>
-              <a:rPr lang="zh-CN" altLang="en-US"/>
-              <a:t>的区间，考虑了下线，是否考虑上限。因为不会变多，只要输入的</a:t>
-            </a:r>
-            <a:r>
-              <a:rPr lang="en-US" altLang="zh-CN"/>
-              <a:t>ok</a:t>
-            </a:r>
-            <a:r>
-              <a:rPr lang="zh-CN" altLang="en-US"/>
-              <a:t>就行，但是测量的</a:t>
-            </a:r>
-            <a:r>
-              <a:rPr lang="zh-CN" altLang="en-US"/>
-              <a:t>不一定。</a:t>
-            </a:r>
-            <a:endParaRPr lang="zh-CN" altLang="en-US"/>
+          <a:lstStyle/>
+          <a:p>
+            <a:r>
+              <a:rPr lang="en-US" altLang="zh-CN" dirty="0"/>
+              <a:t>0 order decay</a:t>
+            </a:r>
+            <a:endParaRPr lang="en-US" altLang="zh-CN" dirty="0"/>
+          </a:p>
+          <a:p>
+            <a:r>
+              <a:rPr lang="en-US" altLang="zh-CN" dirty="0"/>
+              <a:t>node</a:t>
+            </a:r>
+            <a:endParaRPr lang="en-US" altLang="zh-CN" dirty="0"/>
           </a:p>
         </p:txBody>
       </p:sp>
@@ -735,12 +1146,19 @@
         <p:cNvGrpSpPr/>
         <p:nvPr/>
       </p:nvGrpSpPr>
-      <p:grpSpPr/>
+      <p:grpSpPr>
+        <a:xfrm>
+          <a:off x="0" y="0"/>
+          <a:ext cx="0" cy="0"/>
+          <a:chOff x="0" y="0"/>
+          <a:chExt cx="0" cy="0"/>
+        </a:xfrm>
+      </p:grpSpPr>
       <p:sp>
         <p:nvSpPr>
           <p:cNvPr id="2" name="幻灯片图像占位符 1"/>
           <p:cNvSpPr>
-            <a:spLocks noGrp="1"/>
+            <a:spLocks noGrp="1" noRot="1" noChangeAspect="1"/>
           </p:cNvSpPr>
           <p:nvPr>
             <p:ph type="sldImg" idx="2"/>
@@ -761,31 +1179,20 @@
         <p:spPr/>
         <p:txBody>
           <a:bodyPr/>
-          <a:p>
-            <a:r>
-              <a:rPr lang="zh-CN" altLang="en-US"/>
-              <a:t>这里主要是</a:t>
-            </a:r>
-            <a:r>
-              <a:rPr lang="en-US" altLang="zh-CN"/>
-              <a:t>bulk</a:t>
-            </a:r>
-            <a:endParaRPr lang="en-US" altLang="zh-CN"/>
-          </a:p>
-          <a:p>
-            <a:r>
-              <a:rPr lang="zh-CN" altLang="en-US"/>
-              <a:t>即使在整个管网中 </a:t>
-            </a:r>
-            <a:r>
-              <a:rPr lang="en-US" altLang="zh-CN"/>
-              <a:t>kw </a:t>
-            </a:r>
-            <a:r>
-              <a:rPr lang="zh-CN" altLang="en-US"/>
-              <a:t>值保持一致，不同位置所归因于壁面衰减的比例也从 0% 到约 15% 不等</a:t>
-            </a:r>
-            <a:endParaRPr lang="zh-CN" altLang="en-US"/>
+          <a:lstStyle/>
+          <a:p>
+            <a:r>
+              <a:rPr lang="en-US" altLang="zh-CN" dirty="0"/>
+              <a:t>change kw</a:t>
+            </a:r>
+            <a:endParaRPr lang="en-US" altLang="zh-CN" dirty="0"/>
+          </a:p>
+          <a:p>
+            <a:r>
+              <a:rPr lang="en-US" altLang="zh-CN" dirty="0"/>
+              <a:t>noise data</a:t>
+            </a:r>
+            <a:endParaRPr lang="en-US" altLang="zh-CN" dirty="0"/>
           </a:p>
         </p:txBody>
       </p:sp>
@@ -806,12 +1213,19 @@
         <p:cNvGrpSpPr/>
         <p:nvPr/>
       </p:nvGrpSpPr>
-      <p:grpSpPr/>
+      <p:grpSpPr>
+        <a:xfrm>
+          <a:off x="0" y="0"/>
+          <a:ext cx="0" cy="0"/>
+          <a:chOff x="0" y="0"/>
+          <a:chExt cx="0" cy="0"/>
+        </a:xfrm>
+      </p:grpSpPr>
       <p:sp>
         <p:nvSpPr>
           <p:cNvPr id="2" name="幻灯片图像占位符 1"/>
           <p:cNvSpPr>
-            <a:spLocks noGrp="1"/>
+            <a:spLocks noGrp="1" noRot="1" noChangeAspect="1"/>
           </p:cNvSpPr>
           <p:nvPr>
             <p:ph type="sldImg" idx="2"/>
@@ -832,28 +1246,9 @@
         <p:spPr/>
         <p:txBody>
           <a:bodyPr/>
-          <a:p>
-            <a:r>
-              <a:rPr lang="zh-CN" altLang="en-US"/>
-              <a:t>归一化，这为将</a:t>
-            </a:r>
-            <a:r>
-              <a:rPr lang="en-US" altLang="zh-CN"/>
-              <a:t>DMA</a:t>
-            </a:r>
-            <a:r>
-              <a:rPr lang="zh-CN" altLang="en-US"/>
-              <a:t>入口监测点作为边界条件提供了依据——只需将测得的入口</a:t>
-            </a:r>
-            <a:r>
-              <a:rPr lang="en-US" altLang="zh-CN"/>
-              <a:t>C(t)</a:t>
-            </a:r>
-            <a:r>
-              <a:rPr lang="zh-CN" altLang="en-US"/>
-              <a:t>输入模型即可，无需因入口绝对水平的变化而重新校准。</a:t>
-            </a:r>
-            <a:endParaRPr lang="zh-CN" altLang="en-US"/>
+          <a:lstStyle/>
+          <a:p>
+            <a:endParaRPr lang="zh-CN" altLang="en-US" dirty="0"/>
           </a:p>
         </p:txBody>
       </p:sp>
@@ -874,12 +1269,19 @@
         <p:cNvGrpSpPr/>
         <p:nvPr/>
       </p:nvGrpSpPr>
-      <p:grpSpPr/>
+      <p:grpSpPr>
+        <a:xfrm>
+          <a:off x="0" y="0"/>
+          <a:ext cx="0" cy="0"/>
+          <a:chOff x="0" y="0"/>
+          <a:chExt cx="0" cy="0"/>
+        </a:xfrm>
+      </p:grpSpPr>
       <p:sp>
         <p:nvSpPr>
           <p:cNvPr id="2" name="幻灯片图像占位符 1"/>
           <p:cNvSpPr>
-            <a:spLocks noGrp="1"/>
+            <a:spLocks noGrp="1" noRot="1" noChangeAspect="1"/>
           </p:cNvSpPr>
           <p:nvPr>
             <p:ph type="sldImg" idx="2"/>
@@ -900,43 +1302,9 @@
         <p:spPr/>
         <p:txBody>
           <a:bodyPr/>
-          <a:p>
-            <a:r>
-              <a:rPr lang="zh-CN" altLang="en-US"/>
-              <a:t>考虑水质和</a:t>
-            </a:r>
-            <a:r>
-              <a:rPr lang="zh-CN" altLang="en-US"/>
-              <a:t>水力</a:t>
-            </a:r>
-            <a:endParaRPr lang="zh-CN" altLang="en-US"/>
-          </a:p>
-          <a:p>
-            <a:r>
-              <a:rPr lang="zh-CN" altLang="en-US"/>
-              <a:t>回答他的问题，在</a:t>
-            </a:r>
-            <a:r>
-              <a:rPr lang="en-US" altLang="zh-CN"/>
-              <a:t>wall</a:t>
-            </a:r>
-            <a:r>
-              <a:rPr lang="zh-CN" altLang="en-US"/>
-              <a:t>里面，考虑了</a:t>
-            </a:r>
-            <a:r>
-              <a:rPr lang="en-US" altLang="zh-CN"/>
-              <a:t>mass transfer, d</a:t>
-            </a:r>
-            <a:r>
-              <a:rPr lang="zh-CN" altLang="en-US"/>
-              <a:t>也在公式</a:t>
-            </a:r>
-            <a:r>
-              <a:rPr lang="zh-CN" altLang="en-US"/>
-              <a:t>里面</a:t>
-            </a:r>
-            <a:endParaRPr lang="zh-CN" altLang="en-US"/>
+          <a:lstStyle/>
+          <a:p>
+            <a:endParaRPr lang="zh-CN" altLang="en-US" dirty="0"/>
           </a:p>
         </p:txBody>
       </p:sp>
@@ -957,12 +1325,19 @@
         <p:cNvGrpSpPr/>
         <p:nvPr/>
       </p:nvGrpSpPr>
-      <p:grpSpPr/>
+      <p:grpSpPr>
+        <a:xfrm>
+          <a:off x="0" y="0"/>
+          <a:ext cx="0" cy="0"/>
+          <a:chOff x="0" y="0"/>
+          <a:chExt cx="0" cy="0"/>
+        </a:xfrm>
+      </p:grpSpPr>
       <p:sp>
         <p:nvSpPr>
           <p:cNvPr id="2" name="幻灯片图像占位符 1"/>
           <p:cNvSpPr>
-            <a:spLocks noGrp="1"/>
+            <a:spLocks noGrp="1" noRot="1" noChangeAspect="1"/>
           </p:cNvSpPr>
           <p:nvPr>
             <p:ph type="sldImg" idx="2"/>
@@ -983,41 +1358,9 @@
         <p:spPr/>
         <p:txBody>
           <a:bodyPr/>
-          <a:p>
-            <a:r>
-              <a:rPr lang="zh-CN" altLang="en-US"/>
-              <a:t>下游余氯曲线不是入口曲线简单地“晚一点出现”或者“整体变小一点”。</a:t>
-            </a:r>
-            <a:endParaRPr lang="zh-CN" altLang="en-US"/>
-          </a:p>
-          <a:p>
-            <a:r>
-              <a:rPr lang="zh-CN" altLang="en-US"/>
-              <a:t>水在管道里走的时间会变，水箱里还会混合新水和旧水，所以曲线形状会被改变。</a:t>
-            </a:r>
-            <a:endParaRPr lang="zh-CN" altLang="en-US"/>
-          </a:p>
-          <a:p>
-            <a:r>
-              <a:rPr lang="zh-CN" altLang="en-US"/>
-              <a:t>因此必须用 </a:t>
-            </a:r>
-            <a:r>
-              <a:rPr lang="en-US" altLang="zh-CN"/>
-              <a:t>EPANET/WNTR </a:t>
-            </a:r>
-            <a:r>
-              <a:rPr lang="zh-CN" altLang="en-US"/>
-              <a:t>模型来模拟整个过程。</a:t>
-            </a:r>
-            <a:endParaRPr lang="zh-CN" altLang="en-US"/>
-          </a:p>
-          <a:p>
-            <a:r>
-              <a:rPr lang="zh-CN" altLang="en-US"/>
-              <a:t>校准时也不能只用某几个稳态点，而应该用完整时间序列。</a:t>
-            </a:r>
-            <a:endParaRPr lang="zh-CN" altLang="en-US"/>
+          <a:lstStyle/>
+          <a:p>
+            <a:endParaRPr lang="zh-CN" altLang="en-US" dirty="0"/>
           </a:p>
         </p:txBody>
       </p:sp>
@@ -1038,12 +1381,19 @@
         <p:cNvGrpSpPr/>
         <p:nvPr/>
       </p:nvGrpSpPr>
-      <p:grpSpPr/>
+      <p:grpSpPr>
+        <a:xfrm>
+          <a:off x="0" y="0"/>
+          <a:ext cx="0" cy="0"/>
+          <a:chOff x="0" y="0"/>
+          <a:chExt cx="0" cy="0"/>
+        </a:xfrm>
+      </p:grpSpPr>
       <p:sp>
         <p:nvSpPr>
           <p:cNvPr id="2" name="幻灯片图像占位符 1"/>
           <p:cNvSpPr>
-            <a:spLocks noGrp="1"/>
+            <a:spLocks noGrp="1" noRot="1" noChangeAspect="1"/>
           </p:cNvSpPr>
           <p:nvPr>
             <p:ph type="sldImg" idx="2"/>
@@ -1064,107 +1414,9 @@
         <p:spPr/>
         <p:txBody>
           <a:bodyPr/>
-          <a:p>
-            <a:r>
-              <a:rPr lang="zh-CN" altLang="en-US"/>
-              <a:t>不同的</a:t>
-            </a:r>
-            <a:r>
-              <a:rPr lang="en-US" altLang="zh-CN"/>
-              <a:t>kb</a:t>
-            </a:r>
-            <a:r>
-              <a:rPr lang="zh-CN" altLang="en-US"/>
-              <a:t>和</a:t>
-            </a:r>
-            <a:r>
-              <a:rPr lang="en-US" altLang="zh-CN"/>
-              <a:t>kw</a:t>
-            </a:r>
-            <a:r>
-              <a:rPr lang="zh-CN" altLang="en-US"/>
-              <a:t>，可能得到相同的</a:t>
-            </a:r>
-            <a:r>
-              <a:rPr lang="zh-CN" altLang="en-US"/>
-              <a:t>结果</a:t>
-            </a:r>
-            <a:endParaRPr lang="zh-CN" altLang="en-US"/>
-          </a:p>
-          <a:p>
-            <a:r>
-              <a:rPr lang="zh-CN" altLang="en-US"/>
-              <a:t>获得的是一个</a:t>
-            </a:r>
-            <a:r>
-              <a:rPr lang="en-US" altLang="zh-CN"/>
-              <a:t>Yield</a:t>
-            </a:r>
-            <a:r>
-              <a:rPr lang="zh-CN" altLang="en-US"/>
-              <a:t>，存在</a:t>
-            </a:r>
-            <a:r>
-              <a:rPr lang="en-US" altLang="zh-CN">
-                <a:latin typeface="Times New Roman Regular" panose="02020503050405090304" charset="0"/>
-                <a:cs typeface="Times New Roman Regular" panose="02020503050405090304" charset="0"/>
-                <a:sym typeface="+mn-ea"/>
-              </a:rPr>
-              <a:t>k</a:t>
-            </a:r>
-            <a:r>
-              <a:rPr lang="en-US" altLang="zh-CN" baseline="-25000">
-                <a:latin typeface="Times New Roman Regular" panose="02020503050405090304" charset="0"/>
-                <a:cs typeface="Times New Roman Regular" panose="02020503050405090304" charset="0"/>
-                <a:sym typeface="+mn-ea"/>
-              </a:rPr>
-              <a:t>b</a:t>
-            </a:r>
-            <a:r>
-              <a:rPr lang="en-US" altLang="zh-CN">
-                <a:latin typeface="Times New Roman Regular" panose="02020503050405090304" charset="0"/>
-                <a:cs typeface="Times New Roman Regular" panose="02020503050405090304" charset="0"/>
-                <a:sym typeface="+mn-ea"/>
-              </a:rPr>
-              <a:t>-k</a:t>
-            </a:r>
-            <a:r>
-              <a:rPr lang="en-US" altLang="zh-CN" baseline="-25000">
-                <a:latin typeface="Times New Roman Regular" panose="02020503050405090304" charset="0"/>
-                <a:cs typeface="Times New Roman Regular" panose="02020503050405090304" charset="0"/>
-                <a:sym typeface="+mn-ea"/>
-              </a:rPr>
-              <a:t>w</a:t>
-            </a:r>
-            <a:r>
-              <a:rPr lang="en-US" altLang="zh-CN">
-                <a:latin typeface="Times New Roman Regular" panose="02020503050405090304" charset="0"/>
-                <a:cs typeface="Times New Roman Regular" panose="02020503050405090304" charset="0"/>
-                <a:sym typeface="+mn-ea"/>
-              </a:rPr>
-              <a:t> </a:t>
-            </a:r>
-            <a:r>
-              <a:rPr lang="en-US" altLang="zh-CN" b="1">
-                <a:latin typeface="Times New Roman" panose="02020503050405090304" charset="0"/>
-                <a:cs typeface="Times New Roman" panose="02020503050405090304" charset="0"/>
-                <a:sym typeface="+mn-ea"/>
-              </a:rPr>
-              <a:t>compensation</a:t>
-            </a:r>
-            <a:r>
-              <a:rPr lang="zh-CN" altLang="en-US" b="1">
-                <a:latin typeface="Times New Roman" panose="02020503050405090304" charset="0"/>
-                <a:cs typeface="Times New Roman" panose="02020503050405090304" charset="0"/>
-                <a:sym typeface="+mn-ea"/>
-              </a:rPr>
-              <a:t>补偿</a:t>
-            </a:r>
-            <a:endParaRPr lang="zh-CN" altLang="en-US" b="1">
-              <a:latin typeface="Times New Roman" panose="02020503050405090304" charset="0"/>
-              <a:cs typeface="Times New Roman" panose="02020503050405090304" charset="0"/>
-              <a:sym typeface="+mn-ea"/>
-            </a:endParaRPr>
+          <a:lstStyle/>
+          <a:p>
+            <a:endParaRPr lang="zh-CN" altLang="en-US" dirty="0"/>
           </a:p>
         </p:txBody>
       </p:sp>
@@ -1185,12 +1437,19 @@
         <p:cNvGrpSpPr/>
         <p:nvPr/>
       </p:nvGrpSpPr>
-      <p:grpSpPr/>
+      <p:grpSpPr>
+        <a:xfrm>
+          <a:off x="0" y="0"/>
+          <a:ext cx="0" cy="0"/>
+          <a:chOff x="0" y="0"/>
+          <a:chExt cx="0" cy="0"/>
+        </a:xfrm>
+      </p:grpSpPr>
       <p:sp>
         <p:nvSpPr>
           <p:cNvPr id="2" name="幻灯片图像占位符 1"/>
           <p:cNvSpPr>
-            <a:spLocks noGrp="1"/>
+            <a:spLocks noGrp="1" noRot="1" noChangeAspect="1"/>
           </p:cNvSpPr>
           <p:nvPr>
             <p:ph type="sldImg" idx="2"/>
@@ -1211,301 +1470,13 @@
         <p:spPr/>
         <p:txBody>
           <a:bodyPr/>
-          <a:p>
-            <a:r>
-              <a:rPr lang="zh-CN" altLang="en-US"/>
-              <a:t>现在大概的思路是：</a:t>
-            </a:r>
-            <a:endParaRPr lang="zh-CN" altLang="en-US"/>
-          </a:p>
-          <a:p>
-            <a:endParaRPr lang="en-US" altLang="zh-CN"/>
-          </a:p>
-          <a:p>
-            <a:r>
-              <a:rPr lang="zh-CN" altLang="en-US"/>
-              <a:t>我拿到3个</a:t>
-            </a:r>
-            <a:r>
-              <a:rPr lang="en-US" altLang="zh-CN"/>
-              <a:t>DMA</a:t>
-            </a:r>
-            <a:endParaRPr lang="en-US" altLang="zh-CN"/>
-          </a:p>
-          <a:p>
-            <a:r>
-              <a:rPr lang="zh-CN" altLang="en-US"/>
-              <a:t>1. 明确水力不用校准，默认正确</a:t>
-            </a:r>
-            <a:endParaRPr lang="zh-CN" altLang="en-US"/>
-          </a:p>
-          <a:p>
-            <a:r>
-              <a:rPr lang="zh-CN" altLang="en-US"/>
-              <a:t>2. 不考虑</a:t>
-            </a:r>
-            <a:r>
-              <a:rPr lang="en-US" altLang="zh-CN"/>
-              <a:t>TOC, DBP, </a:t>
-            </a:r>
-            <a:r>
-              <a:rPr lang="zh-CN" altLang="en-US"/>
-              <a:t>生物膜的影响？</a:t>
-            </a:r>
-            <a:endParaRPr lang="zh-CN" altLang="en-US"/>
-          </a:p>
-          <a:p>
-            <a:r>
-              <a:rPr lang="zh-CN" altLang="en-US"/>
-              <a:t>3. 入口监测器已经把它测出来了，直接输入（</a:t>
-            </a:r>
-            <a:r>
-              <a:rPr lang="en-US" altLang="zh-CN"/>
-              <a:t>getting started-</a:t>
-            </a:r>
-            <a:r>
-              <a:rPr lang="zh-CN" altLang="en-US"/>
-              <a:t>归一性）</a:t>
-            </a:r>
-            <a:endParaRPr lang="zh-CN" altLang="en-US"/>
-          </a:p>
-          <a:p>
-            <a:r>
-              <a:rPr lang="zh-CN" altLang="en-US"/>
-              <a:t>4. 衰减：</a:t>
-            </a:r>
-            <a:r>
-              <a:rPr lang="en-US" altLang="zh-CN"/>
-              <a:t>kw, kb, </a:t>
-            </a:r>
-            <a:r>
-              <a:rPr lang="zh-CN" altLang="en-US"/>
-              <a:t>一阶衰减</a:t>
-            </a:r>
-            <a:endParaRPr lang="zh-CN" altLang="en-US"/>
-          </a:p>
-          <a:p>
-            <a:endParaRPr lang="en-US" altLang="zh-CN"/>
-          </a:p>
-          <a:p>
-            <a:endParaRPr lang="en-US" altLang="zh-CN"/>
-          </a:p>
-          <a:p>
-            <a:r>
-              <a:rPr lang="zh-CN" altLang="en-US"/>
-              <a:t>根据先验经验，知道</a:t>
-            </a:r>
-            <a:r>
-              <a:rPr lang="en-US" altLang="zh-CN"/>
-              <a:t>kb, kw</a:t>
-            </a:r>
-            <a:r>
-              <a:rPr lang="zh-CN" altLang="en-US"/>
-              <a:t>范围，然后</a:t>
-            </a:r>
-            <a:r>
-              <a:rPr lang="en-US" altLang="zh-CN"/>
-              <a:t>simulate，</a:t>
-            </a:r>
-            <a:r>
-              <a:rPr lang="zh-CN" altLang="en-US"/>
-              <a:t>试出来一系列(</a:t>
-            </a:r>
-            <a:r>
-              <a:rPr lang="en-US" altLang="zh-CN"/>
-              <a:t>kb, kw), </a:t>
-            </a:r>
-            <a:r>
-              <a:rPr lang="zh-CN" altLang="en-US"/>
-              <a:t>把</a:t>
-            </a:r>
-            <a:r>
-              <a:rPr lang="en-US" altLang="zh-CN"/>
-              <a:t>Csim</a:t>
-            </a:r>
-            <a:r>
-              <a:rPr lang="zh-CN" altLang="en-US"/>
-              <a:t>和</a:t>
-            </a:r>
-            <a:r>
-              <a:rPr lang="en-US" altLang="zh-CN"/>
-              <a:t>Cobs</a:t>
-            </a:r>
-            <a:r>
-              <a:rPr lang="zh-CN" altLang="en-US"/>
-              <a:t>比较，得出合适的</a:t>
-            </a:r>
-            <a:r>
-              <a:rPr lang="en-US" altLang="zh-CN"/>
-              <a:t>Csim</a:t>
-            </a:r>
-            <a:r>
-              <a:rPr lang="zh-CN" altLang="en-US"/>
-              <a:t>和合适的(</a:t>
-            </a:r>
-            <a:r>
-              <a:rPr lang="en-US" altLang="zh-CN"/>
-              <a:t>kb, kw)</a:t>
-            </a:r>
-            <a:r>
-              <a:rPr lang="zh-CN" altLang="en-US"/>
-              <a:t>的区间，也能得出在合理范围内的概率-</a:t>
-            </a:r>
-            <a:r>
-              <a:rPr lang="en-US" altLang="zh-CN"/>
-              <a:t>Monte Carlo ensemble, GLUE(</a:t>
-            </a:r>
-            <a:r>
-              <a:rPr lang="zh-CN" altLang="en-US"/>
-              <a:t>贝叶斯还没看不确定)</a:t>
-            </a:r>
-            <a:endParaRPr lang="zh-CN" altLang="en-US"/>
-          </a:p>
-          <a:p>
-            <a:endParaRPr lang="en-US" altLang="zh-CN"/>
-          </a:p>
-          <a:p>
-            <a:r>
-              <a:rPr lang="zh-CN" altLang="en-US"/>
-              <a:t>监测点（3输入+5拟合+2校验）</a:t>
-            </a:r>
-            <a:endParaRPr lang="zh-CN" altLang="en-US"/>
-          </a:p>
-          <a:p>
-            <a:endParaRPr lang="en-US" altLang="zh-CN"/>
-          </a:p>
-          <a:p>
-            <a:r>
-              <a:rPr lang="zh-CN" altLang="en-US"/>
-              <a:t>三个</a:t>
-            </a:r>
-            <a:r>
-              <a:rPr lang="en-US" altLang="zh-CN"/>
-              <a:t>DMA（ABC），differ in pipe material and age（Hallam, 2002），</a:t>
-            </a:r>
-            <a:r>
-              <a:rPr lang="zh-CN" altLang="en-US"/>
-              <a:t>得出的结论可比较</a:t>
-            </a:r>
-            <a:endParaRPr lang="zh-CN" altLang="en-US"/>
-          </a:p>
-          <a:p>
-            <a:endParaRPr lang="en-US" altLang="zh-CN"/>
-          </a:p>
-          <a:p>
-            <a:r>
-              <a:rPr lang="zh-CN" altLang="en-US"/>
-              <a:t>问</a:t>
-            </a:r>
-            <a:endParaRPr lang="en-US" altLang="zh-CN"/>
-          </a:p>
-          <a:p>
-            <a:r>
-              <a:rPr lang="en-US" altLang="zh-CN"/>
-              <a:t>DMA</a:t>
-            </a:r>
-            <a:r>
-              <a:rPr lang="zh-CN" altLang="en-US"/>
-              <a:t>是否同源-</a:t>
-            </a:r>
-            <a:r>
-              <a:rPr lang="en-US" altLang="zh-CN"/>
-              <a:t>kb</a:t>
-            </a:r>
-            <a:r>
-              <a:rPr lang="zh-CN" altLang="en-US"/>
-              <a:t>是否相同，</a:t>
-            </a:r>
-            <a:r>
-              <a:rPr lang="en-US" altLang="zh-CN"/>
-              <a:t>kb</a:t>
-            </a:r>
-            <a:r>
-              <a:rPr lang="zh-CN" altLang="en-US"/>
-              <a:t>是否需要单独校准</a:t>
-            </a:r>
-            <a:endParaRPr lang="zh-CN" altLang="en-US"/>
-          </a:p>
-          <a:p>
-            <a:r>
-              <a:rPr lang="en-US" altLang="zh-CN"/>
-              <a:t>kb</a:t>
-            </a:r>
-            <a:r>
-              <a:rPr lang="zh-CN" altLang="en-US"/>
-              <a:t>固定，校准</a:t>
-            </a:r>
-            <a:r>
-              <a:rPr lang="en-US" altLang="zh-CN"/>
-              <a:t>kw or kb, kw</a:t>
-            </a:r>
-            <a:r>
-              <a:rPr lang="zh-CN" altLang="en-US"/>
-              <a:t>同时校准（个人感觉更难）</a:t>
-            </a:r>
-            <a:endParaRPr lang="zh-CN" altLang="en-US"/>
-          </a:p>
-          <a:p>
-            <a:r>
-              <a:rPr lang="zh-CN" altLang="en-US"/>
-              <a:t>温度</a:t>
-            </a:r>
-            <a:endParaRPr lang="zh-CN" altLang="en-US"/>
-          </a:p>
-          <a:p>
-            <a:r>
-              <a:rPr lang="zh-CN" altLang="en-US"/>
-              <a:t>三个</a:t>
-            </a:r>
-            <a:r>
-              <a:rPr lang="en-US" altLang="zh-CN"/>
-              <a:t>DMA（ABC），differ in pipe material and age（Hallam, 2002），</a:t>
-            </a:r>
-            <a:r>
-              <a:rPr lang="zh-CN" altLang="en-US"/>
-              <a:t>得出的结论比较 </a:t>
-            </a:r>
-            <a:r>
-              <a:rPr lang="en-US" altLang="zh-CN"/>
-              <a:t>or </a:t>
-            </a:r>
-            <a:r>
-              <a:rPr lang="zh-CN" altLang="en-US"/>
-              <a:t>在一个</a:t>
-            </a:r>
-            <a:r>
-              <a:rPr lang="en-US" altLang="zh-CN"/>
-              <a:t>DMA</a:t>
-            </a:r>
-            <a:r>
-              <a:rPr lang="zh-CN" altLang="en-US"/>
-              <a:t>上校准的模型能否适用于另一个</a:t>
-            </a:r>
-            <a:r>
-              <a:rPr lang="en-US" altLang="zh-CN"/>
-              <a:t>DMA？(</a:t>
-            </a:r>
-            <a:r>
-              <a:rPr lang="zh-CN" altLang="en-US"/>
-              <a:t>用</a:t>
-            </a:r>
-            <a:r>
-              <a:rPr lang="en-US" altLang="zh-CN"/>
-              <a:t>A</a:t>
-            </a:r>
-            <a:r>
-              <a:rPr lang="zh-CN" altLang="en-US"/>
-              <a:t>的结果预测</a:t>
-            </a:r>
-            <a:r>
-              <a:rPr lang="en-US" altLang="zh-CN"/>
-              <a:t>B,C，</a:t>
-            </a:r>
-            <a:r>
-              <a:rPr lang="zh-CN" altLang="en-US"/>
-              <a:t>但是我看到论文里说，不共用，所以我感觉不能预测)</a:t>
-            </a:r>
-            <a:endParaRPr lang="zh-CN" altLang="en-US"/>
+          <a:lstStyle/>
+          <a:p>
+            <a:endParaRPr lang="zh-CN" altLang="en-US" b="1" dirty="0">
+              <a:latin typeface="Times New Roman" panose="02020503050405090304" charset="0"/>
+              <a:cs typeface="Times New Roman" panose="02020503050405090304" charset="0"/>
+              <a:sym typeface="+mn-ea"/>
+            </a:endParaRPr>
           </a:p>
         </p:txBody>
       </p:sp>
@@ -4619,6 +4590,13 @@
               <a:t>June 1</a:t>
             </a:r>
             <a:r>
+              <a:rPr lang="en-US" altLang="zh-CN" sz="1800" dirty="0">
+                <a:latin typeface="Times New Roman" panose="02020503050405090304" charset="0"/>
+                <a:cs typeface="Times New Roman" panose="02020503050405090304" charset="0"/>
+              </a:rPr>
+              <a:t>2</a:t>
+            </a:r>
+            <a:r>
               <a:rPr lang="en-GB" altLang="zh-CN" sz="1800" dirty="0">
                 <a:latin typeface="Times New Roman" panose="02020503050405090304" charset="0"/>
                 <a:cs typeface="Times New Roman" panose="02020503050405090304" charset="0"/>
@@ -4649,7 +4627,14 @@
         <p:cNvGrpSpPr/>
         <p:nvPr/>
       </p:nvGrpSpPr>
-      <p:grpSpPr/>
+      <p:grpSpPr>
+        <a:xfrm>
+          <a:off x="0" y="0"/>
+          <a:ext cx="0" cy="0"/>
+          <a:chOff x="0" y="0"/>
+          <a:chExt cx="0" cy="0"/>
+        </a:xfrm>
+      </p:grpSpPr>
       <p:pic>
         <p:nvPicPr>
           <p:cNvPr id="2" name="图片 1" descr="02_exercises-5"/>
@@ -4694,117 +4679,118 @@
           <a:bodyPr wrap="square" rtlCol="0" anchor="t">
             <a:spAutoFit/>
           </a:bodyPr>
-          <a:p>
-            <a:r>
-              <a:rPr lang="en-US" altLang="zh-CN">
+          <a:lstStyle/>
+          <a:p>
+            <a:r>
+              <a:rPr lang="en-US" altLang="zh-CN" dirty="0">
                 <a:latin typeface="Times New Roman Regular" panose="02020503050405090304" charset="0"/>
                 <a:cs typeface="Times New Roman Regular" panose="02020503050405090304" charset="0"/>
               </a:rPr>
               <a:t>• Results:  </a:t>
             </a:r>
-            <a:endParaRPr lang="en-US" altLang="zh-CN">
+            <a:endParaRPr lang="en-US" altLang="zh-CN" dirty="0">
               <a:latin typeface="Times New Roman Regular" panose="02020503050405090304" charset="0"/>
               <a:cs typeface="Times New Roman Regular" panose="02020503050405090304" charset="0"/>
             </a:endParaRPr>
           </a:p>
           <a:p>
             <a:r>
-              <a:rPr lang="en-US" altLang="zh-CN">
+              <a:rPr lang="en-US" altLang="zh-CN" dirty="0">
                 <a:latin typeface="Times New Roman Regular" panose="02020503050405090304" charset="0"/>
                 <a:cs typeface="Times New Roman Regular" panose="02020503050405090304" charset="0"/>
               </a:rPr>
               <a:t>The optimal grid point is (k</a:t>
             </a:r>
             <a:r>
-              <a:rPr lang="en-US" altLang="zh-CN" baseline="-25000">
+              <a:rPr lang="en-US" altLang="zh-CN" baseline="-25000" dirty="0">
                 <a:latin typeface="Times New Roman Regular" panose="02020503050405090304" charset="0"/>
                 <a:cs typeface="Times New Roman Regular" panose="02020503050405090304" charset="0"/>
               </a:rPr>
               <a:t>b</a:t>
             </a:r>
             <a:r>
-              <a:rPr lang="en-US" altLang="zh-CN">
+              <a:rPr lang="en-US" altLang="zh-CN" dirty="0">
                 <a:latin typeface="Times New Roman Regular" panose="02020503050405090304" charset="0"/>
                 <a:cs typeface="Times New Roman Regular" panose="02020503050405090304" charset="0"/>
               </a:rPr>
               <a:t> = -0.375, k</a:t>
             </a:r>
             <a:r>
-              <a:rPr lang="en-US" altLang="zh-CN" baseline="-25000">
+              <a:rPr lang="en-US" altLang="zh-CN" baseline="-25000" dirty="0">
                 <a:latin typeface="Times New Roman Regular" panose="02020503050405090304" charset="0"/>
                 <a:cs typeface="Times New Roman Regular" panose="02020503050405090304" charset="0"/>
               </a:rPr>
               <a:t>w</a:t>
             </a:r>
             <a:r>
-              <a:rPr lang="en-US" altLang="zh-CN">
+              <a:rPr lang="en-US" altLang="zh-CN" dirty="0">
                 <a:latin typeface="Times New Roman Regular" panose="02020503050405090304" charset="0"/>
                 <a:cs typeface="Times New Roman Regular" panose="02020503050405090304" charset="0"/>
               </a:rPr>
               <a:t> = -0.225), close but not equal to the true value (limited by the 9</a:t>
             </a:r>
             <a:r>
-              <a:rPr lang="zh-CN" altLang="en-US">
+              <a:rPr lang="zh-CN" altLang="en-US" dirty="0">
                 <a:latin typeface="Times New Roman Regular" panose="02020503050405090304" charset="0"/>
                 <a:cs typeface="Times New Roman Regular" panose="02020503050405090304" charset="0"/>
               </a:rPr>
               <a:t>×</a:t>
             </a:r>
             <a:r>
-              <a:rPr lang="en-US" altLang="zh-CN">
+              <a:rPr lang="en-US" altLang="zh-CN" dirty="0">
                 <a:latin typeface="Times New Roman Regular" panose="02020503050405090304" charset="0"/>
                 <a:cs typeface="Times New Roman Regular" panose="02020503050405090304" charset="0"/>
               </a:rPr>
               <a:t>9 coarse grid). </a:t>
             </a:r>
-            <a:endParaRPr lang="en-US" altLang="zh-CN">
+            <a:endParaRPr lang="en-US" altLang="zh-CN" dirty="0">
               <a:latin typeface="Times New Roman Regular" panose="02020503050405090304" charset="0"/>
               <a:cs typeface="Times New Roman Regular" panose="02020503050405090304" charset="0"/>
             </a:endParaRPr>
           </a:p>
           <a:p>
-            <a:endParaRPr lang="en-US" altLang="zh-CN">
+            <a:endParaRPr lang="en-US" altLang="zh-CN" dirty="0">
               <a:latin typeface="Times New Roman Regular" panose="02020503050405090304" charset="0"/>
               <a:cs typeface="Times New Roman Regular" panose="02020503050405090304" charset="0"/>
             </a:endParaRPr>
           </a:p>
           <a:p>
             <a:r>
-              <a:rPr lang="en-US" altLang="zh-CN">
+              <a:rPr lang="en-US" altLang="zh-CN" dirty="0">
                 <a:latin typeface="Times New Roman Regular" panose="02020503050405090304" charset="0"/>
                 <a:cs typeface="Times New Roman Regular" panose="02020503050405090304" charset="0"/>
               </a:rPr>
               <a:t>There are two grid points whose SSE falls within 1.5 times the minimum value: (-0.375, -0.22) and (-0.50, -0.22) -- their k</a:t>
             </a:r>
             <a:r>
-              <a:rPr lang="en-US" altLang="zh-CN" baseline="-25000">
+              <a:rPr lang="en-US" altLang="zh-CN" baseline="-25000" dirty="0">
                 <a:latin typeface="Times New Roman Regular" panose="02020503050405090304" charset="0"/>
                 <a:cs typeface="Times New Roman Regular" panose="02020503050405090304" charset="0"/>
               </a:rPr>
               <a:t>w</a:t>
             </a:r>
             <a:r>
-              <a:rPr lang="en-US" altLang="zh-CN">
+              <a:rPr lang="en-US" altLang="zh-CN" dirty="0">
                 <a:latin typeface="Times New Roman Regular" panose="02020503050405090304" charset="0"/>
                 <a:cs typeface="Times New Roman Regular" panose="02020503050405090304" charset="0"/>
               </a:rPr>
               <a:t> values are nearly identical (≥-0.22, close to the true value), while k</a:t>
             </a:r>
             <a:r>
-              <a:rPr lang="en-US" altLang="zh-CN" baseline="-25000">
+              <a:rPr lang="en-US" altLang="zh-CN" baseline="-25000" dirty="0">
                 <a:latin typeface="Times New Roman Regular" panose="02020503050405090304" charset="0"/>
                 <a:cs typeface="Times New Roman Regular" panose="02020503050405090304" charset="0"/>
               </a:rPr>
               <a:t>b</a:t>
             </a:r>
             <a:r>
-              <a:rPr lang="en-US" altLang="zh-CN">
+              <a:rPr lang="en-US" altLang="zh-CN" dirty="0">
                 <a:latin typeface="Times New Roman Regular" panose="02020503050405090304" charset="0"/>
                 <a:cs typeface="Times New Roman Regular" panose="02020503050405090304" charset="0"/>
               </a:rPr>
               <a:t> ranges from -0.375 to -0.50, all yielding "similarly good" fits.</a:t>
             </a:r>
-            <a:endParaRPr lang="zh-CN" altLang="en-US">
+            <a:endParaRPr lang="zh-CN" altLang="en-US" dirty="0">
               <a:latin typeface="Times New Roman Regular" panose="02020503050405090304" charset="0"/>
               <a:cs typeface="Times New Roman Regular" panose="02020503050405090304" charset="0"/>
             </a:endParaRPr>
@@ -4831,6 +4817,7 @@
           <a:bodyPr wrap="square" rtlCol="0" anchor="t">
             <a:spAutoFit/>
           </a:bodyPr>
+          <a:lstStyle/>
           <a:p>
             <a:r>
               <a:rPr lang="en-US" altLang="zh-CN">
@@ -4866,9 +4853,10 @@
           <a:bodyPr wrap="square" rtlCol="0" anchor="t">
             <a:spAutoFit/>
           </a:bodyPr>
-          <a:p>
-            <a:r>
-              <a:rPr lang="en-US" altLang="zh-CN">
+          <a:lstStyle/>
+          <a:p>
+            <a:r>
+              <a:rPr lang="en-US" altLang="zh-CN" dirty="0">
                 <a:latin typeface="Times New Roman Regular" panose="02020503050405090304" charset="0"/>
                 <a:cs typeface="Times New Roman Regular" panose="02020503050405090304" charset="0"/>
                 <a:sym typeface="+mn-ea"/>
@@ -4876,7 +4864,7 @@
               <a:t>k</a:t>
             </a:r>
             <a:r>
-              <a:rPr lang="en-US" altLang="zh-CN" baseline="-25000">
+              <a:rPr lang="en-US" altLang="zh-CN" baseline="-25000" dirty="0">
                 <a:latin typeface="Times New Roman Regular" panose="02020503050405090304" charset="0"/>
                 <a:cs typeface="Times New Roman Regular" panose="02020503050405090304" charset="0"/>
                 <a:sym typeface="+mn-ea"/>
@@ -4884,7 +4872,7 @@
               <a:t>b</a:t>
             </a:r>
             <a:r>
-              <a:rPr lang="en-US" altLang="zh-CN">
+              <a:rPr lang="en-US" altLang="zh-CN" dirty="0">
                 <a:latin typeface="Times New Roman Regular" panose="02020503050405090304" charset="0"/>
                 <a:cs typeface="Times New Roman Regular" panose="02020503050405090304" charset="0"/>
                 <a:sym typeface="+mn-ea"/>
@@ -4892,7 +4880,7 @@
               <a:t>-k</a:t>
             </a:r>
             <a:r>
-              <a:rPr lang="en-US" altLang="zh-CN" baseline="-25000">
+              <a:rPr lang="en-US" altLang="zh-CN" baseline="-25000" dirty="0">
                 <a:latin typeface="Times New Roman Regular" panose="02020503050405090304" charset="0"/>
                 <a:cs typeface="Times New Roman Regular" panose="02020503050405090304" charset="0"/>
                 <a:sym typeface="+mn-ea"/>
@@ -4900,7 +4888,7 @@
               <a:t>w</a:t>
             </a:r>
             <a:r>
-              <a:rPr lang="en-US" altLang="zh-CN">
+              <a:rPr lang="en-US" altLang="zh-CN" dirty="0">
                 <a:latin typeface="Times New Roman Regular" panose="02020503050405090304" charset="0"/>
                 <a:cs typeface="Times New Roman Regular" panose="02020503050405090304" charset="0"/>
                 <a:sym typeface="+mn-ea"/>
@@ -4908,7 +4896,7 @@
               <a:t> </a:t>
             </a:r>
             <a:r>
-              <a:rPr lang="en-US" altLang="zh-CN" b="1">
+              <a:rPr lang="en-US" altLang="zh-CN" b="1" dirty="0">
                 <a:latin typeface="Times New Roman" panose="02020503050405090304" charset="0"/>
                 <a:cs typeface="Times New Roman" panose="02020503050405090304" charset="0"/>
                 <a:sym typeface="+mn-ea"/>
@@ -4916,22 +4904,14 @@
               <a:t>compensation</a:t>
             </a:r>
             <a:r>
-              <a:rPr lang="en-US" altLang="zh-CN">
+              <a:rPr lang="en-US" altLang="zh-CN" dirty="0">
                 <a:latin typeface="Times New Roman Regular" panose="02020503050405090304" charset="0"/>
                 <a:cs typeface="Times New Roman Regular" panose="02020503050405090304" charset="0"/>
                 <a:sym typeface="+mn-ea"/>
               </a:rPr>
-              <a:t>: downstream residual chlorine only observes "total </a:t>
-            </a:r>
-            <a:r>
-              <a:rPr lang="en-US" altLang="zh-CN">
-                <a:latin typeface="Times New Roman Regular" panose="02020503050405090304" charset="0"/>
-                <a:cs typeface="Times New Roman Regular" panose="02020503050405090304" charset="0"/>
-                <a:sym typeface="+mn-ea"/>
-              </a:rPr>
-              <a:t>decay," so bulk and wall effects can compensate each other (a slightly higher kb and lower kw yield equally good fits). </a:t>
-            </a:r>
-            <a:endParaRPr lang="en-US" altLang="zh-CN">
+              <a:t>: downstream residual chlorine only observes "total decay," so bulk and wall effects can compensate each other (a slightly higher kb and lower kw yield equally good fits). </a:t>
+            </a:r>
+            <a:endParaRPr lang="en-US" altLang="zh-CN" dirty="0">
               <a:latin typeface="Times New Roman Regular" panose="02020503050405090304" charset="0"/>
               <a:cs typeface="Times New Roman Regular" panose="02020503050405090304" charset="0"/>
               <a:sym typeface="+mn-ea"/>
@@ -4939,11 +4919,128 @@
           </a:p>
         </p:txBody>
       </p:sp>
+      <p:pic>
+        <p:nvPicPr>
+          <p:cNvPr id="7" name="Audio Recording 2026年6月3日 22:44:19">
+            <a:hlinkClick r:id="" action="ppaction://media"/>
+          </p:cNvPr>
+          <p:cNvPicPr>
+            <a:picLocks noChangeAspect="1"/>
+          </p:cNvPicPr>
+          <p:nvPr>
+            <a:audioFile r:link="rId2"/>
+            <p:extLst>
+              <p:ext uri="{DAA4B4D4-6D71-4841-9C94-3DE7FCFB9230}">
+                <p14:media xmlns:p14="http://schemas.microsoft.com/office/powerpoint/2010/main" r:embed="rId3"/>
+              </p:ext>
+            </p:extLst>
+          </p:nvPr>
+        </p:nvPicPr>
+        <p:blipFill>
+          <a:blip r:embed="rId4"/>
+          <a:stretch>
+            <a:fillRect/>
+          </a:stretch>
+        </p:blipFill>
+        <p:spPr>
+          <a:xfrm>
+            <a:off x="11287272" y="6045200"/>
+            <a:ext cx="812800" cy="812800"/>
+          </a:xfrm>
+          <a:prstGeom prst="rect">
+            <a:avLst/>
+          </a:prstGeom>
+        </p:spPr>
+      </p:pic>
     </p:spTree>
   </p:cSld>
   <p:clrMapOvr>
     <a:masterClrMapping/>
   </p:clrMapOvr>
+  <p:timing>
+    <p:tnLst>
+      <p:par>
+        <p:cTn id="1" dur="indefinite" restart="never" nodeType="tmRoot">
+          <p:childTnLst>
+            <p:seq concurrent="1" nextAc="seek">
+              <p:cTn id="2" dur="indefinite" nodeType="mainSeq">
+                <p:childTnLst>
+                  <p:par>
+                    <p:cTn id="3" fill="hold">
+                      <p:stCondLst>
+                        <p:cond delay="indefinite"/>
+                      </p:stCondLst>
+                      <p:childTnLst>
+                        <p:par>
+                          <p:cTn id="4" fill="hold">
+                            <p:stCondLst>
+                              <p:cond delay="0"/>
+                            </p:stCondLst>
+                            <p:childTnLst>
+                              <p:par>
+                                <p:cTn id="5" presetID="1" presetClass="mediacall" presetSubtype="0" fill="hold" nodeType="clickEffect">
+                                  <p:stCondLst>
+                                    <p:cond delay="0"/>
+                                  </p:stCondLst>
+                                  <p:childTnLst>
+                                    <p:cmd type="call" cmd="playFrom(0.0)">
+                                      <p:cBhvr>
+                                        <p:cTn id="6" dur="57404" fill="hold"/>
+                                        <p:tgtEl>
+                                          <p:spTgt spid="7"/>
+                                        </p:tgtEl>
+                                      </p:cBhvr>
+                                    </p:cmd>
+                                  </p:childTnLst>
+                                </p:cTn>
+                              </p:par>
+                            </p:childTnLst>
+                          </p:cTn>
+                        </p:par>
+                      </p:childTnLst>
+                    </p:cTn>
+                  </p:par>
+                </p:childTnLst>
+              </p:cTn>
+              <p:prevCondLst>
+                <p:cond evt="onPrev" delay="0">
+                  <p:tgtEl>
+                    <p:sldTgt/>
+                  </p:tgtEl>
+                </p:cond>
+              </p:prevCondLst>
+              <p:nextCondLst>
+                <p:cond evt="onNext" delay="0">
+                  <p:tgtEl>
+                    <p:sldTgt/>
+                  </p:tgtEl>
+                </p:cond>
+              </p:nextCondLst>
+            </p:seq>
+            <p:audio>
+              <p:cMediaNode vol="80000" mute="1">
+                <p:cTn id="7" fill="hold" display="0">
+                  <p:stCondLst>
+                    <p:cond delay="indefinite"/>
+                  </p:stCondLst>
+                  <p:endCondLst>
+                    <p:cond evt="onStopAudio" delay="0">
+                      <p:tgtEl>
+                        <p:sldTgt/>
+                      </p:tgtEl>
+                    </p:cond>
+                  </p:endCondLst>
+                </p:cTn>
+                <p:tgtEl>
+                  <p:spTgt spid="7"/>
+                </p:tgtEl>
+              </p:cMediaNode>
+            </p:audio>
+          </p:childTnLst>
+        </p:cTn>
+      </p:par>
+    </p:tnLst>
+  </p:timing>
 </p:sld>
 </file>
 
@@ -4956,7 +5053,14 @@
         <p:cNvGrpSpPr/>
         <p:nvPr/>
       </p:nvGrpSpPr>
-      <p:grpSpPr/>
+      <p:grpSpPr>
+        <a:xfrm>
+          <a:off x="0" y="0"/>
+          <a:ext cx="0" cy="0"/>
+          <a:chOff x="0" y="0"/>
+          <a:chExt cx="0" cy="0"/>
+        </a:xfrm>
+      </p:grpSpPr>
       <p:graphicFrame>
         <p:nvGraphicFramePr>
           <p:cNvPr id="2" name="表格 1"/>
@@ -4965,20 +5069,21 @@
         </p:nvGraphicFramePr>
         <p:xfrm>
           <a:off x="1286510" y="814705"/>
-          <a:ext cx="9618345" cy="5229225"/>
+          <a:ext cx="9618345" cy="5233029"/>
         </p:xfrm>
         <a:graphic>
           <a:graphicData uri="http://schemas.openxmlformats.org/drawingml/2006/table">
             <a:tbl>
               <a:tblPr/>
               <a:tblGrid>
-                <a:gridCol w="2493010"/>
-                <a:gridCol w="7125335"/>
+                <a:gridCol w="2433955"/>
+                <a:gridCol w="7184390"/>
               </a:tblGrid>
               <a:tr h="0">
                 <a:tc>
                   <a:txBody>
                     <a:bodyPr/>
+                    <a:lstStyle/>
                     <a:p>
                       <a:pPr algn="l" fontAlgn="t"/>
                       <a:r>
@@ -4996,7 +5101,7 @@
                       </a:endParaRPr>
                     </a:p>
                   </a:txBody>
-                  <a:tcPr marL="114617" marR="114617" marT="63817" marB="63817" anchor="t" anchorCtr="0">
+                  <a:tcPr marL="114617" marR="114617" marT="63817" marB="63817">
                     <a:lnL w="12700">
                       <a:solidFill>
                         <a:schemeClr val="tx1"/>
@@ -5027,6 +5132,7 @@
                 <a:tc>
                   <a:txBody>
                     <a:bodyPr/>
+                    <a:lstStyle/>
                     <a:p>
                       <a:pPr algn="l" fontAlgn="t"/>
                       <a:r>
@@ -5044,7 +5150,7 @@
                       </a:endParaRPr>
                     </a:p>
                   </a:txBody>
-                  <a:tcPr marL="114617" marR="114617" marT="63817" marB="63817" anchor="t" anchorCtr="0">
+                  <a:tcPr marL="114617" marR="114617" marT="63817" marB="63817">
                     <a:lnL w="12700">
                       <a:solidFill>
                         <a:schemeClr val="tx1"/>
@@ -5077,6 +5183,7 @@
                 <a:tc>
                   <a:txBody>
                     <a:bodyPr/>
+                    <a:lstStyle/>
                     <a:p>
                       <a:pPr algn="l" fontAlgn="t" latinLnBrk="0"/>
                       <a:r>
@@ -5107,7 +5214,7 @@
                       </a:endParaRPr>
                     </a:p>
                   </a:txBody>
-                  <a:tcPr marL="114617" marR="114617" marT="63817" marB="63817" anchor="t" anchorCtr="0">
+                  <a:tcPr marL="114617" marR="114617" marT="63817" marB="63817">
                     <a:lnL w="12700">
                       <a:solidFill>
                         <a:schemeClr val="tx1"/>
@@ -5138,24 +5245,25 @@
                 <a:tc>
                   <a:txBody>
                     <a:bodyPr/>
+                    <a:lstStyle/>
                     <a:p>
                       <a:pPr algn="l" fontAlgn="t" latinLnBrk="0"/>
                       <a:r>
-                        <a:rPr lang="en-US" altLang="zh-CN" sz="2000" b="0" i="0">
+                        <a:rPr lang="en-US" altLang="zh-CN" sz="2000" b="0" i="0" dirty="0">
                           <a:latin typeface="Times New Roman Regular" panose="02020503050405090304" charset="0"/>
                           <a:ea typeface="-apple-system"/>
                           <a:cs typeface="Times New Roman Regular" panose="02020503050405090304" charset="0"/>
                         </a:rPr>
                         <a:t>first-order bulk + wall + mass-transfer = the EPANET model I will use</a:t>
                       </a:r>
-                      <a:endParaRPr lang="en-US" altLang="zh-CN" sz="2000" b="0" i="0">
+                      <a:endParaRPr lang="en-US" altLang="zh-CN" sz="2000" b="0" i="0" dirty="0">
                         <a:latin typeface="Times New Roman Regular" panose="02020503050405090304" charset="0"/>
                         <a:ea typeface="-apple-system"/>
                         <a:cs typeface="Times New Roman Regular" panose="02020503050405090304" charset="0"/>
                       </a:endParaRPr>
                     </a:p>
                   </a:txBody>
-                  <a:tcPr marL="114617" marR="114617" marT="63817" marB="63817" anchor="t" anchorCtr="0">
+                  <a:tcPr marL="114617" marR="114617" marT="63817" marB="63817">
                     <a:lnL w="12700">
                       <a:solidFill>
                         <a:schemeClr val="tx1"/>
@@ -5188,6 +5296,7 @@
                 <a:tc>
                   <a:txBody>
                     <a:bodyPr/>
+                    <a:lstStyle/>
                     <a:p>
                       <a:pPr algn="l" fontAlgn="t" latinLnBrk="0"/>
                       <a:r>
@@ -5218,7 +5327,7 @@
                       </a:endParaRPr>
                     </a:p>
                   </a:txBody>
-                  <a:tcPr marL="114617" marR="114617" marT="63817" marB="63817" anchor="t" anchorCtr="0">
+                  <a:tcPr marL="114617" marR="114617" marT="63817" marB="63817">
                     <a:lnL w="12700">
                       <a:solidFill>
                         <a:schemeClr val="tx1"/>
@@ -5249,10 +5358,11 @@
                 <a:tc>
                   <a:txBody>
                     <a:bodyPr/>
+                    <a:lstStyle/>
                     <a:p>
                       <a:pPr algn="l" fontAlgn="t" latinLnBrk="0"/>
                       <a:r>
-                        <a:rPr lang="en-US" altLang="zh-CN" sz="2000" b="0" i="0">
+                        <a:rPr lang="en-US" altLang="zh-CN" sz="2000" b="0" i="0" dirty="0">
                           <a:latin typeface="Times New Roman Regular" panose="02020503050405090304" charset="0"/>
                           <a:ea typeface="-apple-system"/>
                           <a:cs typeface="Times New Roman Regular" panose="02020503050405090304" charset="0"/>
@@ -5260,7 +5370,7 @@
                         <a:t>kw ∝ 1/roughness; absolute error: 0.05-0.15 mg/L (my accuracy benchmark); </a:t>
                       </a:r>
                       <a:r>
-                        <a:rPr lang="en-US" altLang="zh-CN" sz="2000" b="0" i="0">
+                        <a:rPr lang="en-US" altLang="zh-CN" sz="2000" b="0" i="0" dirty="0">
                           <a:solidFill>
                             <a:srgbClr val="FF0000"/>
                           </a:solidFill>
@@ -5271,7 +5381,7 @@
                         <a:t>fix k</a:t>
                       </a:r>
                       <a:r>
-                        <a:rPr lang="en-US" altLang="zh-CN" sz="2000" b="0" i="0" baseline="-25000">
+                        <a:rPr lang="en-US" altLang="zh-CN" sz="2000" b="0" i="0" baseline="-25000" dirty="0">
                           <a:solidFill>
                             <a:srgbClr val="FF0000"/>
                           </a:solidFill>
@@ -5282,7 +5392,7 @@
                         <a:t>b </a:t>
                       </a:r>
                       <a:r>
-                        <a:rPr lang="en-US" altLang="zh-CN" sz="2000" b="0" i="0">
+                        <a:rPr lang="en-US" altLang="zh-CN" sz="2000" b="0" i="0" dirty="0">
                           <a:solidFill>
                             <a:srgbClr val="FF0000"/>
                           </a:solidFill>
@@ -5293,7 +5403,7 @@
                         <a:t>from bottle tests, calibrate </a:t>
                       </a:r>
                       <a:r>
-                        <a:rPr lang="en-US" altLang="zh-CN" sz="2000">
+                        <a:rPr lang="en-US" altLang="zh-CN" sz="2000" dirty="0">
                           <a:solidFill>
                             <a:srgbClr val="FF0000"/>
                           </a:solidFill>
@@ -5301,20 +5411,9 @@
                           <a:cs typeface="Times New Roman Regular" panose="02020503050405090304" charset="0"/>
                           <a:sym typeface="+mn-ea"/>
                         </a:rPr>
-                        <a:t>k</a:t>
+                        <a:t>kw; DPD: 15%</a:t>
                       </a:r>
-                      <a:r>
-                        <a:rPr lang="en-US" altLang="zh-CN" sz="2000">
-                          <a:solidFill>
-                            <a:srgbClr val="FF0000"/>
-                          </a:solidFill>
-                          <a:latin typeface="Times New Roman Regular" panose="02020503050405090304" charset="0"/>
-                          <a:cs typeface="Times New Roman Regular" panose="02020503050405090304" charset="0"/>
-                          <a:sym typeface="+mn-ea"/>
-                        </a:rPr>
-                        <a:t>w; DPD: 15%</a:t>
-                      </a:r>
-                      <a:endParaRPr lang="en-US" altLang="zh-CN" sz="2000" baseline="-25000">
+                      <a:endParaRPr lang="en-US" altLang="zh-CN" sz="2000" baseline="-25000" dirty="0">
                         <a:solidFill>
                           <a:srgbClr val="FF0000"/>
                         </a:solidFill>
@@ -5326,7 +5425,7 @@
                     <a:p>
                       <a:pPr algn="l" fontAlgn="t" latinLnBrk="0"/>
                       <a:r>
-                        <a:rPr lang="en-US" altLang="zh-CN" sz="2000" b="0" i="0">
+                        <a:rPr lang="en-US" altLang="zh-CN" sz="2000" b="0" i="0" dirty="0">
                           <a:solidFill>
                             <a:srgbClr val="FF0000"/>
                           </a:solidFill>
@@ -5337,7 +5436,7 @@
                         </a:rPr>
                         <a:t>Process: (Hydraulic calibration), Bulk-bottle test, Adjust kw, Evaluation</a:t>
                       </a:r>
-                      <a:endParaRPr lang="en-US" altLang="zh-CN" sz="2000" b="0" i="0">
+                      <a:endParaRPr lang="en-US" altLang="zh-CN" sz="2000" b="0" i="0" dirty="0">
                         <a:solidFill>
                           <a:srgbClr val="FF0000"/>
                         </a:solidFill>
@@ -5348,7 +5447,7 @@
                       </a:endParaRPr>
                     </a:p>
                   </a:txBody>
-                  <a:tcPr marL="114617" marR="114617" marT="63817" marB="63817" anchor="t" anchorCtr="0">
+                  <a:tcPr marL="114617" marR="114617" marT="63817" marB="63817">
                     <a:lnL w="12700">
                       <a:solidFill>
                         <a:schemeClr val="tx1"/>
@@ -5381,6 +5480,7 @@
                 <a:tc>
                   <a:txBody>
                     <a:bodyPr/>
+                    <a:lstStyle/>
                     <a:p>
                       <a:pPr algn="l" fontAlgn="t" latinLnBrk="0"/>
                       <a:r>
@@ -5411,7 +5511,7 @@
                       </a:endParaRPr>
                     </a:p>
                   </a:txBody>
-                  <a:tcPr marL="114617" marR="114617" marT="63817" marB="63817" anchor="t" anchorCtr="0">
+                  <a:tcPr marL="114617" marR="114617" marT="63817" marB="63817">
                     <a:lnL w="12700">
                       <a:solidFill>
                         <a:schemeClr val="tx1"/>
@@ -5442,10 +5542,11 @@
                 <a:tc>
                   <a:txBody>
                     <a:bodyPr/>
+                    <a:lstStyle/>
                     <a:p>
                       <a:pPr algn="l" fontAlgn="t" latinLnBrk="0"/>
                       <a:r>
-                        <a:rPr lang="en-US" altLang="zh-CN" sz="2000" b="0" i="0">
+                        <a:rPr lang="en-US" altLang="zh-CN" sz="2000" b="0" i="0" dirty="0">
                           <a:latin typeface="Times New Roman Regular" panose="02020503050405090304" charset="0"/>
                           <a:ea typeface="-apple-system"/>
                           <a:cs typeface="Times New Roman Regular" panose="02020503050405090304" charset="0"/>
@@ -5453,7 +5554,7 @@
                         <a:t>wall decay is heterogeneous by </a:t>
                       </a:r>
                       <a:r>
-                        <a:rPr lang="en-US" altLang="zh-CN" sz="2000" b="1" i="0">
+                        <a:rPr lang="en-US" altLang="zh-CN" sz="2000" b="1" i="0" dirty="0">
                           <a:latin typeface="Times New Roman" panose="02020503050405090304" charset="0"/>
                           <a:ea typeface="-apple-system"/>
                           <a:cs typeface="Times New Roman" panose="02020503050405090304" charset="0"/>
@@ -5461,7 +5562,7 @@
                         <a:t>material/age </a:t>
                       </a:r>
                       <a:r>
-                        <a:rPr lang="en-US" altLang="zh-CN" sz="2000" b="0" i="0">
+                        <a:rPr lang="en-US" altLang="zh-CN" sz="2000" b="0" i="0" dirty="0">
                           <a:latin typeface="Times New Roman Regular" panose="02020503050405090304" charset="0"/>
                           <a:ea typeface="-apple-system"/>
                           <a:cs typeface="Times New Roman Regular" panose="02020503050405090304" charset="0"/>
@@ -5469,7 +5570,7 @@
                         <a:t>→ justifies one kw per </a:t>
                       </a:r>
                       <a:r>
-                        <a:rPr lang="en-US" altLang="zh-CN" sz="2000" b="0" i="0">
+                        <a:rPr lang="en-US" altLang="zh-CN" sz="2000" b="0" i="0" dirty="0">
                           <a:solidFill>
                             <a:srgbClr val="FF0000"/>
                           </a:solidFill>
@@ -5479,7 +5580,7 @@
                         </a:rPr>
                         <a:t>DMA</a:t>
                       </a:r>
-                      <a:endParaRPr lang="en-US" altLang="zh-CN" sz="2000" b="0" i="0">
+                      <a:endParaRPr lang="en-US" altLang="zh-CN" sz="2000" b="0" i="0" dirty="0">
                         <a:solidFill>
                           <a:srgbClr val="FF0000"/>
                         </a:solidFill>
@@ -5489,7 +5590,7 @@
                       </a:endParaRPr>
                     </a:p>
                   </a:txBody>
-                  <a:tcPr marL="114617" marR="114617" marT="63817" marB="63817" anchor="t" anchorCtr="0">
+                  <a:tcPr marL="114617" marR="114617" marT="63817" marB="63817">
                     <a:lnL w="12700">
                       <a:solidFill>
                         <a:schemeClr val="tx1"/>
@@ -5522,6 +5623,7 @@
                 <a:tc>
                   <a:txBody>
                     <a:bodyPr/>
+                    <a:lstStyle/>
                     <a:p>
                       <a:pPr algn="l" fontAlgn="t" latinLnBrk="0"/>
                       <a:r>
@@ -5552,7 +5654,7 @@
                       </a:endParaRPr>
                     </a:p>
                   </a:txBody>
-                  <a:tcPr marL="114617" marR="114617" marT="63817" marB="63817" anchor="t" anchorCtr="0">
+                  <a:tcPr marL="114617" marR="114617" marT="63817" marB="63817">
                     <a:lnL w="12700">
                       <a:solidFill>
                         <a:schemeClr val="tx1"/>
@@ -5583,24 +5685,25 @@
                 <a:tc>
                   <a:txBody>
                     <a:bodyPr/>
+                    <a:lstStyle/>
                     <a:p>
                       <a:pPr algn="l" fontAlgn="t" latinLnBrk="0"/>
                       <a:r>
-                        <a:rPr lang="en-US" altLang="zh-CN" sz="2000" b="0" i="0">
+                        <a:rPr lang="en-US" altLang="zh-CN" sz="2000" b="0" i="0" dirty="0">
                           <a:latin typeface="Times New Roman Regular" panose="02020503050405090304" charset="0"/>
                           <a:ea typeface="-apple-system"/>
                           <a:cs typeface="Times New Roman Regular" panose="02020503050405090304" charset="0"/>
                         </a:rPr>
                         <a:t>bulk decay is driven by TOC/temperature → informs the kb prior</a:t>
                       </a:r>
-                      <a:endParaRPr lang="en-US" altLang="zh-CN" sz="2000" b="0" i="0">
+                      <a:endParaRPr lang="en-US" altLang="zh-CN" sz="2000" b="0" i="0" dirty="0">
                         <a:latin typeface="Times New Roman Regular" panose="02020503050405090304" charset="0"/>
                         <a:ea typeface="-apple-system"/>
                         <a:cs typeface="Times New Roman Regular" panose="02020503050405090304" charset="0"/>
                       </a:endParaRPr>
                     </a:p>
                   </a:txBody>
-                  <a:tcPr marL="114617" marR="114617" marT="63817" marB="63817" anchor="t" anchorCtr="0">
+                  <a:tcPr marL="114617" marR="114617" marT="63817" marB="63817">
                     <a:lnL w="12700">
                       <a:solidFill>
                         <a:schemeClr val="tx1"/>
@@ -5633,6 +5736,7 @@
                 <a:tc>
                   <a:txBody>
                     <a:bodyPr/>
+                    <a:lstStyle/>
                     <a:p>
                       <a:pPr algn="l" fontAlgn="t" latinLnBrk="0"/>
                       <a:r>
@@ -5663,7 +5767,7 @@
                       </a:endParaRPr>
                     </a:p>
                   </a:txBody>
-                  <a:tcPr marL="114617" marR="114617" marT="63817" marB="63817" anchor="t" anchorCtr="0">
+                  <a:tcPr marL="114617" marR="114617" marT="63817" marB="63817">
                     <a:lnL w="12700">
                       <a:solidFill>
                         <a:schemeClr val="tx1"/>
@@ -5694,24 +5798,41 @@
                 <a:tc>
                   <a:txBody>
                     <a:bodyPr/>
+                    <a:lstStyle/>
                     <a:p>
                       <a:pPr algn="l" fontAlgn="t" latinLnBrk="0"/>
                       <a:r>
-                        <a:rPr lang="en-US" altLang="zh-CN" sz="2000" b="0" i="0">
+                        <a:rPr lang="en-US" altLang="zh-CN" sz="2000" b="0" i="0" dirty="0">
                           <a:latin typeface="Times New Roman Regular" panose="02020503050405090304" charset="0"/>
                           <a:ea typeface="-apple-system"/>
                           <a:cs typeface="Times New Roman Regular" panose="02020503050405090304" charset="0"/>
                         </a:rPr>
-                        <a:t>EPANET wrapper + NetworkX + Pandas + built-in Monte Carlo</a:t>
+                        <a:t>EPANET wrapper + </a:t>
                       </a:r>
-                      <a:endParaRPr lang="en-US" altLang="zh-CN" sz="2000" b="0" i="0">
+                      <a:r>
+                        <a:rPr lang="en-US" altLang="zh-CN" sz="2000" b="0" i="0" dirty="0" err="1">
+                          <a:latin typeface="Times New Roman Regular" panose="02020503050405090304" charset="0"/>
+                          <a:ea typeface="-apple-system"/>
+                          <a:cs typeface="Times New Roman Regular" panose="02020503050405090304" charset="0"/>
+                        </a:rPr>
+                        <a:t>NetworkX</a:t>
+                      </a:r>
+                      <a:r>
+                        <a:rPr lang="en-US" altLang="zh-CN" sz="2000" b="0" i="0" dirty="0">
+                          <a:latin typeface="Times New Roman Regular" panose="02020503050405090304" charset="0"/>
+                          <a:ea typeface="-apple-system"/>
+                          <a:cs typeface="Times New Roman Regular" panose="02020503050405090304" charset="0"/>
+                        </a:rPr>
+                        <a:t> + Pandas + built-in Monte Carlo</a:t>
+                      </a:r>
+                      <a:endParaRPr lang="en-US" altLang="zh-CN" sz="2000" b="0" i="0" dirty="0">
                         <a:latin typeface="Times New Roman Regular" panose="02020503050405090304" charset="0"/>
                         <a:ea typeface="-apple-system"/>
                         <a:cs typeface="Times New Roman Regular" panose="02020503050405090304" charset="0"/>
                       </a:endParaRPr>
                     </a:p>
                   </a:txBody>
-                  <a:tcPr marL="114617" marR="114617" marT="63817" marB="63817" anchor="t" anchorCtr="0">
+                  <a:tcPr marL="114617" marR="114617" marT="63817" marB="63817">
                     <a:lnL w="12700">
                       <a:solidFill>
                         <a:schemeClr val="tx1"/>
@@ -5744,6 +5865,7 @@
                 <a:tc>
                   <a:txBody>
                     <a:bodyPr/>
+                    <a:lstStyle/>
                     <a:p>
                       <a:pPr algn="l" fontAlgn="t" latinLnBrk="0"/>
                       <a:r>
@@ -5774,7 +5896,7 @@
                       </a:endParaRPr>
                     </a:p>
                   </a:txBody>
-                  <a:tcPr marL="114617" marR="114617" marT="63817" marB="63817" anchor="t" anchorCtr="0">
+                  <a:tcPr marL="114617" marR="114617" marT="63817" marB="63817">
                     <a:lnL w="12700">
                       <a:solidFill>
                         <a:schemeClr val="tx1"/>
@@ -5805,17 +5927,34 @@
                 <a:tc>
                   <a:txBody>
                     <a:bodyPr/>
+                    <a:lstStyle/>
                     <a:p>
                       <a:pPr algn="l" fontAlgn="t" latinLnBrk="0"/>
                       <a:r>
-                        <a:rPr lang="en-US" altLang="zh-CN" sz="2000" b="0" i="0">
+                        <a:rPr lang="en-US" altLang="zh-CN" sz="2000" b="0" i="0" dirty="0">
                           <a:latin typeface="Times New Roman Regular" panose="02020503050405090304" charset="0"/>
                           <a:ea typeface="-apple-system"/>
                           <a:cs typeface="Times New Roman Regular" panose="02020503050405090304" charset="0"/>
                         </a:rPr>
-                        <a:t>water-quality numerics: bulk/wall/mass-transfer term, </a:t>
+                        <a:t>water-quality </a:t>
                       </a:r>
-                      <a:endParaRPr lang="en-US" altLang="zh-CN" sz="2000" b="0" i="0">
+                      <a:r>
+                        <a:rPr lang="en-US" altLang="zh-CN" sz="2000" b="0" i="0" dirty="0" err="1">
+                          <a:latin typeface="Times New Roman Regular" panose="02020503050405090304" charset="0"/>
+                          <a:ea typeface="-apple-system"/>
+                          <a:cs typeface="Times New Roman Regular" panose="02020503050405090304" charset="0"/>
+                        </a:rPr>
+                        <a:t>numerics</a:t>
+                      </a:r>
+                      <a:r>
+                        <a:rPr lang="en-US" altLang="zh-CN" sz="2000" b="0" i="0" dirty="0">
+                          <a:latin typeface="Times New Roman Regular" panose="02020503050405090304" charset="0"/>
+                          <a:ea typeface="-apple-system"/>
+                          <a:cs typeface="Times New Roman Regular" panose="02020503050405090304" charset="0"/>
+                        </a:rPr>
+                        <a:t>: bulk/wall/mass-transfer term, </a:t>
+                      </a:r>
+                      <a:endParaRPr lang="en-US" altLang="zh-CN" sz="2000" b="0" i="0" dirty="0">
                         <a:latin typeface="Times New Roman Regular" panose="02020503050405090304" charset="0"/>
                         <a:ea typeface="-apple-system"/>
                         <a:cs typeface="Times New Roman Regular" panose="02020503050405090304" charset="0"/>
@@ -5824,21 +5963,21 @@
                     <a:p>
                       <a:pPr algn="l" fontAlgn="t" latinLnBrk="0"/>
                       <a:r>
-                        <a:rPr lang="en-US" altLang="zh-CN" sz="2000" b="0" i="0">
+                        <a:rPr lang="en-US" altLang="zh-CN" sz="2000" b="0" i="0" dirty="0">
                           <a:latin typeface="Times New Roman Regular" panose="02020503050405090304" charset="0"/>
                           <a:ea typeface="-apple-system"/>
                           <a:cs typeface="Times New Roman Regular" panose="02020503050405090304" charset="0"/>
                         </a:rPr>
                         <a:t>unit conventions</a:t>
                       </a:r>
-                      <a:endParaRPr lang="en-US" altLang="zh-CN" sz="2000" b="0" i="0">
+                      <a:endParaRPr lang="en-US" altLang="zh-CN" sz="2000" b="0" i="0" dirty="0">
                         <a:latin typeface="Times New Roman Regular" panose="02020503050405090304" charset="0"/>
                         <a:ea typeface="-apple-system"/>
                         <a:cs typeface="Times New Roman Regular" panose="02020503050405090304" charset="0"/>
                       </a:endParaRPr>
                     </a:p>
                   </a:txBody>
-                  <a:tcPr marL="114617" marR="114617" marT="63817" marB="63817" anchor="t" anchorCtr="0">
+                  <a:tcPr marL="114617" marR="114617" marT="63817" marB="63817">
                     <a:lnL w="12700">
                       <a:solidFill>
                         <a:schemeClr val="tx1"/>
@@ -5871,11 +6010,128 @@
           </a:graphicData>
         </a:graphic>
       </p:graphicFrame>
+      <p:pic>
+        <p:nvPicPr>
+          <p:cNvPr id="4" name="Audio Recording 2026年6月3日 23:03:20">
+            <a:hlinkClick r:id="" action="ppaction://media"/>
+          </p:cNvPr>
+          <p:cNvPicPr>
+            <a:picLocks noChangeAspect="1"/>
+          </p:cNvPicPr>
+          <p:nvPr>
+            <a:audioFile r:link="rId1"/>
+            <p:extLst>
+              <p:ext uri="{DAA4B4D4-6D71-4841-9C94-3DE7FCFB9230}">
+                <p14:media xmlns:p14="http://schemas.microsoft.com/office/powerpoint/2010/main" r:embed="rId2"/>
+              </p:ext>
+            </p:extLst>
+          </p:nvPr>
+        </p:nvPicPr>
+        <p:blipFill>
+          <a:blip r:embed="rId3"/>
+          <a:stretch>
+            <a:fillRect/>
+          </a:stretch>
+        </p:blipFill>
+        <p:spPr>
+          <a:xfrm>
+            <a:off x="11379200" y="6043930"/>
+            <a:ext cx="812800" cy="812800"/>
+          </a:xfrm>
+          <a:prstGeom prst="rect">
+            <a:avLst/>
+          </a:prstGeom>
+        </p:spPr>
+      </p:pic>
     </p:spTree>
   </p:cSld>
   <p:clrMapOvr>
     <a:masterClrMapping/>
   </p:clrMapOvr>
+  <p:timing>
+    <p:tnLst>
+      <p:par>
+        <p:cTn id="1" dur="indefinite" restart="never" nodeType="tmRoot">
+          <p:childTnLst>
+            <p:seq concurrent="1" nextAc="seek">
+              <p:cTn id="2" dur="indefinite" nodeType="mainSeq">
+                <p:childTnLst>
+                  <p:par>
+                    <p:cTn id="3" fill="hold">
+                      <p:stCondLst>
+                        <p:cond delay="indefinite"/>
+                      </p:stCondLst>
+                      <p:childTnLst>
+                        <p:par>
+                          <p:cTn id="4" fill="hold">
+                            <p:stCondLst>
+                              <p:cond delay="0"/>
+                            </p:stCondLst>
+                            <p:childTnLst>
+                              <p:par>
+                                <p:cTn id="5" presetID="1" presetClass="mediacall" presetSubtype="0" fill="hold" nodeType="clickEffect">
+                                  <p:stCondLst>
+                                    <p:cond delay="0"/>
+                                  </p:stCondLst>
+                                  <p:childTnLst>
+                                    <p:cmd type="call" cmd="playFrom(0.0)">
+                                      <p:cBhvr>
+                                        <p:cTn id="6" dur="68028" fill="hold"/>
+                                        <p:tgtEl>
+                                          <p:spTgt spid="4"/>
+                                        </p:tgtEl>
+                                      </p:cBhvr>
+                                    </p:cmd>
+                                  </p:childTnLst>
+                                </p:cTn>
+                              </p:par>
+                            </p:childTnLst>
+                          </p:cTn>
+                        </p:par>
+                      </p:childTnLst>
+                    </p:cTn>
+                  </p:par>
+                </p:childTnLst>
+              </p:cTn>
+              <p:prevCondLst>
+                <p:cond evt="onPrev" delay="0">
+                  <p:tgtEl>
+                    <p:sldTgt/>
+                  </p:tgtEl>
+                </p:cond>
+              </p:prevCondLst>
+              <p:nextCondLst>
+                <p:cond evt="onNext" delay="0">
+                  <p:tgtEl>
+                    <p:sldTgt/>
+                  </p:tgtEl>
+                </p:cond>
+              </p:nextCondLst>
+            </p:seq>
+            <p:audio>
+              <p:cMediaNode vol="80000" mute="1">
+                <p:cTn id="7" fill="hold" display="0">
+                  <p:stCondLst>
+                    <p:cond delay="indefinite"/>
+                  </p:stCondLst>
+                  <p:endCondLst>
+                    <p:cond evt="onStopAudio" delay="0">
+                      <p:tgtEl>
+                        <p:sldTgt/>
+                      </p:tgtEl>
+                    </p:cond>
+                  </p:endCondLst>
+                </p:cTn>
+                <p:tgtEl>
+                  <p:spTgt spid="4"/>
+                </p:tgtEl>
+              </p:cMediaNode>
+            </p:audio>
+          </p:childTnLst>
+        </p:cTn>
+      </p:par>
+    </p:tnLst>
+  </p:timing>
 </p:sld>
 </file>
 
@@ -5888,7 +6144,14 @@
         <p:cNvGrpSpPr/>
         <p:nvPr/>
       </p:nvGrpSpPr>
-      <p:grpSpPr/>
+      <p:grpSpPr>
+        <a:xfrm>
+          <a:off x="0" y="0"/>
+          <a:ext cx="0" cy="0"/>
+          <a:chOff x="0" y="0"/>
+          <a:chExt cx="0" cy="0"/>
+        </a:xfrm>
+      </p:grpSpPr>
       <p:sp>
         <p:nvSpPr>
           <p:cNvPr id="4" name="文本框 3"/>
@@ -5909,42 +6172,43 @@
           <a:bodyPr wrap="square" rtlCol="0" anchor="t">
             <a:spAutoFit/>
           </a:bodyPr>
-          <a:p>
-            <a:r>
-              <a:rPr lang="en-US" altLang="zh-CN">
-                <a:latin typeface="Times New Roman" panose="02020503050405090304" charset="0"/>
-                <a:cs typeface="Times New Roman" panose="02020503050405090304" charset="0"/>
-              </a:rPr>
-              <a:t>3 DMA points:  </a:t>
-            </a:r>
-            <a:endParaRPr lang="en-US" altLang="zh-CN">
+          <a:lstStyle/>
+          <a:p>
+            <a:r>
+              <a:rPr lang="en-US" altLang="zh-CN" dirty="0">
+                <a:latin typeface="Times New Roman" panose="02020503050405090304" charset="0"/>
+                <a:cs typeface="Times New Roman" panose="02020503050405090304" charset="0"/>
+              </a:rPr>
+              <a:t>3 DMAs:  </a:t>
+            </a:r>
+            <a:endParaRPr lang="en-US" altLang="zh-CN" dirty="0">
               <a:latin typeface="Times New Roman" panose="02020503050405090304" charset="0"/>
               <a:cs typeface="Times New Roman" panose="02020503050405090304" charset="0"/>
             </a:endParaRPr>
           </a:p>
           <a:p>
             <a:r>
-              <a:rPr lang="en-US" altLang="zh-CN">
+              <a:rPr lang="en-US" altLang="zh-CN" dirty="0">
                 <a:latin typeface="Times New Roman" panose="02020503050405090304" charset="0"/>
                 <a:cs typeface="Times New Roman" panose="02020503050405090304" charset="0"/>
               </a:rPr>
               <a:t>1. Hydraulic parameters are assumed correct without calibration.  </a:t>
             </a:r>
-            <a:endParaRPr lang="en-US" altLang="zh-CN">
+            <a:endParaRPr lang="en-US" altLang="zh-CN" dirty="0">
               <a:latin typeface="Times New Roman" panose="02020503050405090304" charset="0"/>
               <a:cs typeface="Times New Roman" panose="02020503050405090304" charset="0"/>
             </a:endParaRPr>
           </a:p>
           <a:p>
             <a:r>
-              <a:rPr lang="en-US" altLang="zh-CN">
+              <a:rPr lang="en-US" altLang="zh-CN" dirty="0">
                 <a:latin typeface="Times New Roman" panose="02020503050405090304" charset="0"/>
                 <a:cs typeface="Times New Roman" panose="02020503050405090304" charset="0"/>
               </a:rPr>
               <a:t>2. TOC, DBP, and biofilm effects are not considered</a:t>
             </a:r>
             <a:r>
-              <a:rPr lang="en-US" altLang="zh-CN">
+              <a:rPr lang="en-US" altLang="zh-CN" dirty="0">
                 <a:solidFill>
                   <a:srgbClr val="FF0000"/>
                 </a:solidFill>
@@ -5953,206 +6217,391 @@
               </a:rPr>
               <a:t>?  </a:t>
             </a:r>
-            <a:endParaRPr lang="en-US" altLang="zh-CN">
+            <a:endParaRPr lang="en-US" altLang="zh-CN" dirty="0">
               <a:latin typeface="Times New Roman" panose="02020503050405090304" charset="0"/>
               <a:cs typeface="Times New Roman" panose="02020503050405090304" charset="0"/>
             </a:endParaRPr>
           </a:p>
           <a:p>
             <a:r>
-              <a:rPr lang="en-US" altLang="zh-CN">
-                <a:latin typeface="Times New Roman" panose="02020503050405090304" charset="0"/>
-                <a:cs typeface="Times New Roman" panose="02020503050405090304" charset="0"/>
-              </a:rPr>
-              <a:t>3. The inlet monitor has already measured it -- direct input (getting started -- normalization).  </a:t>
-            </a:r>
-            <a:endParaRPr lang="en-US" altLang="zh-CN">
+              <a:rPr lang="en-US" altLang="zh-CN" dirty="0">
+                <a:latin typeface="Times New Roman" panose="02020503050405090304" charset="0"/>
+                <a:cs typeface="Times New Roman" panose="02020503050405090304" charset="0"/>
+              </a:rPr>
+              <a:t>3. The inlet monitor has already measured it -- direct input (ex-normalization).  </a:t>
+            </a:r>
+            <a:endParaRPr lang="en-US" altLang="zh-CN" dirty="0">
               <a:latin typeface="Times New Roman" panose="02020503050405090304" charset="0"/>
               <a:cs typeface="Times New Roman" panose="02020503050405090304" charset="0"/>
             </a:endParaRPr>
           </a:p>
           <a:p>
             <a:r>
-              <a:rPr lang="en-US" altLang="zh-CN">
-                <a:latin typeface="Times New Roman" panose="02020503050405090304" charset="0"/>
-                <a:cs typeface="Times New Roman" panose="02020503050405090304" charset="0"/>
-              </a:rPr>
-              <a:t>4. Attenuation: kw, kb, first-order attenuation</a:t>
-            </a:r>
-            <a:endParaRPr lang="en-US" altLang="zh-CN">
+              <a:rPr lang="en-US" altLang="zh-CN" dirty="0">
+                <a:latin typeface="Times New Roman" panose="02020503050405090304" charset="0"/>
+                <a:cs typeface="Times New Roman" panose="02020503050405090304" charset="0"/>
+              </a:rPr>
+              <a:t>4. Decay: k</a:t>
+            </a:r>
+            <a:r>
+              <a:rPr lang="en-US" altLang="zh-CN" baseline="-25000" dirty="0">
+                <a:latin typeface="Times New Roman" panose="02020503050405090304" charset="0"/>
+                <a:cs typeface="Times New Roman" panose="02020503050405090304" charset="0"/>
+              </a:rPr>
+              <a:t>w</a:t>
+            </a:r>
+            <a:r>
+              <a:rPr lang="en-US" altLang="zh-CN" dirty="0">
+                <a:latin typeface="Times New Roman" panose="02020503050405090304" charset="0"/>
+                <a:cs typeface="Times New Roman" panose="02020503050405090304" charset="0"/>
+              </a:rPr>
+              <a:t>, k</a:t>
+            </a:r>
+            <a:r>
+              <a:rPr lang="en-US" altLang="zh-CN" baseline="-25000" dirty="0">
+                <a:latin typeface="Times New Roman" panose="02020503050405090304" charset="0"/>
+                <a:cs typeface="Times New Roman" panose="02020503050405090304" charset="0"/>
+              </a:rPr>
+              <a:t>b</a:t>
+            </a:r>
+            <a:r>
+              <a:rPr lang="en-US" altLang="zh-CN" dirty="0">
+                <a:latin typeface="Times New Roman" panose="02020503050405090304" charset="0"/>
+                <a:cs typeface="Times New Roman" panose="02020503050405090304" charset="0"/>
+              </a:rPr>
+              <a:t>, first-order</a:t>
+            </a:r>
+            <a:endParaRPr lang="en-US" altLang="zh-CN" dirty="0">
               <a:latin typeface="Times New Roman" panose="02020503050405090304" charset="0"/>
               <a:cs typeface="Times New Roman" panose="02020503050405090304" charset="0"/>
             </a:endParaRPr>
           </a:p>
           <a:p>
-            <a:endParaRPr lang="en-US" altLang="zh-CN">
+            <a:r>
+              <a:rPr lang="en-US" altLang="zh-CN" dirty="0">
+                <a:latin typeface="Times New Roman" panose="02020503050405090304" charset="0"/>
+                <a:cs typeface="Times New Roman" panose="02020503050405090304" charset="0"/>
+              </a:rPr>
+              <a:t>5.</a:t>
+            </a:r>
+            <a:r>
+              <a:rPr lang="zh-CN" altLang="en-US" dirty="0">
+                <a:latin typeface="Times New Roman" panose="02020503050405090304" charset="0"/>
+                <a:cs typeface="Times New Roman" panose="02020503050405090304" charset="0"/>
+              </a:rPr>
+              <a:t> </a:t>
+            </a:r>
+            <a:r>
+              <a:rPr lang="en-US" altLang="zh-CN" dirty="0">
+                <a:latin typeface="Times New Roman" panose="02020503050405090304" charset="0"/>
+                <a:cs typeface="Times New Roman" panose="02020503050405090304" charset="0"/>
+              </a:rPr>
+              <a:t>Monitoring point (3 inputs + 5 fittings + 2 validations)</a:t>
+            </a:r>
+            <a:r>
+              <a:rPr lang="en-US" altLang="zh-CN" dirty="0">
+                <a:solidFill>
+                  <a:srgbClr val="FF0000"/>
+                </a:solidFill>
+                <a:latin typeface="Times New Roman" panose="02020503050405090304" charset="0"/>
+                <a:cs typeface="Times New Roman" panose="02020503050405090304" charset="0"/>
+              </a:rPr>
+              <a:t>?</a:t>
+            </a:r>
+            <a:r>
+              <a:rPr lang="en-US" altLang="zh-CN" dirty="0">
+                <a:latin typeface="Times New Roman" panose="02020503050405090304" charset="0"/>
+                <a:cs typeface="Times New Roman" panose="02020503050405090304" charset="0"/>
+              </a:rPr>
+              <a:t> </a:t>
+            </a:r>
+            <a:endParaRPr lang="en-US" altLang="zh-CN" dirty="0">
               <a:latin typeface="Times New Roman" panose="02020503050405090304" charset="0"/>
               <a:cs typeface="Times New Roman" panose="02020503050405090304" charset="0"/>
             </a:endParaRPr>
           </a:p>
           <a:p>
-            <a:r>
-              <a:rPr lang="en-US" altLang="zh-CN">
-                <a:latin typeface="Times New Roman" panose="02020503050405090304" charset="0"/>
-                <a:cs typeface="Times New Roman" panose="02020503050405090304" charset="0"/>
-              </a:rPr>
-              <a:t>Based on prior experience, knowing the ranges of kb and kw, simulate a series of (kb, kw) pairs, compare Csim with Cobs to determine suitable Csim values and the corresponding interval for (kb, kw), and also obtain probabilities within reasonable ranges -- Monte Carlo ensemble, GLUE (Bayesian method not yet reviewed, uncertainty remains). </a:t>
-            </a:r>
-            <a:endParaRPr lang="en-US" altLang="zh-CN">
+            <a:endParaRPr lang="en-US" altLang="zh-CN" dirty="0">
               <a:latin typeface="Times New Roman" panose="02020503050405090304" charset="0"/>
               <a:cs typeface="Times New Roman" panose="02020503050405090304" charset="0"/>
             </a:endParaRPr>
           </a:p>
           <a:p>
-            <a:endParaRPr lang="en-US" altLang="zh-CN">
+            <a:r>
+              <a:rPr lang="en-US" altLang="zh-CN" dirty="0">
+                <a:latin typeface="Times New Roman" panose="02020503050405090304" charset="0"/>
+                <a:cs typeface="Times New Roman" panose="02020503050405090304" charset="0"/>
+              </a:rPr>
+              <a:t>Based on prior experience, knowing the ranges of kb and kw, simulate a series of (kb, kw) pairs, compare </a:t>
+            </a:r>
+            <a:r>
+              <a:rPr lang="en-US" altLang="zh-CN" dirty="0" err="1">
+                <a:latin typeface="Times New Roman" panose="02020503050405090304" charset="0"/>
+                <a:cs typeface="Times New Roman" panose="02020503050405090304" charset="0"/>
+              </a:rPr>
+              <a:t>C</a:t>
+            </a:r>
+            <a:r>
+              <a:rPr lang="en-US" altLang="zh-CN" baseline="-25000" dirty="0" err="1">
+                <a:latin typeface="Times New Roman" panose="02020503050405090304" charset="0"/>
+                <a:cs typeface="Times New Roman" panose="02020503050405090304" charset="0"/>
+              </a:rPr>
+              <a:t>sim</a:t>
+            </a:r>
+            <a:r>
+              <a:rPr lang="en-US" altLang="zh-CN" dirty="0">
+                <a:latin typeface="Times New Roman" panose="02020503050405090304" charset="0"/>
+                <a:cs typeface="Times New Roman" panose="02020503050405090304" charset="0"/>
+              </a:rPr>
+              <a:t> with C</a:t>
+            </a:r>
+            <a:r>
+              <a:rPr lang="en-US" altLang="zh-CN" baseline="-25000" dirty="0">
+                <a:latin typeface="Times New Roman" panose="02020503050405090304" charset="0"/>
+                <a:cs typeface="Times New Roman" panose="02020503050405090304" charset="0"/>
+              </a:rPr>
+              <a:t>obs</a:t>
+            </a:r>
+            <a:r>
+              <a:rPr lang="en-US" altLang="zh-CN" dirty="0">
+                <a:latin typeface="Times New Roman" panose="02020503050405090304" charset="0"/>
+                <a:cs typeface="Times New Roman" panose="02020503050405090304" charset="0"/>
+              </a:rPr>
+              <a:t> to determine suitable </a:t>
+            </a:r>
+            <a:r>
+              <a:rPr lang="en-US" altLang="zh-CN" dirty="0" err="1">
+                <a:latin typeface="Times New Roman" panose="02020503050405090304" charset="0"/>
+                <a:cs typeface="Times New Roman" panose="02020503050405090304" charset="0"/>
+              </a:rPr>
+              <a:t>C</a:t>
+            </a:r>
+            <a:r>
+              <a:rPr lang="en-US" altLang="zh-CN" baseline="-25000" dirty="0" err="1">
+                <a:latin typeface="Times New Roman" panose="02020503050405090304" charset="0"/>
+                <a:cs typeface="Times New Roman" panose="02020503050405090304" charset="0"/>
+              </a:rPr>
+              <a:t>sim</a:t>
+            </a:r>
+            <a:r>
+              <a:rPr lang="en-US" altLang="zh-CN" dirty="0">
+                <a:latin typeface="Times New Roman" panose="02020503050405090304" charset="0"/>
+                <a:cs typeface="Times New Roman" panose="02020503050405090304" charset="0"/>
+              </a:rPr>
+              <a:t> and </a:t>
+            </a:r>
+            <a:r>
+              <a:rPr lang="en-US" altLang="zh-CN" dirty="0">
+                <a:latin typeface="Times New Roman" panose="02020503050405090304" charset="0"/>
+                <a:cs typeface="Times New Roman" panose="02020503050405090304" charset="0"/>
+              </a:rPr>
+              <a:t>find the corresponding interval for (k</a:t>
+            </a:r>
+            <a:r>
+              <a:rPr lang="en-US" altLang="zh-CN" baseline="-25000" dirty="0">
+                <a:latin typeface="Times New Roman" panose="02020503050405090304" charset="0"/>
+                <a:cs typeface="Times New Roman" panose="02020503050405090304" charset="0"/>
+              </a:rPr>
+              <a:t>b</a:t>
+            </a:r>
+            <a:r>
+              <a:rPr lang="en-US" altLang="zh-CN" dirty="0">
+                <a:latin typeface="Times New Roman" panose="02020503050405090304" charset="0"/>
+                <a:cs typeface="Times New Roman" panose="02020503050405090304" charset="0"/>
+              </a:rPr>
+              <a:t>, k</a:t>
+            </a:r>
+            <a:r>
+              <a:rPr lang="en-US" altLang="zh-CN" baseline="-25000" dirty="0">
+                <a:latin typeface="Times New Roman" panose="02020503050405090304" charset="0"/>
+                <a:cs typeface="Times New Roman" panose="02020503050405090304" charset="0"/>
+              </a:rPr>
+              <a:t>w</a:t>
+            </a:r>
+            <a:r>
+              <a:rPr lang="en-US" altLang="zh-CN" dirty="0">
+                <a:latin typeface="Times New Roman" panose="02020503050405090304" charset="0"/>
+                <a:cs typeface="Times New Roman" panose="02020503050405090304" charset="0"/>
+              </a:rPr>
+              <a:t>), and also obtain probabilities within reasonable ranges -- Monte Carlo ensemble, GLUE. </a:t>
+            </a:r>
+            <a:endParaRPr lang="en-US" altLang="zh-CN" dirty="0">
               <a:latin typeface="Times New Roman" panose="02020503050405090304" charset="0"/>
               <a:cs typeface="Times New Roman" panose="02020503050405090304" charset="0"/>
             </a:endParaRPr>
           </a:p>
           <a:p>
             <a:r>
-              <a:rPr lang="en-US" altLang="zh-CN">
-                <a:latin typeface="Times New Roman" panose="02020503050405090304" charset="0"/>
-                <a:cs typeface="Times New Roman" panose="02020503050405090304" charset="0"/>
-              </a:rPr>
-              <a:t>Monitoring point (3 inputs + 5 fittings + 2 validations) </a:t>
-            </a:r>
-            <a:endParaRPr lang="en-US" altLang="zh-CN">
+              <a:rPr lang="en-US" altLang="zh-CN" dirty="0">
+                <a:solidFill>
+                  <a:srgbClr val="FF0000"/>
+                </a:solidFill>
+                <a:latin typeface="Times New Roman" panose="02020503050405090304" charset="0"/>
+                <a:cs typeface="Times New Roman" panose="02020503050405090304" charset="0"/>
+              </a:rPr>
+              <a:t>?</a:t>
+            </a:r>
+            <a:endParaRPr lang="en-US" altLang="zh-CN" dirty="0">
+              <a:solidFill>
+                <a:srgbClr val="FF0000"/>
+              </a:solidFill>
               <a:latin typeface="Times New Roman" panose="02020503050405090304" charset="0"/>
               <a:cs typeface="Times New Roman" panose="02020503050405090304" charset="0"/>
             </a:endParaRPr>
           </a:p>
           <a:p>
-            <a:endParaRPr lang="en-US" altLang="zh-CN">
+            <a:r>
+              <a:rPr lang="en-US" altLang="zh-CN" dirty="0">
+                <a:latin typeface="Times New Roman" panose="02020503050405090304" charset="0"/>
+                <a:cs typeface="Times New Roman" panose="02020503050405090304" charset="0"/>
+              </a:rPr>
+              <a:t>Does k</a:t>
+            </a:r>
+            <a:r>
+              <a:rPr lang="en-US" altLang="zh-CN" baseline="-25000" dirty="0">
+                <a:latin typeface="Times New Roman" panose="02020503050405090304" charset="0"/>
+                <a:cs typeface="Times New Roman" panose="02020503050405090304" charset="0"/>
+              </a:rPr>
+              <a:t>b</a:t>
+            </a:r>
+            <a:r>
+              <a:rPr lang="en-US" altLang="zh-CN" dirty="0">
+                <a:latin typeface="Times New Roman" panose="02020503050405090304" charset="0"/>
+                <a:cs typeface="Times New Roman" panose="02020503050405090304" charset="0"/>
+              </a:rPr>
+              <a:t> share across DMA(same source?)? Does k</a:t>
+            </a:r>
+            <a:r>
+              <a:rPr lang="en-US" altLang="zh-CN" baseline="-25000" dirty="0">
+                <a:latin typeface="Times New Roman" panose="02020503050405090304" charset="0"/>
+                <a:cs typeface="Times New Roman" panose="02020503050405090304" charset="0"/>
+              </a:rPr>
+              <a:t>b</a:t>
+            </a:r>
+            <a:r>
+              <a:rPr lang="en-US" altLang="zh-CN" dirty="0">
+                <a:latin typeface="Times New Roman" panose="02020503050405090304" charset="0"/>
+                <a:cs typeface="Times New Roman" panose="02020503050405090304" charset="0"/>
+              </a:rPr>
+              <a:t> require separate calibration (jar test)? </a:t>
+            </a:r>
+            <a:endParaRPr lang="en-US" altLang="zh-CN" dirty="0">
               <a:latin typeface="Times New Roman" panose="02020503050405090304" charset="0"/>
               <a:cs typeface="Times New Roman" panose="02020503050405090304" charset="0"/>
             </a:endParaRPr>
           </a:p>
           <a:p>
-            <a:r>
-              <a:rPr lang="en-US" altLang="zh-CN">
-                <a:latin typeface="Times New Roman" panose="02020503050405090304" charset="0"/>
-                <a:cs typeface="Times New Roman" panose="02020503050405090304" charset="0"/>
-              </a:rPr>
-              <a:t>?</a:t>
-            </a:r>
-            <a:endParaRPr lang="en-US" altLang="zh-CN">
+            <a:endParaRPr lang="en-US" altLang="zh-CN" strike="sngStrike" dirty="0">
               <a:latin typeface="Times New Roman" panose="02020503050405090304" charset="0"/>
               <a:cs typeface="Times New Roman" panose="02020503050405090304" charset="0"/>
             </a:endParaRPr>
           </a:p>
           <a:p>
             <a:r>
-              <a:rPr lang="en-US" altLang="zh-CN">
-                <a:latin typeface="Times New Roman" panose="02020503050405090304" charset="0"/>
-                <a:cs typeface="Times New Roman" panose="02020503050405090304" charset="0"/>
-              </a:rPr>
-              <a:t>Does k</a:t>
-            </a:r>
-            <a:r>
-              <a:rPr lang="en-US" altLang="zh-CN" baseline="-25000">
+              <a:rPr lang="en-US" altLang="zh-CN" strike="sngStrike" dirty="0">
+                <a:latin typeface="Times New Roman" panose="02020503050405090304" charset="0"/>
+                <a:cs typeface="Times New Roman" panose="02020503050405090304" charset="0"/>
+              </a:rPr>
+              <a:t>Fix k</a:t>
+            </a:r>
+            <a:r>
+              <a:rPr lang="en-US" altLang="zh-CN" strike="sngStrike" baseline="-25000" dirty="0">
                 <a:latin typeface="Times New Roman" panose="02020503050405090304" charset="0"/>
                 <a:cs typeface="Times New Roman" panose="02020503050405090304" charset="0"/>
               </a:rPr>
               <a:t>b</a:t>
             </a:r>
             <a:r>
-              <a:rPr lang="en-US" altLang="zh-CN">
-                <a:latin typeface="Times New Roman" panose="02020503050405090304" charset="0"/>
-                <a:cs typeface="Times New Roman" panose="02020503050405090304" charset="0"/>
-              </a:rPr>
-              <a:t> share across DMA(same source?)? Does k</a:t>
-            </a:r>
-            <a:r>
-              <a:rPr lang="en-US" altLang="zh-CN" baseline="-25000">
+              <a:rPr lang="en-US" altLang="zh-CN" strike="sngStrike" dirty="0">
+                <a:latin typeface="Times New Roman" panose="02020503050405090304" charset="0"/>
+                <a:cs typeface="Times New Roman" panose="02020503050405090304" charset="0"/>
+              </a:rPr>
+              <a:t>, calibrate kw or </a:t>
+            </a:r>
+            <a:r>
+              <a:rPr lang="en-US" altLang="zh-CN" i="1" strike="sngStrike" dirty="0">
+                <a:latin typeface="Times New Roman" panose="02020503050405090304" charset="0"/>
+                <a:cs typeface="Times New Roman" panose="02020503050405090304" charset="0"/>
+              </a:rPr>
+              <a:t>calibrate k</a:t>
+            </a:r>
+            <a:r>
+              <a:rPr lang="en-US" altLang="zh-CN" i="1" strike="sngStrike" baseline="-25000" dirty="0">
                 <a:latin typeface="Times New Roman" panose="02020503050405090304" charset="0"/>
                 <a:cs typeface="Times New Roman" panose="02020503050405090304" charset="0"/>
               </a:rPr>
               <a:t>b</a:t>
             </a:r>
             <a:r>
-              <a:rPr lang="en-US" altLang="zh-CN">
-                <a:latin typeface="Times New Roman" panose="02020503050405090304" charset="0"/>
-                <a:cs typeface="Times New Roman" panose="02020503050405090304" charset="0"/>
-              </a:rPr>
-              <a:t> require separate calibration (jar test)? </a:t>
-            </a:r>
-            <a:endParaRPr lang="en-US" altLang="zh-CN">
+              <a:rPr lang="en-US" altLang="zh-CN" i="1" strike="sngStrike" dirty="0">
+                <a:latin typeface="Times New Roman" panose="02020503050405090304" charset="0"/>
+                <a:cs typeface="Times New Roman" panose="02020503050405090304" charset="0"/>
+              </a:rPr>
+              <a:t> and kw simultaneously</a:t>
+            </a:r>
+            <a:r>
+              <a:rPr lang="en-US" altLang="zh-CN" strike="sngStrike" dirty="0">
+                <a:latin typeface="Times New Roman" panose="02020503050405090304" charset="0"/>
+                <a:cs typeface="Times New Roman" panose="02020503050405090304" charset="0"/>
+              </a:rPr>
+              <a:t> (in my opinion, more difficult). </a:t>
+            </a:r>
+            <a:endParaRPr lang="en-US" altLang="zh-CN" strike="sngStrike" dirty="0">
               <a:latin typeface="Times New Roman" panose="02020503050405090304" charset="0"/>
               <a:cs typeface="Times New Roman" panose="02020503050405090304" charset="0"/>
             </a:endParaRPr>
           </a:p>
           <a:p>
             <a:r>
-              <a:rPr lang="en-US" altLang="zh-CN">
-                <a:latin typeface="Times New Roman" panose="02020503050405090304" charset="0"/>
-                <a:cs typeface="Times New Roman" panose="02020503050405090304" charset="0"/>
-              </a:rPr>
-              <a:t> </a:t>
-            </a:r>
-            <a:endParaRPr lang="en-US" altLang="zh-CN">
+              <a:rPr lang="en-US" altLang="zh-CN" dirty="0">
+                <a:latin typeface="Times New Roman" panose="02020503050405090304" charset="0"/>
+                <a:cs typeface="Times New Roman" panose="02020503050405090304" charset="0"/>
+              </a:rPr>
+              <a:t>If only the residual chlorine data in the pipeline network is available, calibrate kb and kw as a set of parametersBeven &amp; Binley 1992</a:t>
+            </a:r>
+            <a:endParaRPr lang="en-US" altLang="zh-CN" dirty="0">
               <a:latin typeface="Times New Roman" panose="02020503050405090304" charset="0"/>
               <a:cs typeface="Times New Roman" panose="02020503050405090304" charset="0"/>
             </a:endParaRPr>
           </a:p>
           <a:p>
-            <a:r>
-              <a:rPr lang="en-US" altLang="zh-CN">
-                <a:latin typeface="Times New Roman" panose="02020503050405090304" charset="0"/>
-                <a:cs typeface="Times New Roman" panose="02020503050405090304" charset="0"/>
-              </a:rPr>
-              <a:t>Fix kb, calibrate kw o</a:t>
-            </a:r>
-            <a:r>
-              <a:rPr lang="en-US" altLang="zh-CN">
-                <a:latin typeface="Times New Roman" panose="02020503050405090304" charset="0"/>
-                <a:cs typeface="Times New Roman" panose="02020503050405090304" charset="0"/>
-              </a:rPr>
-              <a:t>r calibrate kb and kw simultaneously (in my opinion, more difficult). </a:t>
-            </a:r>
-            <a:endParaRPr lang="en-US" altLang="zh-CN">
+            <a:endParaRPr lang="en-US" altLang="zh-CN" dirty="0">
               <a:latin typeface="Times New Roman" panose="02020503050405090304" charset="0"/>
               <a:cs typeface="Times New Roman" panose="02020503050405090304" charset="0"/>
             </a:endParaRPr>
           </a:p>
           <a:p>
-            <a:endParaRPr lang="en-US" altLang="zh-CN">
+            <a:r>
+              <a:rPr lang="en-US" altLang="zh-CN" dirty="0">
+                <a:latin typeface="Times New Roman" panose="02020503050405090304" charset="0"/>
+                <a:cs typeface="Times New Roman" panose="02020503050405090304" charset="0"/>
+              </a:rPr>
+              <a:t>Temperature?</a:t>
+            </a:r>
+            <a:endParaRPr lang="en-US" altLang="zh-CN" dirty="0">
               <a:latin typeface="Times New Roman" panose="02020503050405090304" charset="0"/>
               <a:cs typeface="Times New Roman" panose="02020503050405090304" charset="0"/>
             </a:endParaRPr>
           </a:p>
           <a:p>
-            <a:r>
-              <a:rPr lang="en-US" altLang="zh-CN">
-                <a:latin typeface="Times New Roman" panose="02020503050405090304" charset="0"/>
-                <a:cs typeface="Times New Roman" panose="02020503050405090304" charset="0"/>
-              </a:rPr>
-              <a:t>Temperature?</a:t>
-            </a:r>
-            <a:endParaRPr lang="en-US" altLang="zh-CN">
+            <a:endParaRPr lang="en-US" altLang="zh-CN" dirty="0">
               <a:latin typeface="Times New Roman" panose="02020503050405090304" charset="0"/>
               <a:cs typeface="Times New Roman" panose="02020503050405090304" charset="0"/>
             </a:endParaRPr>
           </a:p>
           <a:p>
-            <a:endParaRPr lang="en-US" altLang="zh-CN">
+            <a:r>
+              <a:rPr lang="en-US" altLang="zh-CN" dirty="0">
+                <a:latin typeface="Times New Roman" panose="02020503050405090304" charset="0"/>
+                <a:cs typeface="Times New Roman" panose="02020503050405090304" charset="0"/>
+              </a:rPr>
+              <a:t>Three DMAs (ABC), differing in pipe material and age (Hallam, 2002), were compared to determine whether a model calibrated on one DMA can be applied to another. (Using results from A to predict B and C, but I noticed the paper states they are not shared, so I believe prediction is not possible.)</a:t>
+            </a:r>
+            <a:endParaRPr lang="zh-CN" altLang="en-US" dirty="0">
               <a:latin typeface="Times New Roman" panose="02020503050405090304" charset="0"/>
               <a:cs typeface="Times New Roman" panose="02020503050405090304" charset="0"/>
             </a:endParaRPr>
           </a:p>
-          <a:p>
-            <a:r>
-              <a:rPr lang="en-US" altLang="zh-CN">
-                <a:latin typeface="Times New Roman" panose="02020503050405090304" charset="0"/>
-                <a:cs typeface="Times New Roman" panose="02020503050405090304" charset="0"/>
-              </a:rPr>
-              <a:t>Three DMAs (ABC), differing in pipe material and age (Hallam, 2002), were compared to determine whether a model calibrated on one DMA can be applied to another. (Using results from A to predict B and C, but I noticed the paper states they are not shared, so I believe prediction is not possible.)</a:t>
-            </a:r>
-            <a:endParaRPr lang="zh-CN" altLang="en-US">
-              <a:latin typeface="Times New Roman" panose="02020503050405090304" charset="0"/>
-              <a:cs typeface="Times New Roman" panose="02020503050405090304" charset="0"/>
-            </a:endParaRPr>
-          </a:p>
         </p:txBody>
       </p:sp>
       <p:sp>
@@ -6164,7 +6613,7 @@
         <p:spPr>
           <a:xfrm>
             <a:off x="165100" y="204470"/>
-            <a:ext cx="11518265" cy="368300"/>
+            <a:ext cx="11518265" cy="400110"/>
           </a:xfrm>
           <a:prstGeom prst="rect">
             <a:avLst/>
@@ -6175,15 +6624,16 @@
           <a:bodyPr wrap="square" rtlCol="0" anchor="t">
             <a:spAutoFit/>
           </a:bodyPr>
-          <a:p>
-            <a:r>
-              <a:rPr lang="en-US" altLang="zh-CN">
+          <a:lstStyle/>
+          <a:p>
+            <a:r>
+              <a:rPr lang="en-US" altLang="zh-CN" sz="2000" b="1" dirty="0">
                 <a:latin typeface="Times New Roman" panose="02020503050405090304" charset="0"/>
                 <a:cs typeface="Times New Roman" panose="02020503050405090304" charset="0"/>
               </a:rPr>
               <a:t>My understanding</a:t>
             </a:r>
-            <a:endParaRPr lang="zh-CN" altLang="en-US">
+            <a:endParaRPr lang="zh-CN" altLang="en-US" sz="2000" b="1" dirty="0">
               <a:latin typeface="Times New Roman" panose="02020503050405090304" charset="0"/>
               <a:cs typeface="Times New Roman" panose="02020503050405090304" charset="0"/>
             </a:endParaRPr>
@@ -6431,7 +6881,7 @@
                 <a:latin typeface="Times New Roman" panose="02020503050405090304" charset="0"/>
                 <a:cs typeface="Times New Roman" panose="02020503050405090304" charset="0"/>
               </a:rPr>
-              <a:t>June 2</a:t>
+              <a:t>June 12</a:t>
             </a:r>
             <a:r>
               <a:rPr lang="en-GB" altLang="zh-CN" sz="1800" dirty="0">
@@ -6467,13 +6917,14 @@
           <a:bodyPr wrap="square" rtlCol="0" anchor="t">
             <a:spAutoFit/>
           </a:bodyPr>
+          <a:lstStyle/>
           <a:p>
             <a:r>
               <a:rPr lang="en-US" altLang="zh-CN" sz="2000">
                 <a:latin typeface="Times New Roman" panose="02020503050405090304" charset="0"/>
                 <a:cs typeface="Times New Roman" panose="02020503050405090304" charset="0"/>
               </a:rPr>
-              <a:t>1. WNTR Chlorine Modelling - Prep Work</a:t>
+              <a:t>1. WNTR Chlorine Modelling - Pre Work</a:t>
             </a:r>
             <a:endParaRPr lang="en-US" altLang="zh-CN" sz="2000">
               <a:latin typeface="Times New Roman" panose="02020503050405090304" charset="0"/>
@@ -6502,6 +6953,7 @@
           <a:bodyPr wrap="square" rtlCol="0" anchor="t">
             <a:spAutoFit/>
           </a:bodyPr>
+          <a:lstStyle/>
           <a:p>
             <a:r>
               <a:rPr lang="en-US" altLang="zh-CN" sz="2000">
@@ -6537,6 +6989,7 @@
           <a:bodyPr wrap="square" rtlCol="0" anchor="t">
             <a:spAutoFit/>
           </a:bodyPr>
+          <a:lstStyle/>
           <a:p>
             <a:r>
               <a:rPr lang="en-US" altLang="zh-CN" sz="2000">
@@ -6572,6 +7025,7 @@
           <a:bodyPr wrap="square" rtlCol="0" anchor="t">
             <a:spAutoFit/>
           </a:bodyPr>
+          <a:lstStyle/>
           <a:p>
             <a:r>
               <a:rPr lang="en-US" altLang="zh-CN" sz="2000">
@@ -6614,14 +7068,7 @@
                 <a:latin typeface="Times New Roman" panose="02020503050405090304" charset="0"/>
                 <a:cs typeface="Times New Roman" panose="02020503050405090304" charset="0"/>
               </a:rPr>
-              <a:t>Content</a:t>
-            </a:r>
-            <a:r>
-              <a:rPr lang="en-US" altLang="en-GB" b="1" dirty="0">
-                <a:latin typeface="Times New Roman" panose="02020503050405090304" charset="0"/>
-                <a:cs typeface="Times New Roman" panose="02020503050405090304" charset="0"/>
-              </a:rPr>
-              <a:t>s</a:t>
+              <a:t>Contents</a:t>
             </a:r>
             <a:endParaRPr lang="en-US" altLang="en-GB" b="1" dirty="0">
               <a:latin typeface="Times New Roman" panose="02020503050405090304" charset="0"/>
@@ -6630,11 +7077,131 @@
           </a:p>
         </p:txBody>
       </p:sp>
+      <p:pic>
+        <p:nvPicPr>
+          <p:cNvPr id="3" name="Audio Recording 2026年6月3日 21:44:34">
+            <a:hlinkClick r:id="" action="ppaction://media"/>
+          </p:cNvPr>
+          <p:cNvPicPr>
+            <a:picLocks noChangeAspect="1"/>
+          </p:cNvPicPr>
+          <p:nvPr>
+            <a:audioFile r:link="rId1"/>
+            <p:extLst>
+              <p:ext uri="{DAA4B4D4-6D71-4841-9C94-3DE7FCFB9230}">
+                <p14:media xmlns:p14="http://schemas.microsoft.com/office/powerpoint/2010/main" r:embed="rId2"/>
+              </p:ext>
+            </p:extLst>
+          </p:nvPr>
+        </p:nvPicPr>
+        <p:blipFill>
+          <a:blip r:embed="rId3"/>
+          <a:stretch>
+            <a:fillRect/>
+          </a:stretch>
+        </p:blipFill>
+        <p:spPr>
+          <a:xfrm>
+            <a:off x="11528425" y="6194425"/>
+            <a:ext cx="663575" cy="663575"/>
+          </a:xfrm>
+          <a:prstGeom prst="rect">
+            <a:avLst/>
+          </a:prstGeom>
+        </p:spPr>
+      </p:pic>
     </p:spTree>
   </p:cSld>
   <p:clrMapOvr>
     <a:masterClrMapping/>
   </p:clrMapOvr>
+  <p:timing>
+    <p:tnLst>
+      <p:par>
+        <p:cTn id="1" dur="indefinite" restart="never" nodeType="tmRoot">
+          <p:childTnLst>
+            <p:seq concurrent="1" nextAc="seek">
+              <p:cTn id="2" dur="indefinite" nodeType="mainSeq">
+                <p:childTnLst>
+                  <p:par>
+                    <p:cTn id="3" fill="hold">
+                      <p:stCondLst>
+                        <p:cond delay="indefinite"/>
+                        <p:cond evt="onBegin" delay="0">
+                          <p:tn val="2"/>
+                        </p:cond>
+                      </p:stCondLst>
+                      <p:childTnLst>
+                        <p:par>
+                          <p:cTn id="4" fill="hold">
+                            <p:stCondLst>
+                              <p:cond delay="0"/>
+                            </p:stCondLst>
+                            <p:childTnLst>
+                              <p:par>
+                                <p:cTn id="5" presetID="1" presetClass="mediacall" presetSubtype="0" fill="hold" nodeType="afterEffect">
+                                  <p:stCondLst>
+                                    <p:cond delay="0"/>
+                                  </p:stCondLst>
+                                  <p:childTnLst>
+                                    <p:cmd type="call" cmd="playFrom(0.0)">
+                                      <p:cBhvr additive="base">
+                                        <p:cTn id="6" dur="1" fill="hold"/>
+                                        <p:tgtEl>
+                                          <p:spTgt spid="3"/>
+                                        </p:tgtEl>
+                                      </p:cBhvr>
+                                    </p:cmd>
+                                  </p:childTnLst>
+                                </p:cTn>
+                              </p:par>
+                            </p:childTnLst>
+                          </p:cTn>
+                        </p:par>
+                      </p:childTnLst>
+                    </p:cTn>
+                  </p:par>
+                </p:childTnLst>
+              </p:cTn>
+              <p:prevCondLst>
+                <p:cond evt="onPrev" delay="0">
+                  <p:tgtEl>
+                    <p:sldTgt/>
+                  </p:tgtEl>
+                </p:cond>
+              </p:prevCondLst>
+              <p:nextCondLst>
+                <p:cond evt="onNext" delay="0">
+                  <p:tgtEl>
+                    <p:sldTgt/>
+                  </p:tgtEl>
+                </p:cond>
+              </p:nextCondLst>
+            </p:seq>
+            <p:audio>
+              <p:cMediaNode vol="80000" mute="1">
+                <p:cTn id="7" fill="hold" display="0">
+                  <p:stCondLst>
+                    <p:cond delay="indefinite"/>
+                  </p:stCondLst>
+                  <p:endCondLst>
+                    <p:cond evt="onStopAudio" delay="0">
+                      <p:tgtEl>
+                        <p:sldTgt/>
+                      </p:tgtEl>
+                    </p:cond>
+                  </p:endCondLst>
+                </p:cTn>
+                <p:tgtEl>
+                  <p:spTgt spid="3"/>
+                </p:tgtEl>
+              </p:cMediaNode>
+            </p:audio>
+          </p:childTnLst>
+        </p:cTn>
+      </p:par>
+    </p:tnLst>
+  </p:timing>
 </p:sld>
 </file>
 
@@ -6647,7 +7214,14 @@
         <p:cNvGrpSpPr/>
         <p:nvPr/>
       </p:nvGrpSpPr>
-      <p:grpSpPr/>
+      <p:grpSpPr>
+        <a:xfrm>
+          <a:off x="0" y="0"/>
+          <a:ext cx="0" cy="0"/>
+          <a:chOff x="0" y="0"/>
+          <a:chExt cx="0" cy="0"/>
+        </a:xfrm>
+      </p:grpSpPr>
       <p:pic>
         <p:nvPicPr>
           <p:cNvPr id="5" name="图片 4" descr="wntr_getting_started-1"/>
@@ -6716,44 +7290,45 @@
           <a:bodyPr wrap="square" rtlCol="0">
             <a:spAutoFit/>
           </a:bodyPr>
-          <a:p>
-            <a:r>
-              <a:rPr lang="en-US" altLang="zh-CN">
+          <a:lstStyle/>
+          <a:p>
+            <a:r>
+              <a:rPr lang="en-US" altLang="zh-CN" dirty="0">
                 <a:latin typeface="Times New Roman" panose="02020503050405090304" charset="0"/>
                 <a:cs typeface="Times New Roman" panose="02020503050405090304" charset="0"/>
               </a:rPr>
               <a:t>k</a:t>
             </a:r>
             <a:r>
-              <a:rPr lang="en-US" altLang="zh-CN" baseline="-25000">
+              <a:rPr lang="en-US" altLang="zh-CN" baseline="-25000" dirty="0">
                 <a:latin typeface="Times New Roman" panose="02020503050405090304" charset="0"/>
                 <a:cs typeface="Times New Roman" panose="02020503050405090304" charset="0"/>
               </a:rPr>
               <a:t>b</a:t>
             </a:r>
             <a:r>
-              <a:rPr lang="en-US" altLang="zh-CN">
+              <a:rPr lang="en-US" altLang="zh-CN" dirty="0">
                 <a:latin typeface="Times New Roman" panose="02020503050405090304" charset="0"/>
                 <a:cs typeface="Times New Roman" panose="02020503050405090304" charset="0"/>
               </a:rPr>
               <a:t> = -0.5/day, k</a:t>
             </a:r>
             <a:r>
-              <a:rPr lang="en-US" altLang="zh-CN" baseline="-25000">
+              <a:rPr lang="en-US" altLang="zh-CN" baseline="-25000" dirty="0">
                 <a:latin typeface="Times New Roman" panose="02020503050405090304" charset="0"/>
                 <a:cs typeface="Times New Roman" panose="02020503050405090304" charset="0"/>
               </a:rPr>
               <a:t>w</a:t>
             </a:r>
             <a:r>
-              <a:rPr lang="en-US" altLang="zh-CN">
+              <a:rPr lang="en-US" altLang="zh-CN" dirty="0">
                 <a:latin typeface="Times New Roman" panose="02020503050405090304" charset="0"/>
                 <a:cs typeface="Times New Roman" panose="02020503050405090304" charset="0"/>
               </a:rPr>
               <a:t> = -0.1</a:t>
             </a:r>
             <a:r>
-              <a:rPr lang="en-US" altLang="zh-CN">
+              <a:rPr lang="en-US" altLang="zh-CN" dirty="0">
                 <a:solidFill>
                   <a:srgbClr val="FF0000"/>
                 </a:solidFill>
@@ -6762,7 +7337,7 @@
               </a:rPr>
               <a:t>m/day ??</a:t>
             </a:r>
-            <a:endParaRPr lang="en-US" altLang="zh-CN">
+            <a:endParaRPr lang="en-US" altLang="zh-CN" dirty="0">
               <a:solidFill>
                 <a:srgbClr val="FF0000"/>
               </a:solidFill>
@@ -6792,6 +7367,7 @@
           <a:bodyPr wrap="square" rtlCol="0">
             <a:spAutoFit/>
           </a:bodyPr>
+          <a:lstStyle/>
           <a:p>
             <a:pPr marL="285750" indent="-285750">
               <a:buFont typeface="Arial" panose="020B0604020202090204" pitchFamily="34" charset="0"/>
@@ -6878,6 +7454,7 @@
           <a:bodyPr wrap="square">
             <a:spAutoFit/>
           </a:bodyPr>
+          <a:lstStyle/>
           <a:p>
             <a:pPr marL="0" indent="0">
               <a:spcBef>
@@ -6890,7 +7467,7 @@
               <a:buChar char="•"/>
             </a:pPr>
             <a:r>
-              <a:rPr lang="en-US" altLang="zh-CN" sz="1600" b="0" i="0">
+              <a:rPr lang="en-US" altLang="zh-CN" sz="1600" b="0" i="0" dirty="0">
                 <a:latin typeface="Times New Roman Regular" panose="02020503050405090304" charset="0"/>
                 <a:ea typeface="-apple-system"/>
                 <a:cs typeface="Times New Roman Regular" panose="02020503050405090304" charset="0"/>
@@ -6898,7 +7475,7 @@
               <a:t> There is a </a:t>
             </a:r>
             <a:r>
-              <a:rPr lang="en-US" altLang="zh-CN" sz="1600" b="1" i="0">
+              <a:rPr lang="en-US" altLang="zh-CN" sz="1600" b="1" i="0" dirty="0">
                 <a:latin typeface="Times New Roman" panose="02020503050405090304" charset="0"/>
                 <a:ea typeface="-apple-system"/>
                 <a:cs typeface="Times New Roman" panose="02020503050405090304" charset="0"/>
@@ -6906,14 +7483,22 @@
               <a:t>warm-up</a:t>
             </a:r>
             <a:r>
-              <a:rPr lang="en-US" altLang="zh-CN" sz="1600" b="0" i="0">
+              <a:rPr lang="en-US" altLang="zh-CN" sz="1600" b="1" i="0" dirty="0">
                 <a:latin typeface="Times New Roman Regular" panose="02020503050405090304" charset="0"/>
                 <a:ea typeface="-apple-system"/>
                 <a:cs typeface="Times New Roman Regular" panose="02020503050405090304" charset="0"/>
               </a:rPr>
-              <a:t> transient at the start (pipes/tanks filling from their initial state) before the system reaches a quasi-steady state -- so this initial period should be discarded when computing metrics later.</a:t>
-            </a:r>
-            <a:endParaRPr lang="en-US" altLang="zh-CN" sz="1600" b="0" i="0">
+              <a:t> transient </a:t>
+            </a:r>
+            <a:r>
+              <a:rPr lang="en-US" altLang="zh-CN" sz="1600" b="0" i="0" dirty="0">
+                <a:latin typeface="Times New Roman Regular" panose="02020503050405090304" charset="0"/>
+                <a:ea typeface="-apple-system"/>
+                <a:cs typeface="Times New Roman Regular" panose="02020503050405090304" charset="0"/>
+              </a:rPr>
+              <a:t>at the start (pipes/tanks filling from their initial state) before the system reaches a quasi-steady state -- so this initial period should be discarded when computing metrics later.</a:t>
+            </a:r>
+            <a:endParaRPr lang="en-US" altLang="zh-CN" sz="1600" b="0" i="0" dirty="0">
               <a:latin typeface="Times New Roman Regular" panose="02020503050405090304" charset="0"/>
               <a:ea typeface="-apple-system"/>
               <a:cs typeface="Times New Roman Regular" panose="02020503050405090304" charset="0"/>
@@ -6929,7 +7514,7 @@
         </p:nvSpPr>
         <p:spPr>
           <a:xfrm>
-            <a:off x="7449185" y="5001895"/>
+            <a:off x="7560310" y="5138692"/>
             <a:ext cx="4330700" cy="583565"/>
           </a:xfrm>
           <a:prstGeom prst="rect">
@@ -6940,6 +7525,7 @@
           <a:bodyPr wrap="square">
             <a:spAutoFit/>
           </a:bodyPr>
+          <a:lstStyle/>
           <a:p>
             <a:pPr marL="0" indent="0">
               <a:spcBef>
@@ -6973,11 +7559,128 @@
           </a:p>
         </p:txBody>
       </p:sp>
+      <p:pic>
+        <p:nvPicPr>
+          <p:cNvPr id="3" name="Audio Recording 2026年6月3日 21:49:26">
+            <a:hlinkClick r:id="" action="ppaction://media"/>
+          </p:cNvPr>
+          <p:cNvPicPr>
+            <a:picLocks noChangeAspect="1"/>
+          </p:cNvPicPr>
+          <p:nvPr>
+            <a:audioFile r:link="rId3"/>
+            <p:extLst>
+              <p:ext uri="{DAA4B4D4-6D71-4841-9C94-3DE7FCFB9230}">
+                <p14:media xmlns:p14="http://schemas.microsoft.com/office/powerpoint/2010/main" r:embed="rId4"/>
+              </p:ext>
+            </p:extLst>
+          </p:nvPr>
+        </p:nvPicPr>
+        <p:blipFill>
+          <a:blip r:embed="rId5"/>
+          <a:stretch>
+            <a:fillRect/>
+          </a:stretch>
+        </p:blipFill>
+        <p:spPr>
+          <a:xfrm>
+            <a:off x="11078210" y="6045200"/>
+            <a:ext cx="812800" cy="812800"/>
+          </a:xfrm>
+          <a:prstGeom prst="rect">
+            <a:avLst/>
+          </a:prstGeom>
+        </p:spPr>
+      </p:pic>
     </p:spTree>
   </p:cSld>
   <p:clrMapOvr>
     <a:masterClrMapping/>
   </p:clrMapOvr>
+  <p:timing>
+    <p:tnLst>
+      <p:par>
+        <p:cTn id="1" dur="indefinite" restart="never" nodeType="tmRoot">
+          <p:childTnLst>
+            <p:seq concurrent="1" nextAc="seek">
+              <p:cTn id="2" dur="indefinite" nodeType="mainSeq">
+                <p:childTnLst>
+                  <p:par>
+                    <p:cTn id="3" fill="hold">
+                      <p:stCondLst>
+                        <p:cond delay="indefinite"/>
+                      </p:stCondLst>
+                      <p:childTnLst>
+                        <p:par>
+                          <p:cTn id="4" fill="hold">
+                            <p:stCondLst>
+                              <p:cond delay="0"/>
+                            </p:stCondLst>
+                            <p:childTnLst>
+                              <p:par>
+                                <p:cTn id="5" presetID="1" presetClass="mediacall" presetSubtype="0" fill="hold" nodeType="clickEffect">
+                                  <p:stCondLst>
+                                    <p:cond delay="0"/>
+                                  </p:stCondLst>
+                                  <p:childTnLst>
+                                    <p:cmd type="call" cmd="playFrom(0.0)">
+                                      <p:cBhvr>
+                                        <p:cTn id="6" dur="76476" fill="hold"/>
+                                        <p:tgtEl>
+                                          <p:spTgt spid="3"/>
+                                        </p:tgtEl>
+                                      </p:cBhvr>
+                                    </p:cmd>
+                                  </p:childTnLst>
+                                </p:cTn>
+                              </p:par>
+                            </p:childTnLst>
+                          </p:cTn>
+                        </p:par>
+                      </p:childTnLst>
+                    </p:cTn>
+                  </p:par>
+                </p:childTnLst>
+              </p:cTn>
+              <p:prevCondLst>
+                <p:cond evt="onPrev" delay="0">
+                  <p:tgtEl>
+                    <p:sldTgt/>
+                  </p:tgtEl>
+                </p:cond>
+              </p:prevCondLst>
+              <p:nextCondLst>
+                <p:cond evt="onNext" delay="0">
+                  <p:tgtEl>
+                    <p:sldTgt/>
+                  </p:tgtEl>
+                </p:cond>
+              </p:nextCondLst>
+            </p:seq>
+            <p:audio>
+              <p:cMediaNode vol="0" mute="1">
+                <p:cTn id="7" fill="hold" display="0">
+                  <p:stCondLst>
+                    <p:cond delay="indefinite"/>
+                  </p:stCondLst>
+                  <p:endCondLst>
+                    <p:cond evt="onStopAudio" delay="0">
+                      <p:tgtEl>
+                        <p:sldTgt/>
+                      </p:tgtEl>
+                    </p:cond>
+                  </p:endCondLst>
+                </p:cTn>
+                <p:tgtEl>
+                  <p:spTgt spid="3"/>
+                </p:tgtEl>
+              </p:cMediaNode>
+            </p:audio>
+          </p:childTnLst>
+        </p:cTn>
+      </p:par>
+    </p:tnLst>
+  </p:timing>
 </p:sld>
 </file>
 
@@ -6990,7 +7693,14 @@
         <p:cNvGrpSpPr/>
         <p:nvPr/>
       </p:nvGrpSpPr>
-      <p:grpSpPr/>
+      <p:grpSpPr>
+        <a:xfrm>
+          <a:off x="0" y="0"/>
+          <a:ext cx="0" cy="0"/>
+          <a:chOff x="0" y="0"/>
+          <a:chExt cx="0" cy="0"/>
+        </a:xfrm>
+      </p:grpSpPr>
       <p:pic>
         <p:nvPicPr>
           <p:cNvPr id="2" name="图片 1" descr="wntr_getting_started-2"/>
@@ -7034,10 +7744,11 @@
           <a:bodyPr wrap="square">
             <a:spAutoFit/>
           </a:bodyPr>
+          <a:lstStyle/>
           <a:p>
             <a:pPr marL="0" indent="0"/>
             <a:r>
-              <a:rPr lang="en-US" altLang="zh-CN" sz="1600" b="0" i="0">
+              <a:rPr lang="en-US" altLang="zh-CN" sz="1600" b="0" i="0" dirty="0">
                 <a:latin typeface="Times New Roman Regular" panose="02020503050405090304" charset="0"/>
                 <a:ea typeface="Menlo" panose="020B0609030804020204"/>
                 <a:cs typeface="Times New Roman Regular" panose="02020503050405090304" charset="0"/>
@@ -7045,7 +7756,7 @@
               <a:t>Most k</a:t>
             </a:r>
             <a:r>
-              <a:rPr lang="en-US" altLang="zh-CN" sz="1600" b="0" i="0" baseline="-25000">
+              <a:rPr lang="en-US" altLang="zh-CN" sz="1600" b="0" i="0" baseline="-25000" dirty="0">
                 <a:latin typeface="Times New Roman Regular" panose="02020503050405090304" charset="0"/>
                 <a:ea typeface="Menlo" panose="020B0609030804020204"/>
                 <a:cs typeface="Times New Roman Regular" panose="02020503050405090304" charset="0"/>
@@ -7053,14 +7764,14 @@
               <a:t>w</a:t>
             </a:r>
             <a:r>
-              <a:rPr lang="en-US" altLang="zh-CN" sz="1600" b="0" i="0">
+              <a:rPr lang="en-US" altLang="zh-CN" sz="1600" b="0" i="0" dirty="0">
                 <a:latin typeface="Times New Roman Regular" panose="02020503050405090304" charset="0"/>
                 <a:ea typeface="Menlo" panose="020B0609030804020204"/>
                 <a:cs typeface="Times New Roman Regular" panose="02020503050405090304" charset="0"/>
               </a:rPr>
               <a:t>-sensitive monitor (lowest mean residual): node 20</a:t>
             </a:r>
-            <a:endParaRPr lang="en-US" altLang="zh-CN" sz="1600" b="0" i="0">
+            <a:endParaRPr lang="en-US" altLang="zh-CN" sz="1600" b="0" i="0" dirty="0">
               <a:latin typeface="Times New Roman Regular" panose="02020503050405090304" charset="0"/>
               <a:ea typeface="Menlo" panose="020B0609030804020204"/>
               <a:cs typeface="Times New Roman Regular" panose="02020503050405090304" charset="0"/>
@@ -7068,7 +7779,7 @@
           </a:p>
           <a:p>
             <a:pPr marL="0" indent="0"/>
-            <a:endParaRPr lang="en-US" altLang="zh-CN" sz="1600" b="0" i="0">
+            <a:endParaRPr lang="en-US" altLang="zh-CN" sz="1600" b="0" i="0" dirty="0">
               <a:latin typeface="Times New Roman Regular" panose="02020503050405090304" charset="0"/>
               <a:ea typeface="Menlo" panose="020B0609030804020204"/>
               <a:cs typeface="Times New Roman Regular" panose="02020503050405090304" charset="0"/>
@@ -7077,7 +7788,7 @@
           <a:p>
             <a:pPr indent="0" fontAlgn="auto"/>
             <a:r>
-              <a:rPr lang="en-US" altLang="zh-CN" sz="1600">
+              <a:rPr lang="en-US" altLang="zh-CN" sz="1600" dirty="0">
                 <a:latin typeface="Times New Roman Regular" panose="02020503050405090304" charset="0"/>
                 <a:ea typeface="-apple-system"/>
                 <a:cs typeface="Times New Roman Regular" panose="02020503050405090304" charset="0"/>
@@ -7086,16 +7797,25 @@
               <a:t>The more negative </a:t>
             </a:r>
             <a:r>
-              <a:rPr lang="en-US" altLang="zh-CN" sz="1600">
+              <a:rPr lang="en-US" altLang="zh-CN" sz="1600" dirty="0">
                 <a:latin typeface="Times New Roman Regular" panose="02020503050405090304" charset="0"/>
                 <a:ea typeface="katex_main"/>
                 <a:cs typeface="Times New Roman Regular" panose="02020503050405090304" charset="0"/>
                 <a:sym typeface="+mn-ea"/>
               </a:rPr>
-              <a:t>kw</a:t>
-            </a:r>
-            <a:r>
-              <a:rPr lang="en-US" altLang="zh-CN" sz="1600">
+              <a:t>k</a:t>
+            </a:r>
+            <a:r>
+              <a:rPr lang="en-US" altLang="zh-CN" sz="1600" baseline="-25000" dirty="0">
+                <a:latin typeface="Times New Roman Regular" panose="02020503050405090304" charset="0"/>
+                <a:ea typeface="katex_main"/>
+                <a:cs typeface="Times New Roman Regular" panose="02020503050405090304" charset="0"/>
+                <a:sym typeface="+mn-ea"/>
+              </a:rPr>
+              <a:t>w</a:t>
+            </a:r>
+            <a:r>
+              <a:rPr lang="en-US" altLang="zh-CN" sz="1600" dirty="0">
                 <a:latin typeface="Times New Roman Regular" panose="02020503050405090304" charset="0"/>
                 <a:ea typeface="-apple-system"/>
                 <a:cs typeface="Times New Roman Regular" panose="02020503050405090304" charset="0"/>
@@ -7104,16 +7824,34 @@
               <a:t> is, the lower the residual, and the curves spread out clearly into separate lines → here </a:t>
             </a:r>
             <a:r>
-              <a:rPr lang="en-US" altLang="zh-CN" sz="1600">
+              <a:rPr lang="en-US" altLang="zh-CN" sz="1600" dirty="0">
                 <a:latin typeface="Times New Roman Regular" panose="02020503050405090304" charset="0"/>
                 <a:ea typeface="katex_main"/>
                 <a:cs typeface="Times New Roman Regular" panose="02020503050405090304" charset="0"/>
                 <a:sym typeface="+mn-ea"/>
               </a:rPr>
-              <a:t>kw </a:t>
-            </a:r>
-            <a:r>
-              <a:rPr lang="en-US" altLang="zh-CN" sz="1600">
+              <a:t>k</a:t>
+            </a:r>
+            <a:r>
+              <a:rPr lang="en-US" altLang="zh-CN" sz="1600" baseline="-25000" dirty="0">
+                <a:latin typeface="Times New Roman Regular" panose="02020503050405090304" charset="0"/>
+                <a:ea typeface="katex_main"/>
+                <a:cs typeface="Times New Roman Regular" panose="02020503050405090304" charset="0"/>
+                <a:sym typeface="+mn-ea"/>
+              </a:rPr>
+              <a:t>w</a:t>
+            </a:r>
+            <a:r>
+              <a:rPr lang="en-US" altLang="zh-CN" sz="1600" dirty="0">
+                <a:latin typeface="Times New Roman Regular" panose="02020503050405090304" charset="0"/>
+                <a:ea typeface="katex_main"/>
+                <a:cs typeface="Times New Roman Regular" panose="02020503050405090304" charset="0"/>
+                <a:sym typeface="+mn-ea"/>
+              </a:rPr>
+              <a:t> </a:t>
+            </a:r>
+            <a:r>
+              <a:rPr lang="en-US" altLang="zh-CN" sz="1600" dirty="0">
                 <a:latin typeface="Times New Roman Regular" panose="02020503050405090304" charset="0"/>
                 <a:ea typeface="-apple-system"/>
                 <a:cs typeface="Times New Roman Regular" panose="02020503050405090304" charset="0"/>
@@ -7122,7 +7860,7 @@
               <a:t>has a strong effect and is </a:t>
             </a:r>
             <a:r>
-              <a:rPr lang="en-US" altLang="zh-CN" sz="1600" b="1">
+              <a:rPr lang="en-US" altLang="zh-CN" sz="1600" b="1" dirty="0">
                 <a:latin typeface="Times New Roman" panose="02020503050405090304" charset="0"/>
                 <a:ea typeface="-apple-system"/>
                 <a:cs typeface="Times New Roman" panose="02020503050405090304" charset="0"/>
@@ -7131,7 +7869,7 @@
               <a:t>identifiable</a:t>
             </a:r>
             <a:r>
-              <a:rPr lang="en-US" altLang="zh-CN" sz="1600">
+              <a:rPr lang="en-US" altLang="zh-CN" sz="1600" dirty="0">
                 <a:latin typeface="Times New Roman Regular" panose="02020503050405090304" charset="0"/>
                 <a:ea typeface="-apple-system"/>
                 <a:cs typeface="Times New Roman Regular" panose="02020503050405090304" charset="0"/>
@@ -7139,7 +7877,7 @@
               </a:rPr>
               <a:t>.</a:t>
             </a:r>
-            <a:endParaRPr lang="en-US" altLang="zh-CN" sz="1600" b="0" i="0">
+            <a:endParaRPr lang="en-US" altLang="zh-CN" sz="1600" b="0" i="0" dirty="0">
               <a:latin typeface="Times New Roman Regular" panose="02020503050405090304" charset="0"/>
               <a:ea typeface="Menlo" panose="020B0609030804020204"/>
               <a:cs typeface="Times New Roman Regular" panose="02020503050405090304" charset="0"/>
@@ -7147,11 +7885,128 @@
           </a:p>
         </p:txBody>
       </p:sp>
+      <p:pic>
+        <p:nvPicPr>
+          <p:cNvPr id="5" name="Audio Recording 2026年6月3日 21:52:07">
+            <a:hlinkClick r:id="" action="ppaction://media"/>
+          </p:cNvPr>
+          <p:cNvPicPr>
+            <a:picLocks noChangeAspect="1"/>
+          </p:cNvPicPr>
+          <p:nvPr>
+            <a:audioFile r:link="rId2"/>
+            <p:extLst>
+              <p:ext uri="{DAA4B4D4-6D71-4841-9C94-3DE7FCFB9230}">
+                <p14:media xmlns:p14="http://schemas.microsoft.com/office/powerpoint/2010/main" r:embed="rId3"/>
+              </p:ext>
+            </p:extLst>
+          </p:nvPr>
+        </p:nvPicPr>
+        <p:blipFill>
+          <a:blip r:embed="rId4"/>
+          <a:stretch>
+            <a:fillRect/>
+          </a:stretch>
+        </p:blipFill>
+        <p:spPr>
+          <a:xfrm flipV="1">
+            <a:off x="11325860" y="6060440"/>
+            <a:ext cx="522605" cy="522605"/>
+          </a:xfrm>
+          <a:prstGeom prst="rect">
+            <a:avLst/>
+          </a:prstGeom>
+        </p:spPr>
+      </p:pic>
     </p:spTree>
   </p:cSld>
   <p:clrMapOvr>
     <a:masterClrMapping/>
   </p:clrMapOvr>
+  <p:timing>
+    <p:tnLst>
+      <p:par>
+        <p:cTn id="1" dur="indefinite" restart="never" nodeType="tmRoot">
+          <p:childTnLst>
+            <p:seq concurrent="1" nextAc="seek">
+              <p:cTn id="2" dur="indefinite" nodeType="mainSeq">
+                <p:childTnLst>
+                  <p:par>
+                    <p:cTn id="3" fill="hold">
+                      <p:stCondLst>
+                        <p:cond delay="indefinite"/>
+                      </p:stCondLst>
+                      <p:childTnLst>
+                        <p:par>
+                          <p:cTn id="4" fill="hold">
+                            <p:stCondLst>
+                              <p:cond delay="0"/>
+                            </p:stCondLst>
+                            <p:childTnLst>
+                              <p:par>
+                                <p:cTn id="5" presetID="1" presetClass="mediacall" presetSubtype="0" fill="hold" nodeType="clickEffect">
+                                  <p:stCondLst>
+                                    <p:cond delay="0"/>
+                                  </p:stCondLst>
+                                  <p:childTnLst>
+                                    <p:cmd type="call" cmd="playFrom(0.0)">
+                                      <p:cBhvr>
+                                        <p:cTn id="6" dur="36604" fill="hold"/>
+                                        <p:tgtEl>
+                                          <p:spTgt spid="5"/>
+                                        </p:tgtEl>
+                                      </p:cBhvr>
+                                    </p:cmd>
+                                  </p:childTnLst>
+                                </p:cTn>
+                              </p:par>
+                            </p:childTnLst>
+                          </p:cTn>
+                        </p:par>
+                      </p:childTnLst>
+                    </p:cTn>
+                  </p:par>
+                </p:childTnLst>
+              </p:cTn>
+              <p:prevCondLst>
+                <p:cond evt="onPrev" delay="0">
+                  <p:tgtEl>
+                    <p:sldTgt/>
+                  </p:tgtEl>
+                </p:cond>
+              </p:prevCondLst>
+              <p:nextCondLst>
+                <p:cond evt="onNext" delay="0">
+                  <p:tgtEl>
+                    <p:sldTgt/>
+                  </p:tgtEl>
+                </p:cond>
+              </p:nextCondLst>
+            </p:seq>
+            <p:audio>
+              <p:cMediaNode vol="80000" mute="1">
+                <p:cTn id="7" fill="hold" display="0">
+                  <p:stCondLst>
+                    <p:cond delay="indefinite"/>
+                  </p:stCondLst>
+                  <p:endCondLst>
+                    <p:cond evt="onStopAudio" delay="0">
+                      <p:tgtEl>
+                        <p:sldTgt/>
+                      </p:tgtEl>
+                    </p:cond>
+                  </p:endCondLst>
+                </p:cTn>
+                <p:tgtEl>
+                  <p:spTgt spid="5"/>
+                </p:tgtEl>
+              </p:cMediaNode>
+            </p:audio>
+          </p:childTnLst>
+        </p:cTn>
+      </p:par>
+    </p:tnLst>
+  </p:timing>
 </p:sld>
 </file>
 
@@ -7164,7 +8019,14 @@
         <p:cNvGrpSpPr/>
         <p:nvPr/>
       </p:nvGrpSpPr>
-      <p:grpSpPr/>
+      <p:grpSpPr>
+        <a:xfrm>
+          <a:off x="0" y="0"/>
+          <a:ext cx="0" cy="0"/>
+          <a:chOff x="0" y="0"/>
+          <a:chExt cx="0" cy="0"/>
+        </a:xfrm>
+      </p:grpSpPr>
       <p:pic>
         <p:nvPicPr>
           <p:cNvPr id="2" name="图片 1" descr="wntr_getting_started-3"/>
@@ -7209,6 +8071,7 @@
           <a:bodyPr wrap="square" rtlCol="0">
             <a:spAutoFit/>
           </a:bodyPr>
+          <a:lstStyle/>
           <a:p>
             <a:r>
               <a:rPr lang="en-US" altLang="zh-CN">
@@ -7244,43 +8107,44 @@
           <a:bodyPr wrap="square" rtlCol="0" anchor="t">
             <a:spAutoFit/>
           </a:bodyPr>
-          <a:p>
-            <a:r>
-              <a:rPr lang="en-US" altLang="zh-CN">
+          <a:lstStyle/>
+          <a:p>
+            <a:r>
+              <a:rPr lang="en-US" altLang="zh-CN" dirty="0">
                 <a:latin typeface="Times New Roman" panose="02020503050405090304" charset="0"/>
                 <a:cs typeface="Times New Roman" panose="02020503050405090304" charset="0"/>
               </a:rPr>
               <a:t>Residual chlorine exhibits a spatial gradient: </a:t>
             </a:r>
             <a:r>
-              <a:rPr lang="en-US" altLang="zh-CN" b="1">
+              <a:rPr lang="en-US" altLang="zh-CN" b="1" dirty="0">
                 <a:latin typeface="Times New Roman" panose="02020503050405090304" charset="0"/>
                 <a:cs typeface="Times New Roman" panose="02020503050405090304" charset="0"/>
               </a:rPr>
               <a:t>highest near the source/reservoir</a:t>
             </a:r>
             <a:r>
-              <a:rPr lang="en-US" altLang="zh-CN">
+              <a:rPr lang="en-US" altLang="zh-CN" dirty="0">
                 <a:latin typeface="Times New Roman" panose="02020503050405090304" charset="0"/>
                 <a:cs typeface="Times New Roman" panose="02020503050405090304" charset="0"/>
               </a:rPr>
               <a:t> and gradually decreasing along the distribution network toward the ends; </a:t>
             </a:r>
             <a:r>
-              <a:rPr lang="en-US" altLang="zh-CN" b="1">
+              <a:rPr lang="en-US" altLang="zh-CN" b="1" dirty="0">
                 <a:latin typeface="Times New Roman" panose="02020503050405090304" charset="0"/>
                 <a:cs typeface="Times New Roman" panose="02020503050405090304" charset="0"/>
               </a:rPr>
               <a:t>lowest at ends</a:t>
             </a:r>
             <a:r>
-              <a:rPr lang="en-US" altLang="zh-CN">
+              <a:rPr lang="en-US" altLang="zh-CN" dirty="0">
                 <a:latin typeface="Times New Roman" panose="02020503050405090304" charset="0"/>
                 <a:cs typeface="Times New Roman" panose="02020503050405090304" charset="0"/>
               </a:rPr>
               <a:t>, long branch pipes, and areas far from the source (most prone to problems).</a:t>
             </a:r>
-            <a:endParaRPr lang="en-US" altLang="zh-CN">
+            <a:endParaRPr lang="en-US" altLang="zh-CN" dirty="0">
               <a:latin typeface="Times New Roman" panose="02020503050405090304" charset="0"/>
               <a:cs typeface="Times New Roman" panose="02020503050405090304" charset="0"/>
             </a:endParaRPr>
@@ -7295,7 +8159,7 @@
         </p:nvSpPr>
         <p:spPr>
           <a:xfrm>
-            <a:off x="424815" y="5868670"/>
+            <a:off x="424815" y="5779217"/>
             <a:ext cx="9207500" cy="645160"/>
           </a:xfrm>
           <a:prstGeom prst="rect">
@@ -7307,18 +8171,69 @@
           <a:bodyPr wrap="square" rtlCol="0" anchor="t">
             <a:spAutoFit/>
           </a:bodyPr>
-          <a:p>
-            <a:r>
-              <a:rPr lang="en-US" altLang="zh-CN">
+          <a:lstStyle/>
+          <a:p>
+            <a:r>
+              <a:rPr lang="en-US" altLang="zh-CN" dirty="0">
                 <a:solidFill>
                   <a:srgbClr val="FF0000"/>
                 </a:solidFill>
                 <a:latin typeface="Times New Roman" panose="02020503050405090304" charset="0"/>
                 <a:cs typeface="Times New Roman" panose="02020503050405090304" charset="0"/>
               </a:rPr>
-              <a:t>The range of chlorine mentioned is (a, b) -- should we consider whether it exceeds b?</a:t>
-            </a:r>
-            <a:endParaRPr lang="en-US" altLang="zh-CN">
+              <a:t>The </a:t>
+            </a:r>
+            <a:r>
+              <a:rPr lang="en-US" altLang="zh-CN" dirty="0">
+                <a:solidFill>
+                  <a:srgbClr val="FF0000"/>
+                </a:solidFill>
+                <a:latin typeface="Times New Roman" panose="02020503050405090304" charset="0"/>
+                <a:cs typeface="Times New Roman" panose="02020503050405090304" charset="0"/>
+              </a:rPr>
+              <a:t>safe range of chlorine is interval</a:t>
+            </a:r>
+            <a:r>
+              <a:rPr lang="zh-CN" altLang="en-US" dirty="0">
+                <a:solidFill>
+                  <a:srgbClr val="FF0000"/>
+                </a:solidFill>
+                <a:latin typeface="Times New Roman" panose="02020503050405090304" charset="0"/>
+                <a:cs typeface="Times New Roman" panose="02020503050405090304" charset="0"/>
+              </a:rPr>
+              <a:t> </a:t>
+            </a:r>
+            <a:r>
+              <a:rPr lang="en-US" altLang="zh-CN" dirty="0">
+                <a:solidFill>
+                  <a:srgbClr val="FF0000"/>
+                </a:solidFill>
+                <a:latin typeface="Times New Roman" panose="02020503050405090304" charset="0"/>
+                <a:cs typeface="Times New Roman" panose="02020503050405090304" charset="0"/>
+              </a:rPr>
+              <a:t>--</a:t>
+            </a:r>
+            <a:r>
+              <a:rPr lang="zh-CN" altLang="en-US" dirty="0">
+                <a:solidFill>
+                  <a:srgbClr val="FF0000"/>
+                </a:solidFill>
+                <a:latin typeface="Times New Roman" panose="02020503050405090304" charset="0"/>
+                <a:cs typeface="Times New Roman" panose="02020503050405090304" charset="0"/>
+              </a:rPr>
+              <a:t> </a:t>
+            </a:r>
+            <a:r>
+              <a:rPr lang="en-US" altLang="zh-CN" dirty="0">
+                <a:solidFill>
+                  <a:srgbClr val="FF0000"/>
+                </a:solidFill>
+                <a:latin typeface="Times New Roman" panose="02020503050405090304" charset="0"/>
+                <a:cs typeface="Times New Roman" panose="02020503050405090304" charset="0"/>
+              </a:rPr>
+              <a:t>(a, b) </a:t>
+            </a:r>
+            <a:endParaRPr lang="en-US" altLang="zh-CN" dirty="0">
               <a:solidFill>
                 <a:srgbClr val="FF0000"/>
               </a:solidFill>
@@ -7328,26 +8243,16 @@
           </a:p>
           <a:p>
             <a:r>
-              <a:rPr lang="en-US" altLang="zh-CN">
+              <a:rPr lang="en-US" altLang="zh-CN" dirty="0">
                 <a:solidFill>
                   <a:srgbClr val="FF0000"/>
                 </a:solidFill>
                 <a:latin typeface="Times New Roman" panose="02020503050405090304" charset="0"/>
                 <a:cs typeface="Times New Roman" panose="02020503050405090304" charset="0"/>
               </a:rPr>
-              <a:t>Actual vs </a:t>
-            </a:r>
-            <a:r>
-              <a:rPr lang="en-US" altLang="zh-CN">
-                <a:solidFill>
-                  <a:srgbClr val="FF0000"/>
-                </a:solidFill>
-                <a:latin typeface="Times New Roman" panose="02020503050405090304" charset="0"/>
-                <a:cs typeface="Times New Roman" panose="02020503050405090304" charset="0"/>
-              </a:rPr>
-              <a:t>measured</a:t>
-            </a:r>
-            <a:endParaRPr lang="en-US" altLang="zh-CN">
+              <a:t>Should we consider whether it exceeds b?</a:t>
+            </a:r>
+            <a:endParaRPr lang="en-US" altLang="zh-CN" dirty="0">
               <a:solidFill>
                 <a:srgbClr val="FF0000"/>
               </a:solidFill>
@@ -7357,11 +8262,128 @@
           </a:p>
         </p:txBody>
       </p:sp>
+      <p:pic>
+        <p:nvPicPr>
+          <p:cNvPr id="7" name="Audio Recording 2026年6月3日 21:56:50">
+            <a:hlinkClick r:id="" action="ppaction://media"/>
+          </p:cNvPr>
+          <p:cNvPicPr>
+            <a:picLocks noChangeAspect="1"/>
+          </p:cNvPicPr>
+          <p:nvPr>
+            <a:audioFile r:link="rId2"/>
+            <p:extLst>
+              <p:ext uri="{DAA4B4D4-6D71-4841-9C94-3DE7FCFB9230}">
+                <p14:media xmlns:p14="http://schemas.microsoft.com/office/powerpoint/2010/main" r:embed="rId3"/>
+              </p:ext>
+            </p:extLst>
+          </p:nvPr>
+        </p:nvPicPr>
+        <p:blipFill>
+          <a:blip r:embed="rId4"/>
+          <a:stretch>
+            <a:fillRect/>
+          </a:stretch>
+        </p:blipFill>
+        <p:spPr>
+          <a:xfrm>
+            <a:off x="11346815" y="5947410"/>
+            <a:ext cx="644525" cy="644525"/>
+          </a:xfrm>
+          <a:prstGeom prst="rect">
+            <a:avLst/>
+          </a:prstGeom>
+        </p:spPr>
+      </p:pic>
     </p:spTree>
   </p:cSld>
   <p:clrMapOvr>
     <a:masterClrMapping/>
   </p:clrMapOvr>
+  <p:timing>
+    <p:tnLst>
+      <p:par>
+        <p:cTn id="1" dur="indefinite" restart="never" nodeType="tmRoot">
+          <p:childTnLst>
+            <p:seq concurrent="1" nextAc="seek">
+              <p:cTn id="2" dur="indefinite" nodeType="mainSeq">
+                <p:childTnLst>
+                  <p:par>
+                    <p:cTn id="3" fill="hold">
+                      <p:stCondLst>
+                        <p:cond delay="indefinite"/>
+                      </p:stCondLst>
+                      <p:childTnLst>
+                        <p:par>
+                          <p:cTn id="4" fill="hold">
+                            <p:stCondLst>
+                              <p:cond delay="0"/>
+                            </p:stCondLst>
+                            <p:childTnLst>
+                              <p:par>
+                                <p:cTn id="5" presetID="1" presetClass="mediacall" presetSubtype="0" fill="hold" nodeType="clickEffect">
+                                  <p:stCondLst>
+                                    <p:cond delay="0"/>
+                                  </p:stCondLst>
+                                  <p:childTnLst>
+                                    <p:cmd type="call" cmd="playFrom(0.0)">
+                                      <p:cBhvr>
+                                        <p:cTn id="6" dur="66748" fill="hold"/>
+                                        <p:tgtEl>
+                                          <p:spTgt spid="7"/>
+                                        </p:tgtEl>
+                                      </p:cBhvr>
+                                    </p:cmd>
+                                  </p:childTnLst>
+                                </p:cTn>
+                              </p:par>
+                            </p:childTnLst>
+                          </p:cTn>
+                        </p:par>
+                      </p:childTnLst>
+                    </p:cTn>
+                  </p:par>
+                </p:childTnLst>
+              </p:cTn>
+              <p:prevCondLst>
+                <p:cond evt="onPrev" delay="0">
+                  <p:tgtEl>
+                    <p:sldTgt/>
+                  </p:tgtEl>
+                </p:cond>
+              </p:prevCondLst>
+              <p:nextCondLst>
+                <p:cond evt="onNext" delay="0">
+                  <p:tgtEl>
+                    <p:sldTgt/>
+                  </p:tgtEl>
+                </p:cond>
+              </p:nextCondLst>
+            </p:seq>
+            <p:audio>
+              <p:cMediaNode vol="80000" mute="1">
+                <p:cTn id="7" fill="hold" display="0">
+                  <p:stCondLst>
+                    <p:cond delay="indefinite"/>
+                  </p:stCondLst>
+                  <p:endCondLst>
+                    <p:cond evt="onStopAudio" delay="0">
+                      <p:tgtEl>
+                        <p:sldTgt/>
+                      </p:tgtEl>
+                    </p:cond>
+                  </p:endCondLst>
+                </p:cTn>
+                <p:tgtEl>
+                  <p:spTgt spid="7"/>
+                </p:tgtEl>
+              </p:cMediaNode>
+            </p:audio>
+          </p:childTnLst>
+        </p:cTn>
+      </p:par>
+    </p:tnLst>
+  </p:timing>
 </p:sld>
 </file>
 
@@ -7374,7 +8396,14 @@
         <p:cNvGrpSpPr/>
         <p:nvPr/>
       </p:nvGrpSpPr>
-      <p:grpSpPr/>
+      <p:grpSpPr>
+        <a:xfrm>
+          <a:off x="0" y="0"/>
+          <a:ext cx="0" cy="0"/>
+          <a:chOff x="0" y="0"/>
+          <a:chExt cx="0" cy="0"/>
+        </a:xfrm>
+      </p:grpSpPr>
       <p:sp>
         <p:nvSpPr>
           <p:cNvPr id="4" name="文本框 3"/>
@@ -7395,29 +8424,30 @@
           <a:bodyPr wrap="square" rtlCol="0" anchor="t">
             <a:spAutoFit/>
           </a:bodyPr>
-          <a:p>
-            <a:r>
-              <a:rPr lang="en-US" altLang="zh-CN">
+          <a:lstStyle/>
+          <a:p>
+            <a:r>
+              <a:rPr lang="en-US" altLang="zh-CN" dirty="0">
                 <a:latin typeface="Times New Roman" panose="02020503050405090304" charset="0"/>
                 <a:cs typeface="Times New Roman" panose="02020503050405090304" charset="0"/>
               </a:rPr>
               <a:t>1. Bulk vs wall. Re-run with k</a:t>
             </a:r>
             <a:r>
-              <a:rPr lang="en-US" altLang="zh-CN" baseline="-25000">
+              <a:rPr lang="en-US" altLang="zh-CN" baseline="-25000" dirty="0">
                 <a:latin typeface="Times New Roman" panose="02020503050405090304" charset="0"/>
                 <a:cs typeface="Times New Roman" panose="02020503050405090304" charset="0"/>
               </a:rPr>
               <a:t>w</a:t>
             </a:r>
             <a:r>
-              <a:rPr lang="en-US" altLang="zh-CN">
+              <a:rPr lang="en-US" altLang="zh-CN" dirty="0">
                 <a:latin typeface="Times New Roman" panose="02020503050405090304" charset="0"/>
                 <a:cs typeface="Times New Roman" panose="02020503050405090304" charset="0"/>
               </a:rPr>
               <a:t> = 0. How much of Net's residual loss is bulk vs wall? </a:t>
             </a:r>
-            <a:endParaRPr lang="en-US" altLang="zh-CN">
+            <a:endParaRPr lang="en-US" altLang="zh-CN" dirty="0">
               <a:latin typeface="Times New Roman" panose="02020503050405090304" charset="0"/>
               <a:cs typeface="Times New Roman" panose="02020503050405090304" charset="0"/>
             </a:endParaRPr>
@@ -7432,7 +8462,7 @@
         </p:nvGraphicFramePr>
         <p:xfrm>
           <a:off x="847725" y="1143000"/>
-          <a:ext cx="8065135" cy="3530600"/>
+          <a:ext cx="4740275" cy="2723514"/>
         </p:xfrm>
         <a:graphic>
           <a:graphicData uri="http://schemas.openxmlformats.org/drawingml/2006/table">
@@ -7451,6 +8481,7 @@
                 <a:tc>
                   <a:txBody>
                     <a:bodyPr/>
+                    <a:lstStyle/>
                     <a:p>
                       <a:pPr algn="r" fontAlgn="ctr"/>
                       <a:r>
@@ -7485,11 +8516,12 @@
                       </a:endParaRPr>
                     </a:p>
                   </a:txBody>
-                  <a:tcPr marL="101917" marR="101917" marT="51117" marB="51117" anchor="ctr" anchorCtr="0"/>
+                  <a:tcPr marL="101917" marR="101917" marT="51117" marB="51117" anchor="ctr"/>
                 </a:tc>
                 <a:tc>
                   <a:txBody>
                     <a:bodyPr/>
+                    <a:lstStyle/>
                     <a:p>
                       <a:pPr algn="r" fontAlgn="ctr"/>
                       <a:r>
@@ -7507,11 +8539,12 @@
                       </a:endParaRPr>
                     </a:p>
                   </a:txBody>
-                  <a:tcPr marL="101917" marR="101917" marT="51117" marB="51117" anchor="ctr" anchorCtr="0"/>
+                  <a:tcPr marL="101917" marR="101917" marT="51117" marB="51117" anchor="ctr"/>
                 </a:tc>
                 <a:tc>
                   <a:txBody>
                     <a:bodyPr/>
+                    <a:lstStyle/>
                     <a:p>
                       <a:pPr algn="r" fontAlgn="ctr"/>
                       <a:r>
@@ -7529,11 +8562,12 @@
                       </a:endParaRPr>
                     </a:p>
                   </a:txBody>
-                  <a:tcPr marL="101917" marR="101917" marT="51117" marB="51117" anchor="ctr" anchorCtr="0"/>
+                  <a:tcPr marL="101917" marR="101917" marT="51117" marB="51117" anchor="ctr"/>
                 </a:tc>
                 <a:tc>
                   <a:txBody>
                     <a:bodyPr/>
+                    <a:lstStyle/>
                     <a:p>
                       <a:pPr algn="r" fontAlgn="ctr"/>
                       <a:r>
@@ -7551,35 +8585,45 @@
                       </a:endParaRPr>
                     </a:p>
                   </a:txBody>
-                  <a:tcPr marL="101917" marR="101917" marT="51117" marB="51117" anchor="ctr" anchorCtr="0"/>
+                  <a:tcPr marL="101917" marR="101917" marT="51117" marB="51117" anchor="ctr"/>
                 </a:tc>
                 <a:tc>
                   <a:txBody>
                     <a:bodyPr/>
+                    <a:lstStyle/>
                     <a:p>
                       <a:pPr algn="r" fontAlgn="ctr"/>
                       <a:r>
-                        <a:rPr lang="en-US" altLang="zh-CN" sz="1100" b="0" i="0">
+                        <a:rPr lang="en-US" altLang="zh-CN" sz="1100" b="0" i="0" dirty="0" err="1">
                           <a:latin typeface="Times New Roman" panose="02020503050405090304" charset="0"/>
                           <a:ea typeface="-apple-system"/>
                           <a:cs typeface="Times New Roman" panose="02020503050405090304" charset="0"/>
                         </a:rPr>
-                        <a:t>loss_wall (%)</a:t>
+                        <a:t>loss_wall</a:t>
                       </a:r>
-                      <a:endParaRPr lang="en-US" altLang="zh-CN" sz="1100" b="0" i="0">
+                      <a:r>
+                        <a:rPr lang="en-US" altLang="zh-CN" sz="1100" b="0" i="0" dirty="0">
+                          <a:latin typeface="Times New Roman" panose="02020503050405090304" charset="0"/>
+                          <a:ea typeface="-apple-system"/>
+                          <a:cs typeface="Times New Roman" panose="02020503050405090304" charset="0"/>
+                        </a:rPr>
+                        <a:t> (%)</a:t>
+                      </a:r>
+                      <a:endParaRPr lang="en-US" altLang="zh-CN" sz="1100" b="0" i="0" dirty="0">
                         <a:latin typeface="Times New Roman" panose="02020503050405090304" charset="0"/>
                         <a:ea typeface="-apple-system"/>
                         <a:cs typeface="Times New Roman" panose="02020503050405090304" charset="0"/>
                       </a:endParaRPr>
                     </a:p>
                   </a:txBody>
-                  <a:tcPr marL="101917" marR="101917" marT="51117" marB="51117" anchor="ctr" anchorCtr="0"/>
+                  <a:tcPr marL="101917" marR="101917" marT="51117" marB="51117" anchor="ctr"/>
                 </a:tc>
               </a:tr>
               <a:tr h="381000">
                 <a:tc>
                   <a:txBody>
                     <a:bodyPr/>
+                    <a:lstStyle/>
                     <a:p>
                       <a:pPr algn="r" fontAlgn="ctr"/>
                       <a:r>
@@ -7597,11 +8641,12 @@
                       </a:endParaRPr>
                     </a:p>
                   </a:txBody>
-                  <a:tcPr marL="101917" marR="101917" marT="51117" marB="51117" anchor="ctr" anchorCtr="0"/>
+                  <a:tcPr marL="101917" marR="101917" marT="51117" marB="51117" anchor="ctr"/>
                 </a:tc>
                 <a:tc>
                   <a:txBody>
                     <a:bodyPr/>
+                    <a:lstStyle/>
                     <a:p>
                       <a:pPr algn="r" fontAlgn="ctr"/>
                       <a:r>
@@ -7619,11 +8664,12 @@
                       </a:endParaRPr>
                     </a:p>
                   </a:txBody>
-                  <a:tcPr marL="101917" marR="101917" marT="51117" marB="51117" anchor="ctr" anchorCtr="0"/>
+                  <a:tcPr marL="101917" marR="101917" marT="51117" marB="51117" anchor="ctr"/>
                 </a:tc>
                 <a:tc>
                   <a:txBody>
                     <a:bodyPr/>
+                    <a:lstStyle/>
                     <a:p>
                       <a:pPr algn="r" fontAlgn="ctr"/>
                       <a:r>
@@ -7641,11 +8687,12 @@
                       </a:endParaRPr>
                     </a:p>
                   </a:txBody>
-                  <a:tcPr marL="101917" marR="101917" marT="51117" marB="51117" anchor="ctr" anchorCtr="0"/>
+                  <a:tcPr marL="101917" marR="101917" marT="51117" marB="51117" anchor="ctr"/>
                 </a:tc>
                 <a:tc>
                   <a:txBody>
                     <a:bodyPr/>
+                    <a:lstStyle/>
                     <a:p>
                       <a:pPr algn="r" fontAlgn="ctr"/>
                       <a:r>
@@ -7663,11 +8710,12 @@
                       </a:endParaRPr>
                     </a:p>
                   </a:txBody>
-                  <a:tcPr marL="101917" marR="101917" marT="51117" marB="51117" anchor="ctr" anchorCtr="0"/>
+                  <a:tcPr marL="101917" marR="101917" marT="51117" marB="51117" anchor="ctr"/>
                 </a:tc>
                 <a:tc>
                   <a:txBody>
                     <a:bodyPr/>
+                    <a:lstStyle/>
                     <a:p>
                       <a:pPr algn="r" fontAlgn="ctr"/>
                       <a:r>
@@ -7685,35 +8733,37 @@
                       </a:endParaRPr>
                     </a:p>
                   </a:txBody>
-                  <a:tcPr marL="101917" marR="101917" marT="51117" marB="51117" anchor="ctr" anchorCtr="0"/>
+                  <a:tcPr marL="101917" marR="101917" marT="51117" marB="51117" anchor="ctr"/>
                 </a:tc>
               </a:tr>
               <a:tr h="381000">
                 <a:tc>
                   <a:txBody>
                     <a:bodyPr/>
+                    <a:lstStyle/>
                     <a:p>
                       <a:pPr algn="r" fontAlgn="ctr"/>
                       <a:r>
-                        <a:rPr lang="en-US" altLang="zh-CN" sz="1100" b="0" i="0">
+                        <a:rPr lang="en-US" altLang="zh-CN" sz="1100" b="0" i="0" dirty="0">
                           <a:latin typeface="Times New Roman" panose="02020503050405090304" charset="0"/>
                           <a:ea typeface="-apple-system"/>
                           <a:cs typeface="Times New Roman" panose="02020503050405090304" charset="0"/>
                         </a:rPr>
                         <a:t>15</a:t>
                       </a:r>
-                      <a:endParaRPr lang="en-US" altLang="zh-CN" sz="1100" b="0" i="0">
+                      <a:endParaRPr lang="en-US" altLang="zh-CN" sz="1100" b="0" i="0" dirty="0">
                         <a:latin typeface="Times New Roman" panose="02020503050405090304" charset="0"/>
                         <a:ea typeface="-apple-system"/>
                         <a:cs typeface="Times New Roman" panose="02020503050405090304" charset="0"/>
                       </a:endParaRPr>
                     </a:p>
                   </a:txBody>
-                  <a:tcPr marL="101917" marR="101917" marT="51117" marB="51117" anchor="ctr" anchorCtr="0"/>
+                  <a:tcPr marL="101917" marR="101917" marT="51117" marB="51117" anchor="ctr"/>
                 </a:tc>
                 <a:tc>
                   <a:txBody>
                     <a:bodyPr/>
+                    <a:lstStyle/>
                     <a:p>
                       <a:pPr algn="r" fontAlgn="ctr"/>
                       <a:r>
@@ -7731,11 +8781,12 @@
                       </a:endParaRPr>
                     </a:p>
                   </a:txBody>
-                  <a:tcPr marL="101917" marR="101917" marT="51117" marB="51117" anchor="ctr" anchorCtr="0"/>
+                  <a:tcPr marL="101917" marR="101917" marT="51117" marB="51117" anchor="ctr"/>
                 </a:tc>
                 <a:tc>
                   <a:txBody>
                     <a:bodyPr/>
+                    <a:lstStyle/>
                     <a:p>
                       <a:pPr algn="r" fontAlgn="ctr"/>
                       <a:r>
@@ -7753,11 +8804,12 @@
                       </a:endParaRPr>
                     </a:p>
                   </a:txBody>
-                  <a:tcPr marL="101917" marR="101917" marT="51117" marB="51117" anchor="ctr" anchorCtr="0"/>
+                  <a:tcPr marL="101917" marR="101917" marT="51117" marB="51117" anchor="ctr"/>
                 </a:tc>
                 <a:tc>
                   <a:txBody>
                     <a:bodyPr/>
+                    <a:lstStyle/>
                     <a:p>
                       <a:pPr algn="r" fontAlgn="ctr"/>
                       <a:r>
@@ -7775,15 +8827,16 @@
                       </a:endParaRPr>
                     </a:p>
                   </a:txBody>
-                  <a:tcPr marL="101917" marR="101917" marT="51117" marB="51117" anchor="ctr" anchorCtr="0"/>
+                  <a:tcPr marL="101917" marR="101917" marT="51117" marB="51117" anchor="ctr"/>
                 </a:tc>
                 <a:tc>
                   <a:txBody>
                     <a:bodyPr/>
+                    <a:lstStyle/>
                     <a:p>
                       <a:pPr algn="r" fontAlgn="ctr"/>
                       <a:r>
-                        <a:rPr lang="en-US" altLang="zh-CN" sz="1100" b="1" i="0">
+                        <a:rPr lang="en-US" altLang="zh-CN" sz="1100" b="1" i="0" dirty="0">
                           <a:solidFill>
                             <a:schemeClr val="accent2"/>
                           </a:solidFill>
@@ -7793,7 +8846,7 @@
                         </a:rPr>
                         <a:t>14.9</a:t>
                       </a:r>
-                      <a:endParaRPr lang="en-US" altLang="zh-CN" sz="1100" b="1" i="0">
+                      <a:endParaRPr lang="en-US" altLang="zh-CN" sz="1100" b="1" i="0" dirty="0">
                         <a:solidFill>
                           <a:schemeClr val="accent2"/>
                         </a:solidFill>
@@ -7803,35 +8856,37 @@
                       </a:endParaRPr>
                     </a:p>
                   </a:txBody>
-                  <a:tcPr marL="101917" marR="101917" marT="51117" marB="51117" anchor="ctr" anchorCtr="0"/>
+                  <a:tcPr marL="101917" marR="101917" marT="51117" marB="51117" anchor="ctr"/>
                 </a:tc>
               </a:tr>
               <a:tr h="381000">
                 <a:tc>
                   <a:txBody>
                     <a:bodyPr/>
+                    <a:lstStyle/>
                     <a:p>
                       <a:pPr algn="r" fontAlgn="ctr"/>
                       <a:r>
-                        <a:rPr lang="en-US" altLang="zh-CN" sz="1100" b="0" i="0">
+                        <a:rPr lang="en-US" altLang="zh-CN" sz="1100" b="0" i="0" dirty="0">
                           <a:latin typeface="Times New Roman" panose="02020503050405090304" charset="0"/>
                           <a:ea typeface="-apple-system"/>
                           <a:cs typeface="Times New Roman" panose="02020503050405090304" charset="0"/>
                         </a:rPr>
                         <a:t>20</a:t>
                       </a:r>
-                      <a:endParaRPr lang="en-US" altLang="zh-CN" sz="1100" b="0" i="0">
+                      <a:endParaRPr lang="en-US" altLang="zh-CN" sz="1100" b="0" i="0" dirty="0">
                         <a:latin typeface="Times New Roman" panose="02020503050405090304" charset="0"/>
                         <a:ea typeface="-apple-system"/>
                         <a:cs typeface="Times New Roman" panose="02020503050405090304" charset="0"/>
                       </a:endParaRPr>
                     </a:p>
                   </a:txBody>
-                  <a:tcPr marL="101917" marR="101917" marT="51117" marB="51117" anchor="ctr" anchorCtr="0"/>
+                  <a:tcPr marL="101917" marR="101917" marT="51117" marB="51117" anchor="ctr"/>
                 </a:tc>
                 <a:tc>
                   <a:txBody>
                     <a:bodyPr/>
+                    <a:lstStyle/>
                     <a:p>
                       <a:pPr algn="r" fontAlgn="ctr"/>
                       <a:r>
@@ -7849,11 +8904,12 @@
                       </a:endParaRPr>
                     </a:p>
                   </a:txBody>
-                  <a:tcPr marL="101917" marR="101917" marT="51117" marB="51117" anchor="ctr" anchorCtr="0"/>
+                  <a:tcPr marL="101917" marR="101917" marT="51117" marB="51117" anchor="ctr"/>
                 </a:tc>
                 <a:tc>
                   <a:txBody>
                     <a:bodyPr/>
+                    <a:lstStyle/>
                     <a:p>
                       <a:pPr algn="r" fontAlgn="ctr"/>
                       <a:r>
@@ -7871,11 +8927,12 @@
                       </a:endParaRPr>
                     </a:p>
                   </a:txBody>
-                  <a:tcPr marL="101917" marR="101917" marT="51117" marB="51117" anchor="ctr" anchorCtr="0"/>
+                  <a:tcPr marL="101917" marR="101917" marT="51117" marB="51117" anchor="ctr"/>
                 </a:tc>
                 <a:tc>
                   <a:txBody>
                     <a:bodyPr/>
+                    <a:lstStyle/>
                     <a:p>
                       <a:pPr algn="r" fontAlgn="ctr"/>
                       <a:r>
@@ -7899,11 +8956,12 @@
                       </a:endParaRPr>
                     </a:p>
                   </a:txBody>
-                  <a:tcPr marL="101917" marR="101917" marT="51117" marB="51117" anchor="ctr" anchorCtr="0"/>
+                  <a:tcPr marL="101917" marR="101917" marT="51117" marB="51117" anchor="ctr"/>
                 </a:tc>
                 <a:tc>
                   <a:txBody>
                     <a:bodyPr/>
+                    <a:lstStyle/>
                     <a:p>
                       <a:pPr algn="r" fontAlgn="ctr"/>
                       <a:r>
@@ -7921,13 +8979,14 @@
                       </a:endParaRPr>
                     </a:p>
                   </a:txBody>
-                  <a:tcPr marL="101917" marR="101917" marT="51117" marB="51117" anchor="ctr" anchorCtr="0"/>
+                  <a:tcPr marL="101917" marR="101917" marT="51117" marB="51117" anchor="ctr"/>
                 </a:tc>
               </a:tr>
               <a:tr h="381000">
                 <a:tc>
                   <a:txBody>
                     <a:bodyPr/>
+                    <a:lstStyle/>
                     <a:p>
                       <a:pPr algn="r" fontAlgn="ctr"/>
                       <a:r>
@@ -7945,11 +9004,12 @@
                       </a:endParaRPr>
                     </a:p>
                   </a:txBody>
-                  <a:tcPr marL="101917" marR="101917" marT="51117" marB="51117" anchor="ctr" anchorCtr="0"/>
+                  <a:tcPr marL="101917" marR="101917" marT="51117" marB="51117" anchor="ctr"/>
                 </a:tc>
                 <a:tc>
                   <a:txBody>
                     <a:bodyPr/>
+                    <a:lstStyle/>
                     <a:p>
                       <a:pPr algn="r" fontAlgn="ctr"/>
                       <a:r>
@@ -7967,11 +9027,12 @@
                       </a:endParaRPr>
                     </a:p>
                   </a:txBody>
-                  <a:tcPr marL="101917" marR="101917" marT="51117" marB="51117" anchor="ctr" anchorCtr="0"/>
+                  <a:tcPr marL="101917" marR="101917" marT="51117" marB="51117" anchor="ctr"/>
                 </a:tc>
                 <a:tc>
                   <a:txBody>
                     <a:bodyPr/>
+                    <a:lstStyle/>
                     <a:p>
                       <a:pPr algn="r" fontAlgn="ctr"/>
                       <a:r>
@@ -7989,11 +9050,12 @@
                       </a:endParaRPr>
                     </a:p>
                   </a:txBody>
-                  <a:tcPr marL="101917" marR="101917" marT="51117" marB="51117" anchor="ctr" anchorCtr="0"/>
+                  <a:tcPr marL="101917" marR="101917" marT="51117" marB="51117" anchor="ctr"/>
                 </a:tc>
                 <a:tc>
                   <a:txBody>
                     <a:bodyPr/>
+                    <a:lstStyle/>
                     <a:p>
                       <a:pPr algn="r" fontAlgn="ctr"/>
                       <a:r>
@@ -8011,11 +9073,12 @@
                       </a:endParaRPr>
                     </a:p>
                   </a:txBody>
-                  <a:tcPr marL="101917" marR="101917" marT="51117" marB="51117" anchor="ctr" anchorCtr="0"/>
+                  <a:tcPr marL="101917" marR="101917" marT="51117" marB="51117" anchor="ctr"/>
                 </a:tc>
                 <a:tc>
                   <a:txBody>
                     <a:bodyPr/>
+                    <a:lstStyle/>
                     <a:p>
                       <a:pPr algn="r" fontAlgn="ctr"/>
                       <a:r>
@@ -8033,13 +9096,14 @@
                       </a:endParaRPr>
                     </a:p>
                   </a:txBody>
-                  <a:tcPr marL="101917" marR="101917" marT="51117" marB="51117" anchor="ctr" anchorCtr="0"/>
+                  <a:tcPr marL="101917" marR="101917" marT="51117" marB="51117" anchor="ctr"/>
                 </a:tc>
               </a:tr>
               <a:tr h="381000">
                 <a:tc>
                   <a:txBody>
                     <a:bodyPr/>
+                    <a:lstStyle/>
                     <a:p>
                       <a:pPr algn="r" fontAlgn="ctr"/>
                       <a:r>
@@ -8057,11 +9121,12 @@
                       </a:endParaRPr>
                     </a:p>
                   </a:txBody>
-                  <a:tcPr marL="101917" marR="101917" marT="51117" marB="51117" anchor="ctr" anchorCtr="0"/>
+                  <a:tcPr marL="101917" marR="101917" marT="51117" marB="51117" anchor="ctr"/>
                 </a:tc>
                 <a:tc>
                   <a:txBody>
                     <a:bodyPr/>
+                    <a:lstStyle/>
                     <a:p>
                       <a:pPr algn="r" fontAlgn="ctr"/>
                       <a:r>
@@ -8079,11 +9144,12 @@
                       </a:endParaRPr>
                     </a:p>
                   </a:txBody>
-                  <a:tcPr marL="101917" marR="101917" marT="51117" marB="51117" anchor="ctr" anchorCtr="0"/>
+                  <a:tcPr marL="101917" marR="101917" marT="51117" marB="51117" anchor="ctr"/>
                 </a:tc>
                 <a:tc>
                   <a:txBody>
                     <a:bodyPr/>
+                    <a:lstStyle/>
                     <a:p>
                       <a:pPr algn="r" fontAlgn="ctr"/>
                       <a:r>
@@ -8101,11 +9167,12 @@
                       </a:endParaRPr>
                     </a:p>
                   </a:txBody>
-                  <a:tcPr marL="101917" marR="101917" marT="51117" marB="51117" anchor="ctr" anchorCtr="0"/>
+                  <a:tcPr marL="101917" marR="101917" marT="51117" marB="51117" anchor="ctr"/>
                 </a:tc>
                 <a:tc>
                   <a:txBody>
                     <a:bodyPr/>
+                    <a:lstStyle/>
                     <a:p>
                       <a:pPr algn="r" fontAlgn="ctr"/>
                       <a:r>
@@ -8123,11 +9190,12 @@
                       </a:endParaRPr>
                     </a:p>
                   </a:txBody>
-                  <a:tcPr marL="101917" marR="101917" marT="51117" marB="51117" anchor="ctr" anchorCtr="0"/>
+                  <a:tcPr marL="101917" marR="101917" marT="51117" marB="51117" anchor="ctr"/>
                 </a:tc>
                 <a:tc>
                   <a:txBody>
                     <a:bodyPr/>
+                    <a:lstStyle/>
                     <a:p>
                       <a:pPr algn="r" fontAlgn="ctr"/>
                       <a:r>
@@ -8145,13 +9213,14 @@
                       </a:endParaRPr>
                     </a:p>
                   </a:txBody>
-                  <a:tcPr marL="101917" marR="101917" marT="51117" marB="51117" anchor="ctr" anchorCtr="0"/>
+                  <a:tcPr marL="101917" marR="101917" marT="51117" marB="51117" anchor="ctr"/>
                 </a:tc>
               </a:tr>
               <a:tr h="381000">
                 <a:tc>
                   <a:txBody>
                     <a:bodyPr/>
+                    <a:lstStyle/>
                     <a:p>
                       <a:pPr algn="r" fontAlgn="ctr"/>
                       <a:r>
@@ -8169,11 +9238,12 @@
                       </a:endParaRPr>
                     </a:p>
                   </a:txBody>
-                  <a:tcPr marL="101917" marR="101917" marT="51117" marB="51117" anchor="ctr" anchorCtr="0"/>
+                  <a:tcPr marL="101917" marR="101917" marT="51117" marB="51117" anchor="ctr"/>
                 </a:tc>
                 <a:tc>
                   <a:txBody>
                     <a:bodyPr/>
+                    <a:lstStyle/>
                     <a:p>
                       <a:pPr algn="r" fontAlgn="ctr"/>
                       <a:r>
@@ -8191,11 +9261,12 @@
                       </a:endParaRPr>
                     </a:p>
                   </a:txBody>
-                  <a:tcPr marL="101917" marR="101917" marT="51117" marB="51117" anchor="ctr" anchorCtr="0"/>
+                  <a:tcPr marL="101917" marR="101917" marT="51117" marB="51117" anchor="ctr"/>
                 </a:tc>
                 <a:tc>
                   <a:txBody>
                     <a:bodyPr/>
+                    <a:lstStyle/>
                     <a:p>
                       <a:pPr algn="r" fontAlgn="ctr"/>
                       <a:r>
@@ -8213,11 +9284,12 @@
                       </a:endParaRPr>
                     </a:p>
                   </a:txBody>
-                  <a:tcPr marL="101917" marR="101917" marT="51117" marB="51117" anchor="ctr" anchorCtr="0"/>
+                  <a:tcPr marL="101917" marR="101917" marT="51117" marB="51117" anchor="ctr"/>
                 </a:tc>
                 <a:tc>
                   <a:txBody>
                     <a:bodyPr/>
+                    <a:lstStyle/>
                     <a:p>
                       <a:pPr algn="r" fontAlgn="ctr"/>
                       <a:r>
@@ -8235,29 +9307,30 @@
                       </a:endParaRPr>
                     </a:p>
                   </a:txBody>
-                  <a:tcPr marL="101917" marR="101917" marT="51117" marB="51117" anchor="ctr" anchorCtr="0"/>
+                  <a:tcPr marL="101917" marR="101917" marT="51117" marB="51117" anchor="ctr"/>
                 </a:tc>
                 <a:tc>
                   <a:txBody>
                     <a:bodyPr/>
+                    <a:lstStyle/>
                     <a:p>
                       <a:pPr algn="r" fontAlgn="ctr"/>
                       <a:r>
-                        <a:rPr lang="en-US" altLang="zh-CN" sz="1100" b="1" i="0">
+                        <a:rPr lang="en-US" altLang="zh-CN" sz="1100" b="1" i="0" dirty="0">
                           <a:latin typeface="Times New Roman" panose="02020503050405090304" charset="0"/>
                           <a:ea typeface="-apple-system"/>
                           <a:cs typeface="Times New Roman" panose="02020503050405090304" charset="0"/>
                         </a:rPr>
                         <a:t>0.1</a:t>
                       </a:r>
-                      <a:endParaRPr lang="en-US" altLang="zh-CN" sz="1100" b="1" i="0">
+                      <a:endParaRPr lang="en-US" altLang="zh-CN" sz="1100" b="1" i="0" dirty="0">
                         <a:latin typeface="Times New Roman" panose="02020503050405090304" charset="0"/>
                         <a:ea typeface="-apple-system"/>
                         <a:cs typeface="Times New Roman" panose="02020503050405090304" charset="0"/>
                       </a:endParaRPr>
                     </a:p>
                   </a:txBody>
-                  <a:tcPr marL="101917" marR="101917" marT="51117" marB="51117" anchor="ctr" anchorCtr="0"/>
+                  <a:tcPr marL="101917" marR="101917" marT="51117" marB="51117" anchor="ctr"/>
                 </a:tc>
               </a:tr>
             </a:tbl>
@@ -8273,7 +9346,7 @@
         <p:spPr>
           <a:xfrm>
             <a:off x="847725" y="4133850"/>
-            <a:ext cx="4311015" cy="2584450"/>
+            <a:ext cx="4311015" cy="2585323"/>
           </a:xfrm>
           <a:prstGeom prst="rect">
             <a:avLst/>
@@ -8284,55 +9357,106 @@
           <a:bodyPr wrap="square" rtlCol="0">
             <a:spAutoFit/>
           </a:bodyPr>
-          <a:p>
-            <a:r>
-              <a:rPr lang="en-US" altLang="zh-CN">
+          <a:lstStyle/>
+          <a:p>
+            <a:r>
+              <a:rPr lang="en-US" altLang="zh-CN" dirty="0">
                 <a:latin typeface="Times New Roman" panose="02020503050405090304" charset="0"/>
                 <a:cs typeface="Times New Roman" panose="02020503050405090304" charset="0"/>
               </a:rPr>
               <a:t>• The node with the highest absolute contribution from wall decay is node 15.</a:t>
             </a:r>
-            <a:endParaRPr lang="en-US" altLang="zh-CN">
+            <a:endParaRPr lang="en-US" altLang="zh-CN" dirty="0">
               <a:latin typeface="Times New Roman" panose="02020503050405090304" charset="0"/>
               <a:cs typeface="Times New Roman" panose="02020503050405090304" charset="0"/>
             </a:endParaRPr>
           </a:p>
           <a:p>
-            <a:endParaRPr lang="en-US" altLang="zh-CN">
+            <a:endParaRPr lang="en-US" altLang="zh-CN" dirty="0">
               <a:latin typeface="Times New Roman" panose="02020503050405090304" charset="0"/>
               <a:cs typeface="Times New Roman" panose="02020503050405090304" charset="0"/>
             </a:endParaRPr>
           </a:p>
           <a:p>
             <a:r>
-              <a:rPr lang="en-US" altLang="zh-CN">
+              <a:rPr lang="en-US" altLang="zh-CN" dirty="0">
                 <a:latin typeface="Times New Roman" panose="02020503050405090304" charset="0"/>
                 <a:cs typeface="Times New Roman" panose="02020503050405090304" charset="0"/>
                 <a:sym typeface="+mn-ea"/>
               </a:rPr>
-              <a:t>• The larger the loss_bulk, the "older" the water. Node 20 has the highest value (51.8%, longest water age), while node 60/10 has the lowest. </a:t>
-            </a:r>
-            <a:endParaRPr lang="en-US" altLang="zh-CN">
+              <a:t>• Node 20 has the highest bulk</a:t>
+            </a:r>
+            <a:r>
+              <a:rPr lang="zh-CN" altLang="en-US" dirty="0">
+                <a:latin typeface="Times New Roman" panose="02020503050405090304" charset="0"/>
+                <a:cs typeface="Times New Roman" panose="02020503050405090304" charset="0"/>
+                <a:sym typeface="+mn-ea"/>
+              </a:rPr>
+              <a:t> </a:t>
+            </a:r>
+            <a:r>
+              <a:rPr lang="en-US" altLang="zh-CN" dirty="0">
+                <a:latin typeface="Times New Roman" panose="02020503050405090304" charset="0"/>
+                <a:cs typeface="Times New Roman" panose="02020503050405090304" charset="0"/>
+                <a:sym typeface="+mn-ea"/>
+              </a:rPr>
+              <a:t>decay</a:t>
+            </a:r>
+            <a:r>
+              <a:rPr lang="zh-CN" altLang="en-US" dirty="0">
+                <a:latin typeface="Times New Roman" panose="02020503050405090304" charset="0"/>
+                <a:cs typeface="Times New Roman" panose="02020503050405090304" charset="0"/>
+                <a:sym typeface="+mn-ea"/>
+              </a:rPr>
+              <a:t> </a:t>
+            </a:r>
+            <a:r>
+              <a:rPr lang="en-US" altLang="zh-CN" dirty="0">
+                <a:latin typeface="Times New Roman" panose="02020503050405090304" charset="0"/>
+                <a:cs typeface="Times New Roman" panose="02020503050405090304" charset="0"/>
+                <a:sym typeface="+mn-ea"/>
+              </a:rPr>
+              <a:t>value (51.8%, longest water age), while node 60/10 has the lowest. </a:t>
+            </a:r>
+            <a:endParaRPr lang="en-US" altLang="zh-CN" dirty="0">
               <a:latin typeface="Times New Roman" panose="02020503050405090304" charset="0"/>
               <a:cs typeface="Times New Roman" panose="02020503050405090304" charset="0"/>
+              <a:sym typeface="+mn-ea"/>
             </a:endParaRPr>
           </a:p>
           <a:p>
-            <a:r>
-              <a:rPr lang="en-US" altLang="zh-CN">
-                <a:latin typeface="Times New Roman" panose="02020503050405090304" charset="0"/>
-                <a:cs typeface="Times New Roman" panose="02020503050405090304" charset="0"/>
-                <a:sym typeface="+mn-ea"/>
-              </a:rPr>
-              <a:t> </a:t>
-            </a:r>
-            <a:endParaRPr lang="en-US" altLang="zh-CN">
+            <a:endParaRPr lang="en-US" altLang="zh-CN" dirty="0">
               <a:latin typeface="Times New Roman" panose="02020503050405090304" charset="0"/>
               <a:cs typeface="Times New Roman" panose="02020503050405090304" charset="0"/>
+              <a:sym typeface="+mn-ea"/>
             </a:endParaRPr>
           </a:p>
           <a:p>
-            <a:endParaRPr lang="en-US" altLang="zh-CN">
+            <a:r>
+              <a:rPr lang="en-US" altLang="zh-CN" dirty="0">
+                <a:latin typeface="Times New Roman" panose="02020503050405090304" charset="0"/>
+                <a:cs typeface="Times New Roman" panose="02020503050405090304" charset="0"/>
+                <a:sym typeface="+mn-ea"/>
+              </a:rPr>
+              <a:t>The larger the </a:t>
+            </a:r>
+            <a:r>
+              <a:rPr lang="en-US" altLang="zh-CN" dirty="0" err="1">
+                <a:latin typeface="Times New Roman" panose="02020503050405090304" charset="0"/>
+                <a:cs typeface="Times New Roman" panose="02020503050405090304" charset="0"/>
+                <a:sym typeface="+mn-ea"/>
+              </a:rPr>
+              <a:t>loss_bulk</a:t>
+            </a:r>
+            <a:r>
+              <a:rPr lang="en-US" altLang="zh-CN" dirty="0">
+                <a:latin typeface="Times New Roman" panose="02020503050405090304" charset="0"/>
+                <a:cs typeface="Times New Roman" panose="02020503050405090304" charset="0"/>
+                <a:sym typeface="+mn-ea"/>
+              </a:rPr>
+              <a:t>, the "older" the water. </a:t>
+            </a:r>
+            <a:endParaRPr lang="en-US" altLang="zh-CN" dirty="0">
               <a:latin typeface="Times New Roman" panose="02020503050405090304" charset="0"/>
               <a:cs typeface="Times New Roman" panose="02020503050405090304" charset="0"/>
             </a:endParaRPr>
@@ -8359,23 +9483,24 @@
           <a:bodyPr wrap="square" rtlCol="0">
             <a:spAutoFit/>
           </a:bodyPr>
-          <a:p>
-            <a:r>
-              <a:rPr lang="en-US" altLang="zh-CN">
+          <a:lstStyle/>
+          <a:p>
+            <a:r>
+              <a:rPr lang="en-US" altLang="zh-CN" dirty="0">
                 <a:latin typeface="Times New Roman" panose="02020503050405090304" charset="0"/>
                 <a:cs typeface="Times New Roman" panose="02020503050405090304" charset="0"/>
               </a:rPr>
               <a:t>Wall decay contribution strongly depends on </a:t>
             </a:r>
             <a:r>
-              <a:rPr lang="en-US" altLang="zh-CN" b="1">
+              <a:rPr lang="en-US" altLang="zh-CN" b="1" dirty="0">
                 <a:latin typeface="Times New Roman" panose="02020503050405090304" charset="0"/>
                 <a:cs typeface="Times New Roman" panose="02020503050405090304" charset="0"/>
               </a:rPr>
               <a:t>spatial location, </a:t>
             </a:r>
             <a:r>
-              <a:rPr lang="en-US" altLang="zh-CN" b="1">
+              <a:rPr lang="en-US" altLang="zh-CN" b="1" dirty="0">
                 <a:latin typeface="Times New Roman" panose="02020503050405090304" charset="0"/>
                 <a:cs typeface="Times New Roman" panose="02020503050405090304" charset="0"/>
                 <a:sym typeface="+mn-ea"/>
@@ -8383,27 +9508,27 @@
               <a:t>pipe material and age</a:t>
             </a:r>
             <a:r>
-              <a:rPr lang="en-US" altLang="zh-CN">
+              <a:rPr lang="en-US" altLang="zh-CN" dirty="0">
                 <a:latin typeface="Times New Roman" panose="02020503050405090304" charset="0"/>
                 <a:cs typeface="Times New Roman" panose="02020503050405090304" charset="0"/>
               </a:rPr>
               <a:t> (Hallam et al., 2002). Even with uniform k</a:t>
             </a:r>
             <a:r>
-              <a:rPr lang="en-US" altLang="zh-CN" baseline="-25000">
+              <a:rPr lang="en-US" altLang="zh-CN" baseline="-25000" dirty="0">
                 <a:latin typeface="Times New Roman" panose="02020503050405090304" charset="0"/>
                 <a:cs typeface="Times New Roman" panose="02020503050405090304" charset="0"/>
               </a:rPr>
               <a:t>w</a:t>
             </a:r>
             <a:r>
-              <a:rPr lang="en-US" altLang="zh-CN">
+              <a:rPr lang="en-US" altLang="zh-CN" dirty="0">
                 <a:latin typeface="Times New Roman" panose="02020503050405090304" charset="0"/>
                 <a:cs typeface="Times New Roman" panose="02020503050405090304" charset="0"/>
               </a:rPr>
               <a:t> values throughout the network, the proportion attributed to wall decay ranges from 0% to ~15% at different locations.</a:t>
             </a:r>
-            <a:endParaRPr lang="en-US" altLang="zh-CN">
+            <a:endParaRPr lang="en-US" altLang="zh-CN" dirty="0">
               <a:latin typeface="Times New Roman" panose="02020503050405090304" charset="0"/>
               <a:cs typeface="Times New Roman" panose="02020503050405090304" charset="0"/>
             </a:endParaRPr>
@@ -8430,9 +9555,10 @@
           <a:bodyPr wrap="square" rtlCol="0" anchor="t">
             <a:spAutoFit/>
           </a:bodyPr>
-          <a:p>
-            <a:r>
-              <a:rPr lang="en-US" altLang="zh-CN">
+          <a:lstStyle/>
+          <a:p>
+            <a:r>
+              <a:rPr lang="en-US" altLang="zh-CN" dirty="0">
                 <a:latin typeface="Times New Roman" panose="02020503050405090304" charset="0"/>
                 <a:cs typeface="Times New Roman" panose="02020503050405090304" charset="0"/>
                 <a:sym typeface="+mn-ea"/>
@@ -8440,7 +9566,7 @@
               <a:t>Division of labor with wall: at each point, bulk loss is ≥ wall, indicating that </a:t>
             </a:r>
             <a:r>
-              <a:rPr lang="en-US" altLang="zh-CN" b="1">
+              <a:rPr lang="en-US" altLang="zh-CN" b="1" dirty="0">
                 <a:latin typeface="Times New Roman" panose="02020503050405090304" charset="0"/>
                 <a:cs typeface="Times New Roman" panose="02020503050405090304" charset="0"/>
                 <a:sym typeface="+mn-ea"/>
@@ -8448,14 +9574,14 @@
               <a:t>bulk</a:t>
             </a:r>
             <a:r>
-              <a:rPr lang="en-US" altLang="zh-CN">
+              <a:rPr lang="en-US" altLang="zh-CN" dirty="0">
                 <a:latin typeface="Times New Roman" panose="02020503050405090304" charset="0"/>
                 <a:cs typeface="Times New Roman" panose="02020503050405090304" charset="0"/>
                 <a:sym typeface="+mn-ea"/>
               </a:rPr>
               <a:t> is the dominant decay mechanism;</a:t>
             </a:r>
-            <a:endParaRPr lang="en-US" altLang="zh-CN">
+            <a:endParaRPr lang="en-US" altLang="zh-CN" dirty="0">
               <a:latin typeface="Times New Roman" panose="02020503050405090304" charset="0"/>
               <a:cs typeface="Times New Roman" panose="02020503050405090304" charset="0"/>
               <a:sym typeface="+mn-ea"/>
@@ -8463,11 +9589,128 @@
           </a:p>
         </p:txBody>
       </p:sp>
+      <p:pic>
+        <p:nvPicPr>
+          <p:cNvPr id="5" name="Audio Recording 2026年6月3日 22:03:25">
+            <a:hlinkClick r:id="" action="ppaction://media"/>
+          </p:cNvPr>
+          <p:cNvPicPr>
+            <a:picLocks noChangeAspect="1"/>
+          </p:cNvPicPr>
+          <p:nvPr>
+            <a:audioFile r:link="rId1"/>
+            <p:extLst>
+              <p:ext uri="{DAA4B4D4-6D71-4841-9C94-3DE7FCFB9230}">
+                <p14:media xmlns:p14="http://schemas.microsoft.com/office/powerpoint/2010/main" r:embed="rId2"/>
+              </p:ext>
+            </p:extLst>
+          </p:nvPr>
+        </p:nvPicPr>
+        <p:blipFill>
+          <a:blip r:embed="rId3"/>
+          <a:stretch>
+            <a:fillRect/>
+          </a:stretch>
+        </p:blipFill>
+        <p:spPr>
+          <a:xfrm>
+            <a:off x="11294745" y="5981700"/>
+            <a:ext cx="645795" cy="645795"/>
+          </a:xfrm>
+          <a:prstGeom prst="rect">
+            <a:avLst/>
+          </a:prstGeom>
+        </p:spPr>
+      </p:pic>
     </p:spTree>
   </p:cSld>
   <p:clrMapOvr>
     <a:masterClrMapping/>
   </p:clrMapOvr>
+  <p:timing>
+    <p:tnLst>
+      <p:par>
+        <p:cTn id="1" dur="indefinite" restart="never" nodeType="tmRoot">
+          <p:childTnLst>
+            <p:seq concurrent="1" nextAc="seek">
+              <p:cTn id="2" dur="indefinite" nodeType="mainSeq">
+                <p:childTnLst>
+                  <p:par>
+                    <p:cTn id="3" fill="hold">
+                      <p:stCondLst>
+                        <p:cond delay="indefinite"/>
+                      </p:stCondLst>
+                      <p:childTnLst>
+                        <p:par>
+                          <p:cTn id="4" fill="hold">
+                            <p:stCondLst>
+                              <p:cond delay="0"/>
+                            </p:stCondLst>
+                            <p:childTnLst>
+                              <p:par>
+                                <p:cTn id="5" presetID="1" presetClass="mediacall" presetSubtype="0" fill="hold" nodeType="clickEffect">
+                                  <p:stCondLst>
+                                    <p:cond delay="0"/>
+                                  </p:stCondLst>
+                                  <p:childTnLst>
+                                    <p:cmd type="call" cmd="playFrom(0.0)">
+                                      <p:cBhvr>
+                                        <p:cTn id="6" dur="51708" fill="hold"/>
+                                        <p:tgtEl>
+                                          <p:spTgt spid="5"/>
+                                        </p:tgtEl>
+                                      </p:cBhvr>
+                                    </p:cmd>
+                                  </p:childTnLst>
+                                </p:cTn>
+                              </p:par>
+                            </p:childTnLst>
+                          </p:cTn>
+                        </p:par>
+                      </p:childTnLst>
+                    </p:cTn>
+                  </p:par>
+                </p:childTnLst>
+              </p:cTn>
+              <p:prevCondLst>
+                <p:cond evt="onPrev" delay="0">
+                  <p:tgtEl>
+                    <p:sldTgt/>
+                  </p:tgtEl>
+                </p:cond>
+              </p:prevCondLst>
+              <p:nextCondLst>
+                <p:cond evt="onNext" delay="0">
+                  <p:tgtEl>
+                    <p:sldTgt/>
+                  </p:tgtEl>
+                </p:cond>
+              </p:nextCondLst>
+            </p:seq>
+            <p:audio>
+              <p:cMediaNode vol="80000" mute="1">
+                <p:cTn id="7" fill="hold" display="0">
+                  <p:stCondLst>
+                    <p:cond delay="indefinite"/>
+                  </p:stCondLst>
+                  <p:endCondLst>
+                    <p:cond evt="onStopAudio" delay="0">
+                      <p:tgtEl>
+                        <p:sldTgt/>
+                      </p:tgtEl>
+                    </p:cond>
+                  </p:endCondLst>
+                </p:cTn>
+                <p:tgtEl>
+                  <p:spTgt spid="5"/>
+                </p:tgtEl>
+              </p:cMediaNode>
+            </p:audio>
+          </p:childTnLst>
+        </p:cTn>
+      </p:par>
+    </p:tnLst>
+  </p:timing>
 </p:sld>
 </file>
 
@@ -8480,7 +9723,14 @@
         <p:cNvGrpSpPr/>
         <p:nvPr/>
       </p:nvGrpSpPr>
-      <p:grpSpPr/>
+      <p:grpSpPr>
+        <a:xfrm>
+          <a:off x="0" y="0"/>
+          <a:ext cx="0" cy="0"/>
+          <a:chOff x="0" y="0"/>
+          <a:chExt cx="0" cy="0"/>
+        </a:xfrm>
+      </p:grpSpPr>
       <p:pic>
         <p:nvPicPr>
           <p:cNvPr id="2" name="图片 1" descr="02_exercises-1"/>
@@ -8525,9 +9775,10 @@
           <a:bodyPr wrap="square" rtlCol="0" anchor="t">
             <a:spAutoFit/>
           </a:bodyPr>
-          <a:p>
-            <a:r>
-              <a:rPr lang="en-US" altLang="zh-CN">
+          <a:lstStyle/>
+          <a:p>
+            <a:r>
+              <a:rPr lang="en-US" altLang="zh-CN" dirty="0">
                 <a:latin typeface="Times New Roman" panose="02020503050405090304" charset="0"/>
                 <a:cs typeface="Times New Roman" panose="02020503050405090304" charset="0"/>
                 <a:sym typeface="+mn-ea"/>
@@ -8535,32 +9786,60 @@
               <a:t>Results:  </a:t>
             </a:r>
             <a:r>
-              <a:rPr lang="en-US" altLang="zh-CN">
+              <a:rPr lang="en-US" altLang="zh-CN" dirty="0">
                 <a:latin typeface="Times New Roman" panose="02020503050405090304" charset="0"/>
                 <a:cs typeface="Times New Roman" panose="02020503050405090304" charset="0"/>
               </a:rPr>
               <a:t>The four normalized curves perfectly overlap.  </a:t>
             </a:r>
-            <a:endParaRPr lang="en-US" altLang="zh-CN">
+            <a:endParaRPr lang="en-US" altLang="zh-CN" dirty="0">
               <a:latin typeface="Times New Roman" panose="02020503050405090304" charset="0"/>
               <a:cs typeface="Times New Roman" panose="02020503050405090304" charset="0"/>
             </a:endParaRPr>
           </a:p>
           <a:p>
-            <a:endParaRPr lang="en-US" altLang="zh-CN">
+            <a:endParaRPr lang="en-US" altLang="zh-CN" dirty="0">
               <a:latin typeface="Times New Roman" panose="02020503050405090304" charset="0"/>
               <a:cs typeface="Times New Roman" panose="02020503050405090304" charset="0"/>
             </a:endParaRPr>
           </a:p>
           <a:p>
             <a:r>
-              <a:rPr lang="en-US" altLang="zh-CN">
-                <a:latin typeface="Times New Roman" panose="02020503050405090304" charset="0"/>
-                <a:cs typeface="Times New Roman" panose="02020503050405090304" charset="0"/>
-              </a:rPr>
-              <a:t>First-order kinetics dC/dt = -k·C is homogeneous/linear with respect to concentration.  </a:t>
-            </a:r>
-            <a:endParaRPr lang="zh-CN" altLang="en-US">
+              <a:rPr lang="en-US" altLang="zh-CN" dirty="0">
+                <a:latin typeface="Times New Roman" panose="02020503050405090304" charset="0"/>
+                <a:cs typeface="Times New Roman" panose="02020503050405090304" charset="0"/>
+              </a:rPr>
+              <a:t>First-order kinetics </a:t>
+            </a:r>
+            <a:r>
+              <a:rPr lang="en-US" altLang="zh-CN" dirty="0" err="1">
+                <a:latin typeface="Times New Roman" panose="02020503050405090304" charset="0"/>
+                <a:cs typeface="Times New Roman" panose="02020503050405090304" charset="0"/>
+              </a:rPr>
+              <a:t>dC</a:t>
+            </a:r>
+            <a:r>
+              <a:rPr lang="en-US" altLang="zh-CN" dirty="0">
+                <a:latin typeface="Times New Roman" panose="02020503050405090304" charset="0"/>
+                <a:cs typeface="Times New Roman" panose="02020503050405090304" charset="0"/>
+              </a:rPr>
+              <a:t>/dt = -</a:t>
+            </a:r>
+            <a:r>
+              <a:rPr lang="en-US" altLang="zh-CN" dirty="0" err="1">
+                <a:latin typeface="Times New Roman" panose="02020503050405090304" charset="0"/>
+                <a:cs typeface="Times New Roman" panose="02020503050405090304" charset="0"/>
+              </a:rPr>
+              <a:t>k·C</a:t>
+            </a:r>
+            <a:r>
+              <a:rPr lang="en-US" altLang="zh-CN" dirty="0">
+                <a:latin typeface="Times New Roman" panose="02020503050405090304" charset="0"/>
+                <a:cs typeface="Times New Roman" panose="02020503050405090304" charset="0"/>
+              </a:rPr>
+              <a:t> is homogeneous/linear with respect to concentration.  </a:t>
+            </a:r>
+            <a:endParaRPr lang="zh-CN" altLang="en-US" dirty="0">
               <a:latin typeface="Times New Roman" panose="02020503050405090304" charset="0"/>
               <a:cs typeface="Times New Roman" panose="02020503050405090304" charset="0"/>
             </a:endParaRPr>
@@ -8587,15 +9866,16 @@
           <a:bodyPr wrap="square" rtlCol="0" anchor="t">
             <a:spAutoFit/>
           </a:bodyPr>
-          <a:p>
-            <a:r>
-              <a:rPr lang="en-US" altLang="zh-CN">
+          <a:lstStyle/>
+          <a:p>
+            <a:r>
+              <a:rPr lang="en-US" altLang="zh-CN" dirty="0">
                 <a:latin typeface="Times New Roman" panose="02020503050405090304" charset="0"/>
                 <a:cs typeface="Times New Roman" panose="02020503050405090304" charset="0"/>
               </a:rPr>
               <a:t>2. Change INLET_CHLORINE_MGL and confirm residuals scale linearly. Why does that matter for treating the inlet monitor as a boundary condition?</a:t>
             </a:r>
-            <a:endParaRPr lang="en-US" altLang="zh-CN">
+            <a:endParaRPr lang="en-US" altLang="zh-CN" dirty="0">
               <a:latin typeface="Times New Roman" panose="02020503050405090304" charset="0"/>
               <a:cs typeface="Times New Roman" panose="02020503050405090304" charset="0"/>
             </a:endParaRPr>
@@ -8622,16 +9902,33 @@
           <a:bodyPr wrap="square" rtlCol="0" anchor="t">
             <a:spAutoFit/>
           </a:bodyPr>
-          <a:p>
-            <a:r>
-              <a:rPr lang="en-US" altLang="zh-CN">
+          <a:lstStyle/>
+          <a:p>
+            <a:r>
+              <a:rPr lang="en-US" altLang="zh-CN" dirty="0">
                 <a:latin typeface="Times New Roman" panose="02020503050405090304" charset="0"/>
                 <a:cs typeface="Times New Roman" panose="02020503050405090304" charset="0"/>
                 <a:sym typeface="+mn-ea"/>
               </a:rPr>
-              <a:t>This provides the justification for treating the DMA inlet monitoring point as a boundary condition -- simply inputting the measured inlet C(t) into the model is sufficient, without needing recalibration due to changes in absolute inlet levels.</a:t>
-            </a:r>
-            <a:endParaRPr lang="en-US" altLang="zh-CN">
+              <a:t>This provides the justification for treating the DMA inlet monitoring point as a boundary condition -- </a:t>
+            </a:r>
+            <a:r>
+              <a:rPr lang="en-US" altLang="zh-CN" b="1" dirty="0">
+                <a:latin typeface="Times New Roman" panose="02020503050405090304" charset="0"/>
+                <a:cs typeface="Times New Roman" panose="02020503050405090304" charset="0"/>
+                <a:sym typeface="+mn-ea"/>
+              </a:rPr>
+              <a:t>simply inputting the measured inlet C(t) into the model </a:t>
+            </a:r>
+            <a:r>
+              <a:rPr lang="en-US" altLang="zh-CN" dirty="0">
+                <a:latin typeface="Times New Roman" panose="02020503050405090304" charset="0"/>
+                <a:cs typeface="Times New Roman" panose="02020503050405090304" charset="0"/>
+                <a:sym typeface="+mn-ea"/>
+              </a:rPr>
+              <a:t>is sufficient, without needing recalibration due to changes in absolute inlet levels.</a:t>
+            </a:r>
+            <a:endParaRPr lang="en-US" altLang="zh-CN" dirty="0">
               <a:latin typeface="Times New Roman" panose="02020503050405090304" charset="0"/>
               <a:cs typeface="Times New Roman" panose="02020503050405090304" charset="0"/>
               <a:sym typeface="+mn-ea"/>
@@ -8639,11 +9936,128 @@
           </a:p>
         </p:txBody>
       </p:sp>
+      <p:pic>
+        <p:nvPicPr>
+          <p:cNvPr id="5" name="Audio Recording 2026年6月3日 22:06:05">
+            <a:hlinkClick r:id="" action="ppaction://media"/>
+          </p:cNvPr>
+          <p:cNvPicPr>
+            <a:picLocks noChangeAspect="1"/>
+          </p:cNvPicPr>
+          <p:nvPr>
+            <a:audioFile r:link="rId2"/>
+            <p:extLst>
+              <p:ext uri="{DAA4B4D4-6D71-4841-9C94-3DE7FCFB9230}">
+                <p14:media xmlns:p14="http://schemas.microsoft.com/office/powerpoint/2010/main" r:embed="rId3"/>
+              </p:ext>
+            </p:extLst>
+          </p:nvPr>
+        </p:nvPicPr>
+        <p:blipFill>
+          <a:blip r:embed="rId4"/>
+          <a:stretch>
+            <a:fillRect/>
+          </a:stretch>
+        </p:blipFill>
+        <p:spPr>
+          <a:xfrm>
+            <a:off x="11247120" y="6139180"/>
+            <a:ext cx="645795" cy="645795"/>
+          </a:xfrm>
+          <a:prstGeom prst="rect">
+            <a:avLst/>
+          </a:prstGeom>
+        </p:spPr>
+      </p:pic>
     </p:spTree>
   </p:cSld>
   <p:clrMapOvr>
     <a:masterClrMapping/>
   </p:clrMapOvr>
+  <p:timing>
+    <p:tnLst>
+      <p:par>
+        <p:cTn id="1" dur="indefinite" restart="never" nodeType="tmRoot">
+          <p:childTnLst>
+            <p:seq concurrent="1" nextAc="seek">
+              <p:cTn id="2" dur="indefinite" nodeType="mainSeq">
+                <p:childTnLst>
+                  <p:par>
+                    <p:cTn id="3" fill="hold">
+                      <p:stCondLst>
+                        <p:cond delay="indefinite"/>
+                      </p:stCondLst>
+                      <p:childTnLst>
+                        <p:par>
+                          <p:cTn id="4" fill="hold">
+                            <p:stCondLst>
+                              <p:cond delay="0"/>
+                            </p:stCondLst>
+                            <p:childTnLst>
+                              <p:par>
+                                <p:cTn id="5" presetID="1" presetClass="mediacall" presetSubtype="0" fill="hold" nodeType="clickEffect">
+                                  <p:stCondLst>
+                                    <p:cond delay="0"/>
+                                  </p:stCondLst>
+                                  <p:childTnLst>
+                                    <p:cmd type="call" cmd="playFrom(0.0)">
+                                      <p:cBhvr>
+                                        <p:cTn id="6" dur="34044" fill="hold"/>
+                                        <p:tgtEl>
+                                          <p:spTgt spid="5"/>
+                                        </p:tgtEl>
+                                      </p:cBhvr>
+                                    </p:cmd>
+                                  </p:childTnLst>
+                                </p:cTn>
+                              </p:par>
+                            </p:childTnLst>
+                          </p:cTn>
+                        </p:par>
+                      </p:childTnLst>
+                    </p:cTn>
+                  </p:par>
+                </p:childTnLst>
+              </p:cTn>
+              <p:prevCondLst>
+                <p:cond evt="onPrev" delay="0">
+                  <p:tgtEl>
+                    <p:sldTgt/>
+                  </p:tgtEl>
+                </p:cond>
+              </p:prevCondLst>
+              <p:nextCondLst>
+                <p:cond evt="onNext" delay="0">
+                  <p:tgtEl>
+                    <p:sldTgt/>
+                  </p:tgtEl>
+                </p:cond>
+              </p:nextCondLst>
+            </p:seq>
+            <p:audio>
+              <p:cMediaNode vol="80000" mute="1">
+                <p:cTn id="7" fill="hold" display="0">
+                  <p:stCondLst>
+                    <p:cond delay="indefinite"/>
+                  </p:stCondLst>
+                  <p:endCondLst>
+                    <p:cond evt="onStopAudio" delay="0">
+                      <p:tgtEl>
+                        <p:sldTgt/>
+                      </p:tgtEl>
+                    </p:cond>
+                  </p:endCondLst>
+                </p:cTn>
+                <p:tgtEl>
+                  <p:spTgt spid="5"/>
+                </p:tgtEl>
+              </p:cMediaNode>
+            </p:audio>
+          </p:childTnLst>
+        </p:cTn>
+      </p:par>
+    </p:tnLst>
+  </p:timing>
 </p:sld>
 </file>
 
@@ -8656,7 +10070,14 @@
         <p:cNvGrpSpPr/>
         <p:nvPr/>
       </p:nvGrpSpPr>
-      <p:grpSpPr/>
+      <p:grpSpPr>
+        <a:xfrm>
+          <a:off x="0" y="0"/>
+          <a:ext cx="0" cy="0"/>
+          <a:chOff x="0" y="0"/>
+          <a:chExt cx="0" cy="0"/>
+        </a:xfrm>
+      </p:grpSpPr>
       <p:pic>
         <p:nvPicPr>
           <p:cNvPr id="2" name="图片 1" descr="02_exercises-2"/>
@@ -8701,15 +10122,16 @@
           <a:bodyPr wrap="square" rtlCol="0" anchor="t">
             <a:spAutoFit/>
           </a:bodyPr>
-          <a:p>
-            <a:r>
-              <a:rPr lang="en-US" altLang="zh-CN">
+          <a:lstStyle/>
+          <a:p>
+            <a:r>
+              <a:rPr lang="en-US" altLang="zh-CN" dirty="0">
                 <a:latin typeface="Times New Roman" panose="02020503050405090304" charset="0"/>
                 <a:cs typeface="Times New Roman" panose="02020503050405090304" charset="0"/>
               </a:rPr>
               <a:t>3. Halve every pipe diameter. Wall decay should bite harder - why? (hydraulic radius / mass transfer; EPANET manual Ch.3).</a:t>
             </a:r>
-            <a:endParaRPr lang="en-US" altLang="zh-CN">
+            <a:endParaRPr lang="en-US" altLang="zh-CN" dirty="0">
               <a:latin typeface="Times New Roman" panose="02020503050405090304" charset="0"/>
               <a:cs typeface="Times New Roman" panose="02020503050405090304" charset="0"/>
             </a:endParaRPr>
@@ -8736,16 +10158,17 @@
           <a:bodyPr wrap="square" rtlCol="0" anchor="t">
             <a:spAutoFit/>
           </a:bodyPr>
-          <a:p>
-            <a:r>
-              <a:rPr lang="en-US" altLang="zh-CN">
+          <a:lstStyle/>
+          <a:p>
+            <a:r>
+              <a:rPr lang="en-US" altLang="zh-CN" dirty="0">
                 <a:latin typeface="Times New Roman" panose="02020503050405090304" charset="0"/>
                 <a:cs typeface="Times New Roman" panose="02020503050405090304" charset="0"/>
                 <a:sym typeface="+mn-ea"/>
               </a:rPr>
               <a:t>Results: </a:t>
             </a:r>
-            <a:endParaRPr lang="en-US" altLang="zh-CN">
+            <a:endParaRPr lang="en-US" altLang="zh-CN" dirty="0">
               <a:latin typeface="Times New Roman" panose="02020503050405090304" charset="0"/>
               <a:cs typeface="Times New Roman" panose="02020503050405090304" charset="0"/>
               <a:sym typeface="+mn-ea"/>
@@ -8753,59 +10176,59 @@
           </a:p>
           <a:p>
             <a:r>
-              <a:rPr lang="en-US" altLang="zh-CN">
+              <a:rPr lang="en-US" altLang="zh-CN" dirty="0">
                 <a:latin typeface="Times New Roman" panose="02020503050405090304" charset="0"/>
                 <a:cs typeface="Times New Roman" panose="02020503050405090304" charset="0"/>
               </a:rPr>
               <a:t>Node 20/40 concentration is close to or equal to zero—these nodes did not receive any water at all  </a:t>
             </a:r>
-            <a:endParaRPr lang="en-US" altLang="zh-CN">
+            <a:endParaRPr lang="en-US" altLang="zh-CN" dirty="0">
               <a:latin typeface="Times New Roman" panose="02020503050405090304" charset="0"/>
               <a:cs typeface="Times New Roman" panose="02020503050405090304" charset="0"/>
             </a:endParaRPr>
           </a:p>
           <a:p>
             <a:r>
-              <a:rPr lang="en-US" altLang="zh-CN">
+              <a:rPr lang="en-US" altLang="zh-CN" dirty="0">
                 <a:latin typeface="Times New Roman" panose="02020503050405090304" charset="0"/>
                 <a:cs typeface="Times New Roman" panose="02020503050405090304" charset="0"/>
               </a:rPr>
               <a:t>Node 15/35 concentration increased—the flow path was reconfigured, and water bypassed the tank  </a:t>
             </a:r>
-            <a:endParaRPr lang="en-US" altLang="zh-CN">
+            <a:endParaRPr lang="en-US" altLang="zh-CN" dirty="0">
               <a:latin typeface="Times New Roman" panose="02020503050405090304" charset="0"/>
               <a:cs typeface="Times New Roman" panose="02020503050405090304" charset="0"/>
             </a:endParaRPr>
           </a:p>
           <a:p>
-            <a:endParaRPr lang="en-US" altLang="zh-CN">
+            <a:endParaRPr lang="en-US" altLang="zh-CN" dirty="0">
               <a:latin typeface="Times New Roman" panose="02020503050405090304" charset="0"/>
               <a:cs typeface="Times New Roman" panose="02020503050405090304" charset="0"/>
             </a:endParaRPr>
           </a:p>
           <a:p>
             <a:r>
-              <a:rPr lang="en-US" altLang="zh-CN">
+              <a:rPr lang="en-US" altLang="zh-CN" dirty="0">
                 <a:latin typeface="Times New Roman" panose="02020503050405090304" charset="0"/>
                 <a:cs typeface="Times New Roman" panose="02020503050405090304" charset="0"/>
               </a:rPr>
               <a:t>The curve is highly irregular, with "breakpoints" and "jumps," indicating the network is in a </a:t>
             </a:r>
             <a:r>
-              <a:rPr lang="en-US" altLang="zh-CN" b="1">
+              <a:rPr lang="en-US" altLang="zh-CN" b="1" dirty="0">
                 <a:latin typeface="Times New Roman" panose="02020503050405090304" charset="0"/>
                 <a:cs typeface="Times New Roman" panose="02020503050405090304" charset="0"/>
               </a:rPr>
               <a:t>hydraulically infeasible </a:t>
             </a:r>
             <a:r>
-              <a:rPr lang="en-US" altLang="zh-CN">
+              <a:rPr lang="en-US" altLang="zh-CN" dirty="0">
                 <a:latin typeface="Times New Roman" panose="02020503050405090304" charset="0"/>
                 <a:cs typeface="Times New Roman" panose="02020503050405090304" charset="0"/>
               </a:rPr>
               <a:t>state</a:t>
             </a:r>
-            <a:endParaRPr lang="zh-CN" altLang="en-US">
+            <a:endParaRPr lang="zh-CN" altLang="en-US" dirty="0">
               <a:latin typeface="Times New Roman" panose="02020503050405090304" charset="0"/>
               <a:cs typeface="Times New Roman" panose="02020503050405090304" charset="0"/>
             </a:endParaRPr>
@@ -8832,30 +10255,38 @@
           <a:bodyPr wrap="square" rtlCol="0" anchor="t">
             <a:spAutoFit/>
           </a:bodyPr>
-          <a:p>
-            <a:r>
-              <a:rPr lang="en-US" altLang="zh-CN">
+          <a:lstStyle/>
+          <a:p>
+            <a:r>
+              <a:rPr lang="en-US" altLang="zh-CN" dirty="0">
                 <a:latin typeface="Times New Roman" panose="02020503050405090304" charset="0"/>
                 <a:cs typeface="Times New Roman" panose="02020503050405090304" charset="0"/>
               </a:rPr>
               <a:t>wall reaction--4/d*k</a:t>
             </a:r>
             <a:r>
-              <a:rPr lang="en-US" altLang="zh-CN" baseline="-25000">
+              <a:rPr lang="en-US" altLang="zh-CN" baseline="-25000" dirty="0">
                 <a:latin typeface="Times New Roman" panose="02020503050405090304" charset="0"/>
                 <a:cs typeface="Times New Roman" panose="02020503050405090304" charset="0"/>
               </a:rPr>
               <a:t>w</a:t>
             </a:r>
             <a:r>
-              <a:rPr lang="en-US" altLang="zh-CN">
+              <a:rPr lang="zh-CN" altLang="en-US" baseline="-25000" dirty="0">
+                <a:latin typeface="Times New Roman" panose="02020503050405090304" charset="0"/>
+                <a:cs typeface="Times New Roman" panose="02020503050405090304" charset="0"/>
+              </a:rPr>
+              <a:t>  </a:t>
+            </a:r>
+            <a:r>
+              <a:rPr lang="en-US" altLang="zh-CN" dirty="0">
                 <a:latin typeface="Times New Roman" panose="02020503050405090304" charset="0"/>
                 <a:cs typeface="Times New Roman" panose="02020503050405090304" charset="0"/>
               </a:rPr>
               <a:t>(</a:t>
             </a:r>
             <a:r>
-              <a:rPr lang="en-US" altLang="zh-CN">
+              <a:rPr lang="en-US" altLang="zh-CN" dirty="0">
                 <a:latin typeface="Times New Roman" panose="02020503050405090304" charset="0"/>
                 <a:cs typeface="Times New Roman" panose="02020503050405090304" charset="0"/>
                 <a:sym typeface="+mn-ea"/>
@@ -8863,94 +10294,225 @@
               <a:t>EPANET manual</a:t>
             </a:r>
             <a:r>
-              <a:rPr lang="en-US" altLang="zh-CN">
+              <a:rPr lang="en-US" altLang="zh-CN" dirty="0">
                 <a:latin typeface="Times New Roman" panose="02020503050405090304" charset="0"/>
                 <a:cs typeface="Times New Roman" panose="02020503050405090304" charset="0"/>
               </a:rPr>
               <a:t>),              k</a:t>
             </a:r>
             <a:r>
-              <a:rPr lang="en-US" altLang="zh-CN" baseline="-25000">
+              <a:rPr lang="en-US" altLang="zh-CN" baseline="-25000" dirty="0">
                 <a:latin typeface="Times New Roman" panose="02020503050405090304" charset="0"/>
                 <a:cs typeface="Times New Roman" panose="02020503050405090304" charset="0"/>
               </a:rPr>
               <a:t>w1</a:t>
             </a:r>
             <a:r>
-              <a:rPr lang="en-US" altLang="zh-CN">
-                <a:latin typeface="Times New Roman" panose="02020503050405090304" charset="0"/>
-                <a:cs typeface="Times New Roman" panose="02020503050405090304" charset="0"/>
-              </a:rPr>
-              <a:t>*k</a:t>
-            </a:r>
-            <a:r>
-              <a:rPr lang="en-US" altLang="zh-CN" baseline="-25000">
+              <a:rPr lang="en-US" altLang="zh-CN" dirty="0">
+                <a:latin typeface="Times New Roman" panose="02020503050405090304" charset="0"/>
+                <a:cs typeface="Times New Roman" panose="02020503050405090304" charset="0"/>
+              </a:rPr>
+              <a:t>*</a:t>
+            </a:r>
+            <a:r>
+              <a:rPr lang="en-US" altLang="zh-CN" dirty="0" err="1">
+                <a:latin typeface="Times New Roman" panose="02020503050405090304" charset="0"/>
+                <a:cs typeface="Times New Roman" panose="02020503050405090304" charset="0"/>
+              </a:rPr>
+              <a:t>k</a:t>
+            </a:r>
+            <a:r>
+              <a:rPr lang="en-US" altLang="zh-CN" baseline="-25000" dirty="0" err="1">
                 <a:latin typeface="Times New Roman" panose="02020503050405090304" charset="0"/>
                 <a:cs typeface="Times New Roman" panose="02020503050405090304" charset="0"/>
               </a:rPr>
               <a:t>f</a:t>
             </a:r>
             <a:r>
-              <a:rPr lang="en-US" altLang="zh-CN">
+              <a:rPr lang="en-US" altLang="zh-CN" dirty="0">
                 <a:latin typeface="Times New Roman" panose="02020503050405090304" charset="0"/>
                 <a:cs typeface="Times New Roman" panose="02020503050405090304" charset="0"/>
               </a:rPr>
               <a:t>/[r</a:t>
             </a:r>
             <a:r>
-              <a:rPr lang="en-US" altLang="zh-CN" baseline="-25000">
+              <a:rPr lang="en-US" altLang="zh-CN" baseline="-25000" dirty="0">
                 <a:latin typeface="Times New Roman" panose="02020503050405090304" charset="0"/>
                 <a:cs typeface="Times New Roman" panose="02020503050405090304" charset="0"/>
               </a:rPr>
               <a:t>h</a:t>
             </a:r>
             <a:r>
-              <a:rPr lang="en-US" altLang="zh-CN">
-                <a:latin typeface="Times New Roman" panose="02020503050405090304" charset="0"/>
-                <a:cs typeface="Times New Roman" panose="02020503050405090304" charset="0"/>
-              </a:rPr>
-              <a:t>(k</a:t>
-            </a:r>
-            <a:r>
-              <a:rPr lang="en-US" altLang="zh-CN" baseline="-25000">
+              <a:rPr lang="en-US" altLang="zh-CN" dirty="0">
+                <a:latin typeface="Times New Roman" panose="02020503050405090304" charset="0"/>
+                <a:cs typeface="Times New Roman" panose="02020503050405090304" charset="0"/>
+              </a:rPr>
+              <a:t>(</a:t>
+            </a:r>
+            <a:r>
+              <a:rPr lang="en-US" altLang="zh-CN" dirty="0" err="1">
+                <a:latin typeface="Times New Roman" panose="02020503050405090304" charset="0"/>
+                <a:cs typeface="Times New Roman" panose="02020503050405090304" charset="0"/>
+              </a:rPr>
+              <a:t>k</a:t>
+            </a:r>
+            <a:r>
+              <a:rPr lang="en-US" altLang="zh-CN" baseline="-25000" dirty="0" err="1">
                 <a:latin typeface="Times New Roman" panose="02020503050405090304" charset="0"/>
                 <a:cs typeface="Times New Roman" panose="02020503050405090304" charset="0"/>
               </a:rPr>
               <a:t>w</a:t>
             </a:r>
             <a:r>
-              <a:rPr lang="en-US" altLang="zh-CN">
+              <a:rPr lang="en-US" altLang="zh-CN" dirty="0" err="1">
                 <a:latin typeface="Times New Roman" panose="02020503050405090304" charset="0"/>
                 <a:cs typeface="Times New Roman" panose="02020503050405090304" charset="0"/>
               </a:rPr>
               <a:t>+k</a:t>
             </a:r>
             <a:r>
-              <a:rPr lang="en-US" altLang="zh-CN" baseline="-25000">
+              <a:rPr lang="en-US" altLang="zh-CN" baseline="-25000" dirty="0" err="1">
                 <a:latin typeface="Times New Roman" panose="02020503050405090304" charset="0"/>
                 <a:cs typeface="Times New Roman" panose="02020503050405090304" charset="0"/>
               </a:rPr>
               <a:t>f</a:t>
             </a:r>
             <a:r>
-              <a:rPr lang="en-US" altLang="zh-CN">
+              <a:rPr lang="en-US" altLang="zh-CN" dirty="0">
                 <a:latin typeface="Times New Roman" panose="02020503050405090304" charset="0"/>
                 <a:cs typeface="Times New Roman" panose="02020503050405090304" charset="0"/>
               </a:rPr>
               <a:t>)] (Vasconcelos et al., 1997)</a:t>
             </a:r>
-            <a:endParaRPr lang="en-US" altLang="zh-CN">
+            <a:endParaRPr lang="en-US" altLang="zh-CN" dirty="0">
               <a:latin typeface="Times New Roman" panose="02020503050405090304" charset="0"/>
               <a:cs typeface="Times New Roman" panose="02020503050405090304" charset="0"/>
             </a:endParaRPr>
           </a:p>
         </p:txBody>
       </p:sp>
+      <p:pic>
+        <p:nvPicPr>
+          <p:cNvPr id="6" name="Audio Recording 2026年6月3日 22:39:02">
+            <a:hlinkClick r:id="" action="ppaction://media"/>
+          </p:cNvPr>
+          <p:cNvPicPr>
+            <a:picLocks noChangeAspect="1"/>
+          </p:cNvPicPr>
+          <p:nvPr>
+            <a:audioFile r:link="rId2"/>
+            <p:extLst>
+              <p:ext uri="{DAA4B4D4-6D71-4841-9C94-3DE7FCFB9230}">
+                <p14:media xmlns:p14="http://schemas.microsoft.com/office/powerpoint/2010/main" r:embed="rId3"/>
+              </p:ext>
+            </p:extLst>
+          </p:nvPr>
+        </p:nvPicPr>
+        <p:blipFill>
+          <a:blip r:embed="rId4"/>
+          <a:stretch>
+            <a:fillRect/>
+          </a:stretch>
+        </p:blipFill>
+        <p:spPr>
+          <a:xfrm>
+            <a:off x="11281410" y="6115685"/>
+            <a:ext cx="742315" cy="742315"/>
+          </a:xfrm>
+          <a:prstGeom prst="rect">
+            <a:avLst/>
+          </a:prstGeom>
+        </p:spPr>
+      </p:pic>
     </p:spTree>
   </p:cSld>
   <p:clrMapOvr>
     <a:masterClrMapping/>
   </p:clrMapOvr>
+  <p:timing>
+    <p:tnLst>
+      <p:par>
+        <p:cTn id="1" dur="indefinite" restart="never" nodeType="tmRoot">
+          <p:childTnLst>
+            <p:seq concurrent="1" nextAc="seek">
+              <p:cTn id="2" dur="indefinite" nodeType="mainSeq">
+                <p:childTnLst>
+                  <p:par>
+                    <p:cTn id="3" fill="hold">
+                      <p:stCondLst>
+                        <p:cond delay="indefinite"/>
+                      </p:stCondLst>
+                      <p:childTnLst>
+                        <p:par>
+                          <p:cTn id="4" fill="hold">
+                            <p:stCondLst>
+                              <p:cond delay="0"/>
+                            </p:stCondLst>
+                            <p:childTnLst>
+                              <p:par>
+                                <p:cTn id="5" presetID="1" presetClass="mediacall" presetSubtype="0" fill="hold" nodeType="clickEffect">
+                                  <p:stCondLst>
+                                    <p:cond delay="0"/>
+                                  </p:stCondLst>
+                                  <p:childTnLst>
+                                    <p:cmd type="call" cmd="playFrom(0.0)">
+                                      <p:cBhvr>
+                                        <p:cTn id="6" dur="40252" fill="hold"/>
+                                        <p:tgtEl>
+                                          <p:spTgt spid="6"/>
+                                        </p:tgtEl>
+                                      </p:cBhvr>
+                                    </p:cmd>
+                                  </p:childTnLst>
+                                </p:cTn>
+                              </p:par>
+                            </p:childTnLst>
+                          </p:cTn>
+                        </p:par>
+                      </p:childTnLst>
+                    </p:cTn>
+                  </p:par>
+                </p:childTnLst>
+              </p:cTn>
+              <p:prevCondLst>
+                <p:cond evt="onPrev" delay="0">
+                  <p:tgtEl>
+                    <p:sldTgt/>
+                  </p:tgtEl>
+                </p:cond>
+              </p:prevCondLst>
+              <p:nextCondLst>
+                <p:cond evt="onNext" delay="0">
+                  <p:tgtEl>
+                    <p:sldTgt/>
+                  </p:tgtEl>
+                </p:cond>
+              </p:nextCondLst>
+            </p:seq>
+            <p:audio>
+              <p:cMediaNode vol="80000" mute="1">
+                <p:cTn id="7" fill="hold" display="0">
+                  <p:stCondLst>
+                    <p:cond delay="indefinite"/>
+                  </p:stCondLst>
+                  <p:endCondLst>
+                    <p:cond evt="onStopAudio" delay="0">
+                      <p:tgtEl>
+                        <p:sldTgt/>
+                      </p:tgtEl>
+                    </p:cond>
+                  </p:endCondLst>
+                </p:cTn>
+                <p:tgtEl>
+                  <p:spTgt spid="6"/>
+                </p:tgtEl>
+              </p:cMediaNode>
+            </p:audio>
+          </p:childTnLst>
+        </p:cTn>
+      </p:par>
+    </p:tnLst>
+  </p:timing>
 </p:sld>
 </file>
 
@@ -8963,7 +10525,14 @@
         <p:cNvGrpSpPr/>
         <p:nvPr/>
       </p:nvGrpSpPr>
-      <p:grpSpPr/>
+      <p:grpSpPr>
+        <a:xfrm>
+          <a:off x="0" y="0"/>
+          <a:ext cx="0" cy="0"/>
+          <a:chOff x="0" y="0"/>
+          <a:chExt cx="0" cy="0"/>
+        </a:xfrm>
+      </p:grpSpPr>
       <p:pic>
         <p:nvPicPr>
           <p:cNvPr id="2" name="图片 1" descr="02_exercises-4"/>
@@ -9008,15 +10577,16 @@
           <a:bodyPr wrap="square" rtlCol="0" anchor="t">
             <a:spAutoFit/>
           </a:bodyPr>
-          <a:p>
-            <a:r>
-              <a:rPr lang="en-US" altLang="zh-CN">
+          <a:lstStyle/>
+          <a:p>
+            <a:r>
+              <a:rPr lang="en-US" altLang="zh-CN" dirty="0">
                 <a:latin typeface="Times New Roman" panose="02020503050405090304" charset="0"/>
                 <a:cs typeface="Times New Roman" panose="02020503050405090304" charset="0"/>
               </a:rPr>
               <a:t>Results: Near-source nodes (10/60) closely follow the inlet pattern, but distant nodes (20/40) experience stronger fluctuations instead.  </a:t>
             </a:r>
-            <a:endParaRPr lang="zh-CN" altLang="en-US">
+            <a:endParaRPr lang="zh-CN" altLang="en-US" dirty="0">
               <a:latin typeface="Times New Roman" panose="02020503050405090304" charset="0"/>
               <a:cs typeface="Times New Roman" panose="02020503050405090304" charset="0"/>
             </a:endParaRPr>
@@ -9043,86 +10613,87 @@
           <a:bodyPr wrap="square" rtlCol="0" anchor="t">
             <a:spAutoFit/>
           </a:bodyPr>
-          <a:p>
-            <a:r>
-              <a:rPr lang="en-US" altLang="zh-CN">
+          <a:lstStyle/>
+          <a:p>
+            <a:r>
+              <a:rPr lang="en-US" altLang="zh-CN" dirty="0">
                 <a:latin typeface="Times New Roman" panose="02020503050405090304" charset="0"/>
                 <a:cs typeface="Times New Roman" panose="02020503050405090304" charset="0"/>
               </a:rPr>
               <a:t>The downstream residual chlorine curve is not simply a delayed or slightly reduced version of the inlet curve.  </a:t>
             </a:r>
-            <a:endParaRPr lang="en-US" altLang="zh-CN">
+            <a:endParaRPr lang="en-US" altLang="zh-CN" dirty="0">
               <a:latin typeface="Times New Roman" panose="02020503050405090304" charset="0"/>
               <a:cs typeface="Times New Roman" panose="02020503050405090304" charset="0"/>
             </a:endParaRPr>
           </a:p>
           <a:p>
-            <a:endParaRPr lang="en-US" altLang="zh-CN">
+            <a:endParaRPr lang="en-US" altLang="zh-CN" dirty="0">
               <a:latin typeface="Times New Roman" panose="02020503050405090304" charset="0"/>
               <a:cs typeface="Times New Roman" panose="02020503050405090304" charset="0"/>
             </a:endParaRPr>
           </a:p>
           <a:p>
             <a:r>
-              <a:rPr lang="en-US" altLang="zh-CN">
+              <a:rPr lang="en-US" altLang="zh-CN" dirty="0">
                 <a:latin typeface="Times New Roman" panose="02020503050405090304" charset="0"/>
                 <a:cs typeface="Times New Roman" panose="02020503050405090304" charset="0"/>
               </a:rPr>
               <a:t>The water travel time in pipelines varies, and in storage tanks, new and old water mix, which alters the shape of the curve.  </a:t>
             </a:r>
-            <a:endParaRPr lang="en-US" altLang="zh-CN">
+            <a:endParaRPr lang="en-US" altLang="zh-CN" dirty="0">
               <a:latin typeface="Times New Roman" panose="02020503050405090304" charset="0"/>
               <a:cs typeface="Times New Roman" panose="02020503050405090304" charset="0"/>
             </a:endParaRPr>
           </a:p>
           <a:p>
-            <a:endParaRPr lang="en-US" altLang="zh-CN">
+            <a:endParaRPr lang="en-US" altLang="zh-CN" dirty="0">
               <a:latin typeface="Times New Roman" panose="02020503050405090304" charset="0"/>
               <a:cs typeface="Times New Roman" panose="02020503050405090304" charset="0"/>
             </a:endParaRPr>
           </a:p>
           <a:p>
             <a:r>
-              <a:rPr lang="en-US" altLang="zh-CN">
+              <a:rPr lang="en-US" altLang="zh-CN" dirty="0">
                 <a:latin typeface="Times New Roman" panose="02020503050405090304" charset="0"/>
                 <a:cs typeface="Times New Roman" panose="02020503050405090304" charset="0"/>
               </a:rPr>
               <a:t>Therefore, it is essential to simulate the entire process using an EPANET/WNTR model.  </a:t>
             </a:r>
-            <a:endParaRPr lang="en-US" altLang="zh-CN">
+            <a:endParaRPr lang="en-US" altLang="zh-CN" dirty="0">
               <a:latin typeface="Times New Roman" panose="02020503050405090304" charset="0"/>
               <a:cs typeface="Times New Roman" panose="02020503050405090304" charset="0"/>
             </a:endParaRPr>
           </a:p>
           <a:p>
-            <a:endParaRPr lang="en-US" altLang="zh-CN">
+            <a:endParaRPr lang="en-US" altLang="zh-CN" dirty="0">
               <a:latin typeface="Times New Roman" panose="02020503050405090304" charset="0"/>
               <a:cs typeface="Times New Roman" panose="02020503050405090304" charset="0"/>
             </a:endParaRPr>
           </a:p>
           <a:p>
             <a:r>
-              <a:rPr lang="en-US" altLang="zh-CN">
+              <a:rPr lang="en-US" altLang="zh-CN" dirty="0">
                 <a:latin typeface="Times New Roman" panose="02020503050405090304" charset="0"/>
                 <a:cs typeface="Times New Roman" panose="02020503050405090304" charset="0"/>
               </a:rPr>
               <a:t>During calibration, only a few steady-state points should not be used; instead, the </a:t>
             </a:r>
             <a:r>
-              <a:rPr lang="en-US" altLang="zh-CN" b="1">
+              <a:rPr lang="en-US" altLang="zh-CN" b="1" dirty="0">
                 <a:latin typeface="Times New Roman" panose="02020503050405090304" charset="0"/>
                 <a:cs typeface="Times New Roman" panose="02020503050405090304" charset="0"/>
               </a:rPr>
               <a:t>full time series </a:t>
             </a:r>
             <a:r>
-              <a:rPr lang="en-US" altLang="zh-CN">
+              <a:rPr lang="en-US" altLang="zh-CN" dirty="0">
                 <a:latin typeface="Times New Roman" panose="02020503050405090304" charset="0"/>
                 <a:cs typeface="Times New Roman" panose="02020503050405090304" charset="0"/>
               </a:rPr>
               <a:t>must be applied.</a:t>
             </a:r>
-            <a:endParaRPr lang="zh-CN" altLang="en-US">
+            <a:endParaRPr lang="zh-CN" altLang="en-US" dirty="0">
               <a:latin typeface="Times New Roman" panose="02020503050405090304" charset="0"/>
               <a:cs typeface="Times New Roman" panose="02020503050405090304" charset="0"/>
             </a:endParaRPr>
@@ -9149,26 +10720,175 @@
           <a:bodyPr wrap="square" rtlCol="0" anchor="t">
             <a:spAutoFit/>
           </a:bodyPr>
-          <a:p>
-            <a:r>
-              <a:rPr lang="en-US" altLang="zh-CN">
-                <a:latin typeface="Times New Roman" panose="02020503050405090304" charset="0"/>
-                <a:cs typeface="Times New Roman" panose="02020503050405090304" charset="0"/>
-              </a:rPr>
-              <a:t>4. Use wn.add_source() with a pattern to make the inlet vary over time, mimicking a real inlet-monitor trace. This is exactly the boundary you'll impose later.</a:t>
-            </a:r>
-            <a:endParaRPr lang="zh-CN" altLang="en-US">
+          <a:lstStyle/>
+          <a:p>
+            <a:r>
+              <a:rPr lang="en-US" altLang="zh-CN" dirty="0">
+                <a:latin typeface="Times New Roman" panose="02020503050405090304" charset="0"/>
+                <a:cs typeface="Times New Roman" panose="02020503050405090304" charset="0"/>
+              </a:rPr>
+              <a:t>4. Use </a:t>
+            </a:r>
+            <a:r>
+              <a:rPr lang="en-US" altLang="zh-CN" dirty="0" err="1">
+                <a:latin typeface="Times New Roman" panose="02020503050405090304" charset="0"/>
+                <a:cs typeface="Times New Roman" panose="02020503050405090304" charset="0"/>
+              </a:rPr>
+              <a:t>wn.add_source</a:t>
+            </a:r>
+            <a:r>
+              <a:rPr lang="en-US" altLang="zh-CN" dirty="0">
+                <a:latin typeface="Times New Roman" panose="02020503050405090304" charset="0"/>
+                <a:cs typeface="Times New Roman" panose="02020503050405090304" charset="0"/>
+              </a:rPr>
+              <a:t>() with a pattern to make the inlet vary over time, mimicking a real inlet-monitor trace. </a:t>
+            </a:r>
+            <a:r>
+              <a:rPr lang="en-US" altLang="zh-CN" dirty="0">
+                <a:solidFill>
+                  <a:srgbClr val="FF0000"/>
+                </a:solidFill>
+                <a:latin typeface="Times New Roman" panose="02020503050405090304" charset="0"/>
+                <a:cs typeface="Times New Roman" panose="02020503050405090304" charset="0"/>
+              </a:rPr>
+              <a:t>This is exactly the boundary you'll impose later</a:t>
+            </a:r>
+            <a:r>
+              <a:rPr lang="en-US" altLang="zh-CN" dirty="0">
+                <a:latin typeface="Times New Roman" panose="02020503050405090304" charset="0"/>
+                <a:cs typeface="Times New Roman" panose="02020503050405090304" charset="0"/>
+              </a:rPr>
+              <a:t>.</a:t>
+            </a:r>
+            <a:endParaRPr lang="zh-CN" altLang="en-US" dirty="0">
               <a:latin typeface="Times New Roman" panose="02020503050405090304" charset="0"/>
               <a:cs typeface="Times New Roman" panose="02020503050405090304" charset="0"/>
             </a:endParaRPr>
           </a:p>
         </p:txBody>
       </p:sp>
+      <p:pic>
+        <p:nvPicPr>
+          <p:cNvPr id="7" name="Audio Recording 2026年6月3日 22:41:45">
+            <a:hlinkClick r:id="" action="ppaction://media"/>
+          </p:cNvPr>
+          <p:cNvPicPr>
+            <a:picLocks noChangeAspect="1"/>
+          </p:cNvPicPr>
+          <p:nvPr>
+            <a:audioFile r:link="rId2"/>
+            <p:extLst>
+              <p:ext uri="{DAA4B4D4-6D71-4841-9C94-3DE7FCFB9230}">
+                <p14:media xmlns:p14="http://schemas.microsoft.com/office/powerpoint/2010/main" r:embed="rId3"/>
+              </p:ext>
+            </p:extLst>
+          </p:nvPr>
+        </p:nvPicPr>
+        <p:blipFill>
+          <a:blip r:embed="rId4"/>
+          <a:stretch>
+            <a:fillRect/>
+          </a:stretch>
+        </p:blipFill>
+        <p:spPr>
+          <a:xfrm>
+            <a:off x="11217275" y="5936503"/>
+            <a:ext cx="812800" cy="812800"/>
+          </a:xfrm>
+          <a:prstGeom prst="rect">
+            <a:avLst/>
+          </a:prstGeom>
+        </p:spPr>
+      </p:pic>
     </p:spTree>
   </p:cSld>
   <p:clrMapOvr>
     <a:masterClrMapping/>
   </p:clrMapOvr>
+  <p:timing>
+    <p:tnLst>
+      <p:par>
+        <p:cTn id="1" dur="indefinite" restart="never" nodeType="tmRoot">
+          <p:childTnLst>
+            <p:seq concurrent="1" nextAc="seek">
+              <p:cTn id="2" dur="indefinite" nodeType="mainSeq">
+                <p:childTnLst>
+                  <p:par>
+                    <p:cTn id="3" fill="hold">
+                      <p:stCondLst>
+                        <p:cond delay="indefinite"/>
+                      </p:stCondLst>
+                      <p:childTnLst>
+                        <p:par>
+                          <p:cTn id="4" fill="hold">
+                            <p:stCondLst>
+                              <p:cond delay="0"/>
+                            </p:stCondLst>
+                            <p:childTnLst>
+                              <p:par>
+                                <p:cTn id="5" presetID="1" presetClass="mediacall" presetSubtype="0" fill="hold" nodeType="clickEffect">
+                                  <p:stCondLst>
+                                    <p:cond delay="0"/>
+                                  </p:stCondLst>
+                                  <p:childTnLst>
+                                    <p:cmd type="call" cmd="playFrom(0.0)">
+                                      <p:cBhvr>
+                                        <p:cTn id="6" dur="42300" fill="hold"/>
+                                        <p:tgtEl>
+                                          <p:spTgt spid="7"/>
+                                        </p:tgtEl>
+                                      </p:cBhvr>
+                                    </p:cmd>
+                                  </p:childTnLst>
+                                </p:cTn>
+                              </p:par>
+                            </p:childTnLst>
+                          </p:cTn>
+                        </p:par>
+                      </p:childTnLst>
+                    </p:cTn>
+                  </p:par>
+                </p:childTnLst>
+              </p:cTn>
+              <p:prevCondLst>
+                <p:cond evt="onPrev" delay="0">
+                  <p:tgtEl>
+                    <p:sldTgt/>
+                  </p:tgtEl>
+                </p:cond>
+              </p:prevCondLst>
+              <p:nextCondLst>
+                <p:cond evt="onNext" delay="0">
+                  <p:tgtEl>
+                    <p:sldTgt/>
+                  </p:tgtEl>
+                </p:cond>
+              </p:nextCondLst>
+            </p:seq>
+            <p:audio>
+              <p:cMediaNode vol="80000" mute="1">
+                <p:cTn id="7" fill="hold" display="0">
+                  <p:stCondLst>
+                    <p:cond delay="indefinite"/>
+                  </p:stCondLst>
+                  <p:endCondLst>
+                    <p:cond evt="onStopAudio" delay="0">
+                      <p:tgtEl>
+                        <p:sldTgt/>
+                      </p:tgtEl>
+                    </p:cond>
+                  </p:endCondLst>
+                </p:cTn>
+                <p:tgtEl>
+                  <p:spTgt spid="7"/>
+                </p:tgtEl>
+              </p:cMediaNode>
+            </p:audio>
+          </p:childTnLst>
+        </p:cTn>
+      </p:par>
+    </p:tnLst>
+  </p:timing>
 </p:sld>
 </file>
 
